--- a/site/slides/Week11_Recap.pptx
+++ b/site/slides/Week11_Recap.pptx
@@ -191,7 +191,7 @@
 <file path=ppt/revisionInfo.xml><?xml version="1.0" encoding="utf-8"?>
 <p1510:revInfo xmlns:a="http://schemas.openxmlformats.org/drawingml/2006/main" xmlns:r="http://schemas.openxmlformats.org/officeDocument/2006/relationships" xmlns:p1510="http://schemas.microsoft.com/office/powerpoint/2015/10/main">
   <p1510:revLst>
-    <p1510:client id="{E4BF0341-1187-4ED5-A616-AE2BD4D418EC}" v="296" dt="2025-04-08T01:41:00.627"/>
+    <p1510:client id="{D7EC3A52-1BE2-4ED5-ADC5-50902A0D9296}" v="31" dt="2026-04-07T04:01:35.645"/>
   </p1510:revLst>
 </p1510:revInfo>
 </file>
@@ -199,878 +199,128 @@
 <file path=ppt/changesInfos/changesInfo1.xml><?xml version="1.0" encoding="utf-8"?>
 <pc:chgInfo xmlns:a="http://schemas.openxmlformats.org/drawingml/2006/main" xmlns:r="http://schemas.openxmlformats.org/officeDocument/2006/relationships" xmlns:ac="http://schemas.microsoft.com/office/drawing/2013/main/command" xmlns:pc="http://schemas.microsoft.com/office/powerpoint/2013/main/command">
   <pc:docChgLst>
-    <pc:chgData name="dcszjin@nus.edu.sg" userId="cd05a825-544c-438a-9ba1-08e63db50b47" providerId="ADAL" clId="{6F17B5A8-8938-4206-8B5F-1DF9007C99AC}"/>
-    <pc:docChg chg="undo custSel addSld delSld modSld sldOrd">
-      <pc:chgData name="dcszjin@nus.edu.sg" userId="cd05a825-544c-438a-9ba1-08e63db50b47" providerId="ADAL" clId="{6F17B5A8-8938-4206-8B5F-1DF9007C99AC}" dt="2021-03-08T06:53:03.979" v="1111" actId="20577"/>
+    <pc:chgData name="Zhao Jin" userId="cd05a825-544c-438a-9ba1-08e63db50b47" providerId="ADAL" clId="{5DF3A229-1965-414E-AF54-F4C37AC7DF68}"/>
+    <pc:docChg chg="undo custSel modSld">
+      <pc:chgData name="Zhao Jin" userId="cd05a825-544c-438a-9ba1-08e63db50b47" providerId="ADAL" clId="{5DF3A229-1965-414E-AF54-F4C37AC7DF68}" dt="2026-04-07T04:01:41.691" v="52" actId="1076"/>
       <pc:docMkLst>
         <pc:docMk/>
       </pc:docMkLst>
       <pc:sldChg chg="modSp mod">
-        <pc:chgData name="dcszjin@nus.edu.sg" userId="cd05a825-544c-438a-9ba1-08e63db50b47" providerId="ADAL" clId="{6F17B5A8-8938-4206-8B5F-1DF9007C99AC}" dt="2021-03-01T07:08:40.699" v="1092" actId="1076"/>
+        <pc:chgData name="Zhao Jin" userId="cd05a825-544c-438a-9ba1-08e63db50b47" providerId="ADAL" clId="{5DF3A229-1965-414E-AF54-F4C37AC7DF68}" dt="2026-04-07T04:00:00.896" v="19"/>
         <pc:sldMkLst>
           <pc:docMk/>
-          <pc:sldMk cId="0" sldId="256"/>
+          <pc:sldMk cId="3056023935" sldId="596"/>
         </pc:sldMkLst>
+        <pc:spChg chg="mod">
+          <ac:chgData name="Zhao Jin" userId="cd05a825-544c-438a-9ba1-08e63db50b47" providerId="ADAL" clId="{5DF3A229-1965-414E-AF54-F4C37AC7DF68}" dt="2026-04-07T04:00:00.896" v="19"/>
+          <ac:spMkLst>
+            <pc:docMk/>
+            <pc:sldMk cId="3056023935" sldId="596"/>
+            <ac:spMk id="8" creationId="{99A0CDBB-C985-4D72-9121-5ED2A6FEB14D}"/>
+          </ac:spMkLst>
+        </pc:spChg>
+        <pc:spChg chg="mod">
+          <ac:chgData name="Zhao Jin" userId="cd05a825-544c-438a-9ba1-08e63db50b47" providerId="ADAL" clId="{5DF3A229-1965-414E-AF54-F4C37AC7DF68}" dt="2026-04-06T06:54:13.843" v="0" actId="20577"/>
+          <ac:spMkLst>
+            <pc:docMk/>
+            <pc:sldMk cId="3056023935" sldId="596"/>
+            <ac:spMk id="10" creationId="{46782AF2-AA4A-4243-84D2-A48349DF920C}"/>
+          </ac:spMkLst>
+        </pc:spChg>
+      </pc:sldChg>
+      <pc:sldChg chg="modSp mod modAnim">
+        <pc:chgData name="Zhao Jin" userId="cd05a825-544c-438a-9ba1-08e63db50b47" providerId="ADAL" clId="{5DF3A229-1965-414E-AF54-F4C37AC7DF68}" dt="2026-04-07T04:00:20.543" v="21"/>
+        <pc:sldMkLst>
+          <pc:docMk/>
+          <pc:sldMk cId="3047898109" sldId="605"/>
+        </pc:sldMkLst>
+        <pc:spChg chg="mod">
+          <ac:chgData name="Zhao Jin" userId="cd05a825-544c-438a-9ba1-08e63db50b47" providerId="ADAL" clId="{5DF3A229-1965-414E-AF54-F4C37AC7DF68}" dt="2026-04-07T03:59:30.555" v="3" actId="313"/>
+          <ac:spMkLst>
+            <pc:docMk/>
+            <pc:sldMk cId="3047898109" sldId="605"/>
+            <ac:spMk id="6" creationId="{B6757F58-AE25-465B-8055-66D4DA5A865B}"/>
+          </ac:spMkLst>
+        </pc:spChg>
       </pc:sldChg>
       <pc:sldChg chg="modSp mod">
-        <pc:chgData name="dcszjin@nus.edu.sg" userId="cd05a825-544c-438a-9ba1-08e63db50b47" providerId="ADAL" clId="{6F17B5A8-8938-4206-8B5F-1DF9007C99AC}" dt="2021-03-01T06:53:46.482" v="1091"/>
+        <pc:chgData name="Zhao Jin" userId="cd05a825-544c-438a-9ba1-08e63db50b47" providerId="ADAL" clId="{5DF3A229-1965-414E-AF54-F4C37AC7DF68}" dt="2026-04-07T04:01:41.691" v="52" actId="1076"/>
         <pc:sldMkLst>
           <pc:docMk/>
-          <pc:sldMk cId="4078418712" sldId="525"/>
+          <pc:sldMk cId="4089006062" sldId="642"/>
         </pc:sldMkLst>
-      </pc:sldChg>
-      <pc:sldChg chg="modSp add del">
-        <pc:chgData name="dcszjin@nus.edu.sg" userId="cd05a825-544c-438a-9ba1-08e63db50b47" providerId="ADAL" clId="{6F17B5A8-8938-4206-8B5F-1DF9007C99AC}" dt="2021-03-01T06:53:41.009" v="1088"/>
-        <pc:sldMkLst>
-          <pc:docMk/>
-          <pc:sldMk cId="1427618944" sldId="553"/>
-        </pc:sldMkLst>
-      </pc:sldChg>
-      <pc:sldChg chg="del">
-        <pc:chgData name="dcszjin@nus.edu.sg" userId="cd05a825-544c-438a-9ba1-08e63db50b47" providerId="ADAL" clId="{6F17B5A8-8938-4206-8B5F-1DF9007C99AC}" dt="2021-03-01T06:25:00.903" v="56" actId="47"/>
-        <pc:sldMkLst>
-          <pc:docMk/>
-          <pc:sldMk cId="1663851036" sldId="559"/>
-        </pc:sldMkLst>
-      </pc:sldChg>
-      <pc:sldChg chg="del">
-        <pc:chgData name="dcszjin@nus.edu.sg" userId="cd05a825-544c-438a-9ba1-08e63db50b47" providerId="ADAL" clId="{6F17B5A8-8938-4206-8B5F-1DF9007C99AC}" dt="2021-03-01T06:25:00.903" v="56" actId="47"/>
-        <pc:sldMkLst>
-          <pc:docMk/>
-          <pc:sldMk cId="1971208294" sldId="560"/>
-        </pc:sldMkLst>
-      </pc:sldChg>
-      <pc:sldChg chg="del">
-        <pc:chgData name="dcszjin@nus.edu.sg" userId="cd05a825-544c-438a-9ba1-08e63db50b47" providerId="ADAL" clId="{6F17B5A8-8938-4206-8B5F-1DF9007C99AC}" dt="2021-03-01T06:25:00.903" v="56" actId="47"/>
-        <pc:sldMkLst>
-          <pc:docMk/>
-          <pc:sldMk cId="894186310" sldId="564"/>
-        </pc:sldMkLst>
-      </pc:sldChg>
-      <pc:sldChg chg="del">
-        <pc:chgData name="dcszjin@nus.edu.sg" userId="cd05a825-544c-438a-9ba1-08e63db50b47" providerId="ADAL" clId="{6F17B5A8-8938-4206-8B5F-1DF9007C99AC}" dt="2021-03-01T06:25:00.903" v="56" actId="47"/>
-        <pc:sldMkLst>
-          <pc:docMk/>
-          <pc:sldMk cId="4156536479" sldId="590"/>
-        </pc:sldMkLst>
-      </pc:sldChg>
-      <pc:sldChg chg="del">
-        <pc:chgData name="dcszjin@nus.edu.sg" userId="cd05a825-544c-438a-9ba1-08e63db50b47" providerId="ADAL" clId="{6F17B5A8-8938-4206-8B5F-1DF9007C99AC}" dt="2021-03-01T06:25:00.903" v="56" actId="47"/>
-        <pc:sldMkLst>
-          <pc:docMk/>
-          <pc:sldMk cId="2217225800" sldId="594"/>
-        </pc:sldMkLst>
-      </pc:sldChg>
-      <pc:sldChg chg="del">
-        <pc:chgData name="dcszjin@nus.edu.sg" userId="cd05a825-544c-438a-9ba1-08e63db50b47" providerId="ADAL" clId="{6F17B5A8-8938-4206-8B5F-1DF9007C99AC}" dt="2021-03-01T06:25:00.903" v="56" actId="47"/>
-        <pc:sldMkLst>
-          <pc:docMk/>
-          <pc:sldMk cId="2419983458" sldId="595"/>
-        </pc:sldMkLst>
-      </pc:sldChg>
-      <pc:sldChg chg="addSp delSp modSp add mod ord delAnim">
-        <pc:chgData name="dcszjin@nus.edu.sg" userId="cd05a825-544c-438a-9ba1-08e63db50b47" providerId="ADAL" clId="{6F17B5A8-8938-4206-8B5F-1DF9007C99AC}" dt="2021-03-01T06:53:44.441" v="1090"/>
-        <pc:sldMkLst>
-          <pc:docMk/>
-          <pc:sldMk cId="1542002799" sldId="602"/>
-        </pc:sldMkLst>
-      </pc:sldChg>
-      <pc:sldChg chg="addSp delSp modSp add del mod addAnim delAnim">
-        <pc:chgData name="dcszjin@nus.edu.sg" userId="cd05a825-544c-438a-9ba1-08e63db50b47" providerId="ADAL" clId="{6F17B5A8-8938-4206-8B5F-1DF9007C99AC}" dt="2021-03-01T07:15:54.669" v="1096" actId="47"/>
-        <pc:sldMkLst>
-          <pc:docMk/>
-          <pc:sldMk cId="600747522" sldId="604"/>
-        </pc:sldMkLst>
-      </pc:sldChg>
-      <pc:sldChg chg="modSp add mod">
-        <pc:chgData name="dcszjin@nus.edu.sg" userId="cd05a825-544c-438a-9ba1-08e63db50b47" providerId="ADAL" clId="{6F17B5A8-8938-4206-8B5F-1DF9007C99AC}" dt="2021-03-01T06:53:31.297" v="1084"/>
-        <pc:sldMkLst>
-          <pc:docMk/>
-          <pc:sldMk cId="2489370454" sldId="605"/>
-        </pc:sldMkLst>
-      </pc:sldChg>
-      <pc:sldChg chg="delSp modSp add mod">
-        <pc:chgData name="dcszjin@nus.edu.sg" userId="cd05a825-544c-438a-9ba1-08e63db50b47" providerId="ADAL" clId="{6F17B5A8-8938-4206-8B5F-1DF9007C99AC}" dt="2021-03-01T07:17:37.118" v="1107" actId="478"/>
-        <pc:sldMkLst>
-          <pc:docMk/>
-          <pc:sldMk cId="640598186" sldId="606"/>
-        </pc:sldMkLst>
-      </pc:sldChg>
-      <pc:sldChg chg="addSp delSp modSp add del mod delAnim modAnim">
-        <pc:chgData name="dcszjin@nus.edu.sg" userId="cd05a825-544c-438a-9ba1-08e63db50b47" providerId="ADAL" clId="{6F17B5A8-8938-4206-8B5F-1DF9007C99AC}" dt="2021-03-01T06:37:08.889" v="418" actId="47"/>
-        <pc:sldMkLst>
-          <pc:docMk/>
-          <pc:sldMk cId="4199745321" sldId="619"/>
-        </pc:sldMkLst>
-      </pc:sldChg>
-      <pc:sldChg chg="modSp add">
-        <pc:chgData name="dcszjin@nus.edu.sg" userId="cd05a825-544c-438a-9ba1-08e63db50b47" providerId="ADAL" clId="{6F17B5A8-8938-4206-8B5F-1DF9007C99AC}" dt="2021-03-01T06:53:33.809" v="1085"/>
-        <pc:sldMkLst>
-          <pc:docMk/>
-          <pc:sldMk cId="282410985" sldId="620"/>
-        </pc:sldMkLst>
-      </pc:sldChg>
-      <pc:sldChg chg="add del">
-        <pc:chgData name="dcszjin@nus.edu.sg" userId="cd05a825-544c-438a-9ba1-08e63db50b47" providerId="ADAL" clId="{6F17B5A8-8938-4206-8B5F-1DF9007C99AC}" dt="2021-03-01T06:34:44.863" v="242" actId="47"/>
-        <pc:sldMkLst>
-          <pc:docMk/>
-          <pc:sldMk cId="846468992" sldId="621"/>
-        </pc:sldMkLst>
-      </pc:sldChg>
-      <pc:sldChg chg="addSp modSp add mod">
-        <pc:chgData name="dcszjin@nus.edu.sg" userId="cd05a825-544c-438a-9ba1-08e63db50b47" providerId="ADAL" clId="{6F17B5A8-8938-4206-8B5F-1DF9007C99AC}" dt="2021-03-01T06:53:35.760" v="1086"/>
-        <pc:sldMkLst>
-          <pc:docMk/>
-          <pc:sldMk cId="3503582036" sldId="622"/>
-        </pc:sldMkLst>
-      </pc:sldChg>
-      <pc:sldChg chg="modSp add">
-        <pc:chgData name="dcszjin@nus.edu.sg" userId="cd05a825-544c-438a-9ba1-08e63db50b47" providerId="ADAL" clId="{6F17B5A8-8938-4206-8B5F-1DF9007C99AC}" dt="2021-03-01T06:53:37.536" v="1087"/>
-        <pc:sldMkLst>
-          <pc:docMk/>
-          <pc:sldMk cId="1258830549" sldId="635"/>
-        </pc:sldMkLst>
-      </pc:sldChg>
-      <pc:sldChg chg="delSp modSp add del mod delAnim">
-        <pc:chgData name="dcszjin@nus.edu.sg" userId="cd05a825-544c-438a-9ba1-08e63db50b47" providerId="ADAL" clId="{6F17B5A8-8938-4206-8B5F-1DF9007C99AC}" dt="2021-03-01T06:38:19.926" v="441" actId="47"/>
-        <pc:sldMkLst>
-          <pc:docMk/>
-          <pc:sldMk cId="1364216338" sldId="636"/>
-        </pc:sldMkLst>
-      </pc:sldChg>
-      <pc:sldChg chg="addSp delSp modSp add del mod">
-        <pc:chgData name="dcszjin@nus.edu.sg" userId="cd05a825-544c-438a-9ba1-08e63db50b47" providerId="ADAL" clId="{6F17B5A8-8938-4206-8B5F-1DF9007C99AC}" dt="2021-03-01T06:49:01.783" v="721" actId="47"/>
-        <pc:sldMkLst>
-          <pc:docMk/>
-          <pc:sldMk cId="3364444345" sldId="636"/>
-        </pc:sldMkLst>
-      </pc:sldChg>
-      <pc:sldChg chg="add del">
-        <pc:chgData name="dcszjin@nus.edu.sg" userId="cd05a825-544c-438a-9ba1-08e63db50b47" providerId="ADAL" clId="{6F17B5A8-8938-4206-8B5F-1DF9007C99AC}" dt="2021-03-01T06:41:43.577" v="611"/>
-        <pc:sldMkLst>
-          <pc:docMk/>
-          <pc:sldMk cId="1109647801" sldId="637"/>
-        </pc:sldMkLst>
-      </pc:sldChg>
-      <pc:sldChg chg="addSp modSp add mod">
-        <pc:chgData name="dcszjin@nus.edu.sg" userId="cd05a825-544c-438a-9ba1-08e63db50b47" providerId="ADAL" clId="{6F17B5A8-8938-4206-8B5F-1DF9007C99AC}" dt="2021-03-08T06:53:03.979" v="1111" actId="20577"/>
-        <pc:sldMkLst>
-          <pc:docMk/>
-          <pc:sldMk cId="1235845528" sldId="637"/>
-        </pc:sldMkLst>
+        <pc:spChg chg="mod">
+          <ac:chgData name="Zhao Jin" userId="cd05a825-544c-438a-9ba1-08e63db50b47" providerId="ADAL" clId="{5DF3A229-1965-414E-AF54-F4C37AC7DF68}" dt="2026-04-07T04:01:41.691" v="52" actId="1076"/>
+          <ac:spMkLst>
+            <pc:docMk/>
+            <pc:sldMk cId="4089006062" sldId="642"/>
+            <ac:spMk id="13" creationId="{BF2076FD-ABA9-4E41-A999-DDB821DA1735}"/>
+          </ac:spMkLst>
+        </pc:spChg>
       </pc:sldChg>
     </pc:docChg>
   </pc:docChgLst>
   <pc:docChgLst>
-    <pc:chgData name="Zhao Jin" userId="cd05a825-544c-438a-9ba1-08e63db50b47" providerId="ADAL" clId="{6A3951C8-7780-4031-8A2B-7971BC0F9707}"/>
-    <pc:docChg chg="modSld">
-      <pc:chgData name="Zhao Jin" userId="cd05a825-544c-438a-9ba1-08e63db50b47" providerId="ADAL" clId="{6A3951C8-7780-4031-8A2B-7971BC0F9707}" dt="2021-01-27T06:40:05.693" v="157" actId="20577"/>
+    <pc:chgData name="Zhao Jin" userId="cd05a825-544c-438a-9ba1-08e63db50b47" providerId="ADAL" clId="{7346625B-7E8F-4E9B-A9F0-94C1DD70E907}"/>
+    <pc:docChg chg="undo redo custSel modSld">
+      <pc:chgData name="Zhao Jin" userId="cd05a825-544c-438a-9ba1-08e63db50b47" providerId="ADAL" clId="{7346625B-7E8F-4E9B-A9F0-94C1DD70E907}" dt="2026-03-30T02:19:06.123" v="422" actId="20577"/>
       <pc:docMkLst>
         <pc:docMk/>
       </pc:docMkLst>
-      <pc:sldChg chg="addSp modSp mod">
-        <pc:chgData name="Zhao Jin" userId="cd05a825-544c-438a-9ba1-08e63db50b47" providerId="ADAL" clId="{6A3951C8-7780-4031-8A2B-7971BC0F9707}" dt="2021-01-27T06:39:09.281" v="89" actId="1036"/>
+      <pc:sldChg chg="addSp delSp modSp mod modAnim">
+        <pc:chgData name="Zhao Jin" userId="cd05a825-544c-438a-9ba1-08e63db50b47" providerId="ADAL" clId="{7346625B-7E8F-4E9B-A9F0-94C1DD70E907}" dt="2026-03-30T02:18:49.438" v="409" actId="20577"/>
         <pc:sldMkLst>
           <pc:docMk/>
-          <pc:sldMk cId="3949125736" sldId="548"/>
+          <pc:sldMk cId="3056023935" sldId="596"/>
         </pc:sldMkLst>
+        <pc:spChg chg="mod">
+          <ac:chgData name="Zhao Jin" userId="cd05a825-544c-438a-9ba1-08e63db50b47" providerId="ADAL" clId="{7346625B-7E8F-4E9B-A9F0-94C1DD70E907}" dt="2026-03-30T02:15:24.055" v="257" actId="1076"/>
+          <ac:spMkLst>
+            <pc:docMk/>
+            <pc:sldMk cId="3056023935" sldId="596"/>
+            <ac:spMk id="8" creationId="{99A0CDBB-C985-4D72-9121-5ED2A6FEB14D}"/>
+          </ac:spMkLst>
+        </pc:spChg>
+        <pc:spChg chg="add del mod">
+          <ac:chgData name="Zhao Jin" userId="cd05a825-544c-438a-9ba1-08e63db50b47" providerId="ADAL" clId="{7346625B-7E8F-4E9B-A9F0-94C1DD70E907}" dt="2026-03-30T02:18:45.199" v="403" actId="6549"/>
+          <ac:spMkLst>
+            <pc:docMk/>
+            <pc:sldMk cId="3056023935" sldId="596"/>
+            <ac:spMk id="9" creationId="{00000000-0000-0000-0000-000000000000}"/>
+          </ac:spMkLst>
+        </pc:spChg>
+        <pc:spChg chg="mod">
+          <ac:chgData name="Zhao Jin" userId="cd05a825-544c-438a-9ba1-08e63db50b47" providerId="ADAL" clId="{7346625B-7E8F-4E9B-A9F0-94C1DD70E907}" dt="2026-03-30T02:18:49.438" v="409" actId="20577"/>
+          <ac:spMkLst>
+            <pc:docMk/>
+            <pc:sldMk cId="3056023935" sldId="596"/>
+            <ac:spMk id="10" creationId="{46782AF2-AA4A-4243-84D2-A48349DF920C}"/>
+          </ac:spMkLst>
+        </pc:spChg>
       </pc:sldChg>
-      <pc:sldChg chg="addSp modSp mod">
-        <pc:chgData name="Zhao Jin" userId="cd05a825-544c-438a-9ba1-08e63db50b47" providerId="ADAL" clId="{6A3951C8-7780-4031-8A2B-7971BC0F9707}" dt="2021-01-27T06:40:05.693" v="157" actId="20577"/>
-        <pc:sldMkLst>
-          <pc:docMk/>
-          <pc:sldMk cId="2939077141" sldId="549"/>
-        </pc:sldMkLst>
-      </pc:sldChg>
-    </pc:docChg>
-  </pc:docChgLst>
-  <pc:docChgLst>
-    <pc:chgData name="Zhao Jin" userId="cd05a825-544c-438a-9ba1-08e63db50b47" providerId="ADAL" clId="{40B02829-7445-394A-990C-032942059FD9}"/>
-    <pc:docChg chg="custSel modSld">
-      <pc:chgData name="Zhao Jin" userId="cd05a825-544c-438a-9ba1-08e63db50b47" providerId="ADAL" clId="{40B02829-7445-394A-990C-032942059FD9}" dt="2021-01-18T05:50:34.611" v="4" actId="478"/>
-      <pc:docMkLst>
-        <pc:docMk/>
-      </pc:docMkLst>
-      <pc:sldChg chg="delSp">
-        <pc:chgData name="Zhao Jin" userId="cd05a825-544c-438a-9ba1-08e63db50b47" providerId="ADAL" clId="{40B02829-7445-394A-990C-032942059FD9}" dt="2021-01-18T05:50:34.611" v="4" actId="478"/>
-        <pc:sldMkLst>
-          <pc:docMk/>
-          <pc:sldMk cId="3871162519" sldId="525"/>
-        </pc:sldMkLst>
-      </pc:sldChg>
-      <pc:sldChg chg="modSp">
-        <pc:chgData name="Zhao Jin" userId="cd05a825-544c-438a-9ba1-08e63db50b47" providerId="ADAL" clId="{40B02829-7445-394A-990C-032942059FD9}" dt="2021-01-18T05:50:03.685" v="3" actId="122"/>
-        <pc:sldMkLst>
-          <pc:docMk/>
-          <pc:sldMk cId="770306953" sldId="526"/>
-        </pc:sldMkLst>
-      </pc:sldChg>
-      <pc:sldChg chg="modAnim">
-        <pc:chgData name="Zhao Jin" userId="cd05a825-544c-438a-9ba1-08e63db50b47" providerId="ADAL" clId="{40B02829-7445-394A-990C-032942059FD9}" dt="2021-01-18T05:49:08.491" v="0"/>
-        <pc:sldMkLst>
-          <pc:docMk/>
-          <pc:sldMk cId="4288789163" sldId="527"/>
-        </pc:sldMkLst>
-      </pc:sldChg>
-    </pc:docChg>
-  </pc:docChgLst>
-  <pc:docChgLst>
-    <pc:chgData name="Zhao Jin" userId="cd05a825-544c-438a-9ba1-08e63db50b47" providerId="ADAL" clId="{32EF0D82-81D2-6D4F-9460-EA0BC5CA50C6}"/>
-    <pc:docChg chg="undo custSel addSld modSld">
-      <pc:chgData name="Zhao Jin" userId="cd05a825-544c-438a-9ba1-08e63db50b47" providerId="ADAL" clId="{32EF0D82-81D2-6D4F-9460-EA0BC5CA50C6}" dt="2021-04-05T05:38:23.615" v="93"/>
-      <pc:docMkLst>
-        <pc:docMk/>
-      </pc:docMkLst>
-      <pc:sldChg chg="addSp delSp modSp">
-        <pc:chgData name="Zhao Jin" userId="cd05a825-544c-438a-9ba1-08e63db50b47" providerId="ADAL" clId="{32EF0D82-81D2-6D4F-9460-EA0BC5CA50C6}" dt="2021-04-05T05:38:23.615" v="93"/>
+      <pc:sldChg chg="modSp mod">
+        <pc:chgData name="Zhao Jin" userId="cd05a825-544c-438a-9ba1-08e63db50b47" providerId="ADAL" clId="{7346625B-7E8F-4E9B-A9F0-94C1DD70E907}" dt="2026-03-30T02:17:13.604" v="314" actId="6549"/>
         <pc:sldMkLst>
           <pc:docMk/>
           <pc:sldMk cId="2840099445" sldId="602"/>
         </pc:sldMkLst>
-      </pc:sldChg>
-      <pc:sldChg chg="modSp">
-        <pc:chgData name="Zhao Jin" userId="cd05a825-544c-438a-9ba1-08e63db50b47" providerId="ADAL" clId="{32EF0D82-81D2-6D4F-9460-EA0BC5CA50C6}" dt="2021-04-05T05:33:42.597" v="88" actId="207"/>
-        <pc:sldMkLst>
-          <pc:docMk/>
-          <pc:sldMk cId="1302906930" sldId="654"/>
-        </pc:sldMkLst>
-      </pc:sldChg>
-      <pc:sldChg chg="modSp">
-        <pc:chgData name="Zhao Jin" userId="cd05a825-544c-438a-9ba1-08e63db50b47" providerId="ADAL" clId="{32EF0D82-81D2-6D4F-9460-EA0BC5CA50C6}" dt="2021-04-05T05:34:17.367" v="90" actId="207"/>
-        <pc:sldMkLst>
-          <pc:docMk/>
-          <pc:sldMk cId="2115053964" sldId="656"/>
-        </pc:sldMkLst>
-      </pc:sldChg>
-      <pc:sldChg chg="addSp delSp modSp add delAnim modAnim">
-        <pc:chgData name="Zhao Jin" userId="cd05a825-544c-438a-9ba1-08e63db50b47" providerId="ADAL" clId="{32EF0D82-81D2-6D4F-9460-EA0BC5CA50C6}" dt="2021-04-05T05:31:21.773" v="80" actId="20577"/>
-        <pc:sldMkLst>
-          <pc:docMk/>
-          <pc:sldMk cId="1792936429" sldId="658"/>
-        </pc:sldMkLst>
-      </pc:sldChg>
-    </pc:docChg>
-  </pc:docChgLst>
-  <pc:docChgLst>
-    <pc:chgData name="Zhao Jin" userId="cd05a825-544c-438a-9ba1-08e63db50b47" providerId="ADAL" clId="{867F3690-C100-40EE-A937-14612E9F3314}"/>
-    <pc:docChg chg="undo custSel addSld delSld modSld">
-      <pc:chgData name="Zhao Jin" userId="cd05a825-544c-438a-9ba1-08e63db50b47" providerId="ADAL" clId="{867F3690-C100-40EE-A937-14612E9F3314}" dt="2021-02-15T05:07:12.447" v="312" actId="1076"/>
-      <pc:docMkLst>
-        <pc:docMk/>
-      </pc:docMkLst>
-      <pc:sldChg chg="modSp mod">
-        <pc:chgData name="Zhao Jin" userId="cd05a825-544c-438a-9ba1-08e63db50b47" providerId="ADAL" clId="{867F3690-C100-40EE-A937-14612E9F3314}" dt="2021-02-10T03:53:02.282" v="0" actId="20577"/>
-        <pc:sldMkLst>
-          <pc:docMk/>
-          <pc:sldMk cId="0" sldId="256"/>
-        </pc:sldMkLst>
-      </pc:sldChg>
-      <pc:sldChg chg="modSp del">
-        <pc:chgData name="Zhao Jin" userId="cd05a825-544c-438a-9ba1-08e63db50b47" providerId="ADAL" clId="{867F3690-C100-40EE-A937-14612E9F3314}" dt="2021-02-11T11:12:55.303" v="2" actId="47"/>
-        <pc:sldMkLst>
-          <pc:docMk/>
-          <pc:sldMk cId="2775173622" sldId="524"/>
-        </pc:sldMkLst>
+        <pc:spChg chg="mod">
+          <ac:chgData name="Zhao Jin" userId="cd05a825-544c-438a-9ba1-08e63db50b47" providerId="ADAL" clId="{7346625B-7E8F-4E9B-A9F0-94C1DD70E907}" dt="2026-03-30T02:17:13.604" v="314" actId="6549"/>
+          <ac:spMkLst>
+            <pc:docMk/>
+            <pc:sldMk cId="2840099445" sldId="602"/>
+            <ac:spMk id="52" creationId="{00000000-0000-0000-0000-000000000000}"/>
+          </ac:spMkLst>
+        </pc:spChg>
       </pc:sldChg>
       <pc:sldChg chg="modSp mod">
-        <pc:chgData name="Zhao Jin" userId="cd05a825-544c-438a-9ba1-08e63db50b47" providerId="ADAL" clId="{867F3690-C100-40EE-A937-14612E9F3314}" dt="2021-02-11T11:16:16.653" v="199" actId="207"/>
-        <pc:sldMkLst>
-          <pc:docMk/>
-          <pc:sldMk cId="4078418712" sldId="525"/>
-        </pc:sldMkLst>
-      </pc:sldChg>
-      <pc:sldChg chg="modSp del">
-        <pc:chgData name="Zhao Jin" userId="cd05a825-544c-438a-9ba1-08e63db50b47" providerId="ADAL" clId="{867F3690-C100-40EE-A937-14612E9F3314}" dt="2021-02-11T11:12:55.303" v="2" actId="47"/>
-        <pc:sldMkLst>
-          <pc:docMk/>
-          <pc:sldMk cId="2882118053" sldId="552"/>
-        </pc:sldMkLst>
-      </pc:sldChg>
-      <pc:sldChg chg="modSp add mod">
-        <pc:chgData name="Zhao Jin" userId="cd05a825-544c-438a-9ba1-08e63db50b47" providerId="ADAL" clId="{867F3690-C100-40EE-A937-14612E9F3314}" dt="2021-02-15T04:57:13.323" v="201"/>
-        <pc:sldMkLst>
-          <pc:docMk/>
-          <pc:sldMk cId="1427618944" sldId="553"/>
-        </pc:sldMkLst>
-      </pc:sldChg>
-      <pc:sldChg chg="modSp del">
-        <pc:chgData name="Zhao Jin" userId="cd05a825-544c-438a-9ba1-08e63db50b47" providerId="ADAL" clId="{867F3690-C100-40EE-A937-14612E9F3314}" dt="2021-02-11T11:12:55.303" v="2" actId="47"/>
-        <pc:sldMkLst>
-          <pc:docMk/>
-          <pc:sldMk cId="2082920116" sldId="553"/>
-        </pc:sldMkLst>
-      </pc:sldChg>
-      <pc:sldChg chg="modSp del">
-        <pc:chgData name="Zhao Jin" userId="cd05a825-544c-438a-9ba1-08e63db50b47" providerId="ADAL" clId="{867F3690-C100-40EE-A937-14612E9F3314}" dt="2021-02-11T11:12:55.303" v="2" actId="47"/>
-        <pc:sldMkLst>
-          <pc:docMk/>
-          <pc:sldMk cId="1659983766" sldId="554"/>
-        </pc:sldMkLst>
-      </pc:sldChg>
-      <pc:sldChg chg="modSp del">
-        <pc:chgData name="Zhao Jin" userId="cd05a825-544c-438a-9ba1-08e63db50b47" providerId="ADAL" clId="{867F3690-C100-40EE-A937-14612E9F3314}" dt="2021-02-11T11:12:55.303" v="2" actId="47"/>
-        <pc:sldMkLst>
-          <pc:docMk/>
-          <pc:sldMk cId="686532275" sldId="558"/>
-        </pc:sldMkLst>
-      </pc:sldChg>
-      <pc:sldChg chg="modSp add del mod">
-        <pc:chgData name="Zhao Jin" userId="cd05a825-544c-438a-9ba1-08e63db50b47" providerId="ADAL" clId="{867F3690-C100-40EE-A937-14612E9F3314}" dt="2021-02-15T04:59:11.851" v="203" actId="207"/>
-        <pc:sldMkLst>
-          <pc:docMk/>
-          <pc:sldMk cId="1663851036" sldId="559"/>
-        </pc:sldMkLst>
-      </pc:sldChg>
-      <pc:sldChg chg="addSp delSp modSp add mod">
-        <pc:chgData name="Zhao Jin" userId="cd05a825-544c-438a-9ba1-08e63db50b47" providerId="ADAL" clId="{867F3690-C100-40EE-A937-14612E9F3314}" dt="2021-02-15T05:07:12.447" v="312" actId="1076"/>
-        <pc:sldMkLst>
-          <pc:docMk/>
-          <pc:sldMk cId="1971208294" sldId="560"/>
-        </pc:sldMkLst>
-      </pc:sldChg>
-      <pc:sldChg chg="modSp del">
-        <pc:chgData name="Zhao Jin" userId="cd05a825-544c-438a-9ba1-08e63db50b47" providerId="ADAL" clId="{867F3690-C100-40EE-A937-14612E9F3314}" dt="2021-02-11T11:12:55.303" v="2" actId="47"/>
-        <pc:sldMkLst>
-          <pc:docMk/>
-          <pc:sldMk cId="1986771488" sldId="561"/>
-        </pc:sldMkLst>
-      </pc:sldChg>
-      <pc:sldChg chg="modSp add mod">
-        <pc:chgData name="Zhao Jin" userId="cd05a825-544c-438a-9ba1-08e63db50b47" providerId="ADAL" clId="{867F3690-C100-40EE-A937-14612E9F3314}" dt="2021-02-11T11:14:08.750" v="27" actId="20577"/>
-        <pc:sldMkLst>
-          <pc:docMk/>
-          <pc:sldMk cId="894186310" sldId="564"/>
-        </pc:sldMkLst>
-      </pc:sldChg>
-      <pc:sldChg chg="modSp del">
-        <pc:chgData name="Zhao Jin" userId="cd05a825-544c-438a-9ba1-08e63db50b47" providerId="ADAL" clId="{867F3690-C100-40EE-A937-14612E9F3314}" dt="2021-02-11T11:12:55.303" v="2" actId="47"/>
-        <pc:sldMkLst>
-          <pc:docMk/>
-          <pc:sldMk cId="1276365520" sldId="564"/>
-        </pc:sldMkLst>
-      </pc:sldChg>
-      <pc:sldChg chg="modSp del">
-        <pc:chgData name="Zhao Jin" userId="cd05a825-544c-438a-9ba1-08e63db50b47" providerId="ADAL" clId="{867F3690-C100-40EE-A937-14612E9F3314}" dt="2021-02-11T11:12:55.303" v="2" actId="47"/>
-        <pc:sldMkLst>
-          <pc:docMk/>
-          <pc:sldMk cId="827193018" sldId="565"/>
-        </pc:sldMkLst>
-      </pc:sldChg>
-      <pc:sldChg chg="modSp del">
-        <pc:chgData name="Zhao Jin" userId="cd05a825-544c-438a-9ba1-08e63db50b47" providerId="ADAL" clId="{867F3690-C100-40EE-A937-14612E9F3314}" dt="2021-02-11T11:12:55.303" v="2" actId="47"/>
-        <pc:sldMkLst>
-          <pc:docMk/>
-          <pc:sldMk cId="3959984611" sldId="566"/>
-        </pc:sldMkLst>
-      </pc:sldChg>
-      <pc:sldChg chg="modSp del">
-        <pc:chgData name="Zhao Jin" userId="cd05a825-544c-438a-9ba1-08e63db50b47" providerId="ADAL" clId="{867F3690-C100-40EE-A937-14612E9F3314}" dt="2021-02-11T11:12:55.303" v="2" actId="47"/>
-        <pc:sldMkLst>
-          <pc:docMk/>
-          <pc:sldMk cId="2879329457" sldId="568"/>
-        </pc:sldMkLst>
-      </pc:sldChg>
-      <pc:sldChg chg="modSp del">
-        <pc:chgData name="Zhao Jin" userId="cd05a825-544c-438a-9ba1-08e63db50b47" providerId="ADAL" clId="{867F3690-C100-40EE-A937-14612E9F3314}" dt="2021-02-11T11:12:55.303" v="2" actId="47"/>
-        <pc:sldMkLst>
-          <pc:docMk/>
-          <pc:sldMk cId="4240540711" sldId="569"/>
-        </pc:sldMkLst>
-      </pc:sldChg>
-      <pc:sldChg chg="delSp modSp add mod delAnim">
-        <pc:chgData name="Zhao Jin" userId="cd05a825-544c-438a-9ba1-08e63db50b47" providerId="ADAL" clId="{867F3690-C100-40EE-A937-14612E9F3314}" dt="2021-02-15T04:58:14.889" v="202" actId="478"/>
-        <pc:sldMkLst>
-          <pc:docMk/>
-          <pc:sldMk cId="4156536479" sldId="590"/>
-        </pc:sldMkLst>
-      </pc:sldChg>
-      <pc:sldChg chg="modSp add mod">
-        <pc:chgData name="Zhao Jin" userId="cd05a825-544c-438a-9ba1-08e63db50b47" providerId="ADAL" clId="{867F3690-C100-40EE-A937-14612E9F3314}" dt="2021-02-11T11:13:35.741" v="11"/>
-        <pc:sldMkLst>
-          <pc:docMk/>
-          <pc:sldMk cId="2217225800" sldId="594"/>
-        </pc:sldMkLst>
-      </pc:sldChg>
-      <pc:sldChg chg="delSp modSp add mod">
-        <pc:chgData name="Zhao Jin" userId="cd05a825-544c-438a-9ba1-08e63db50b47" providerId="ADAL" clId="{867F3690-C100-40EE-A937-14612E9F3314}" dt="2021-02-11T11:13:40.184" v="13" actId="478"/>
-        <pc:sldMkLst>
-          <pc:docMk/>
-          <pc:sldMk cId="2419983458" sldId="595"/>
-        </pc:sldMkLst>
-      </pc:sldChg>
-    </pc:docChg>
-  </pc:docChgLst>
-  <pc:docChgLst>
-    <pc:chgData name="Zhao Jin" userId="cd05a825-544c-438a-9ba1-08e63db50b47" providerId="ADAL" clId="{78D6724E-8AE2-442D-8300-AB9E38F5FDF4}"/>
-    <pc:docChg chg="custSel modSld">
-      <pc:chgData name="Zhao Jin" userId="cd05a825-544c-438a-9ba1-08e63db50b47" providerId="ADAL" clId="{78D6724E-8AE2-442D-8300-AB9E38F5FDF4}" dt="2024-01-31T05:15:36.540" v="10" actId="27636"/>
-      <pc:docMkLst>
-        <pc:docMk/>
-      </pc:docMkLst>
-      <pc:sldChg chg="addSp modSp">
-        <pc:chgData name="Zhao Jin" userId="cd05a825-544c-438a-9ba1-08e63db50b47" providerId="ADAL" clId="{78D6724E-8AE2-442D-8300-AB9E38F5FDF4}" dt="2024-01-31T05:13:39.695" v="0"/>
-        <pc:sldMkLst>
-          <pc:docMk/>
-          <pc:sldMk cId="0" sldId="256"/>
-        </pc:sldMkLst>
-      </pc:sldChg>
-      <pc:sldChg chg="modSp mod">
-        <pc:chgData name="Zhao Jin" userId="cd05a825-544c-438a-9ba1-08e63db50b47" providerId="ADAL" clId="{78D6724E-8AE2-442D-8300-AB9E38F5FDF4}" dt="2024-01-31T05:15:36.540" v="10" actId="27636"/>
-        <pc:sldMkLst>
-          <pc:docMk/>
-          <pc:sldMk cId="4078418712" sldId="525"/>
-        </pc:sldMkLst>
-      </pc:sldChg>
-      <pc:sldChg chg="modSp">
-        <pc:chgData name="Zhao Jin" userId="cd05a825-544c-438a-9ba1-08e63db50b47" providerId="ADAL" clId="{78D6724E-8AE2-442D-8300-AB9E38F5FDF4}" dt="2024-01-31T05:15:36.455" v="1"/>
-        <pc:sldMkLst>
-          <pc:docMk/>
-          <pc:sldMk cId="3056023935" sldId="596"/>
-        </pc:sldMkLst>
-      </pc:sldChg>
-      <pc:sldChg chg="modSp">
-        <pc:chgData name="Zhao Jin" userId="cd05a825-544c-438a-9ba1-08e63db50b47" providerId="ADAL" clId="{78D6724E-8AE2-442D-8300-AB9E38F5FDF4}" dt="2024-01-31T05:15:36.455" v="1"/>
-        <pc:sldMkLst>
-          <pc:docMk/>
-          <pc:sldMk cId="2840099445" sldId="602"/>
-        </pc:sldMkLst>
-      </pc:sldChg>
-      <pc:sldChg chg="modSp">
-        <pc:chgData name="Zhao Jin" userId="cd05a825-544c-438a-9ba1-08e63db50b47" providerId="ADAL" clId="{78D6724E-8AE2-442D-8300-AB9E38F5FDF4}" dt="2024-01-31T05:15:36.455" v="1"/>
-        <pc:sldMkLst>
-          <pc:docMk/>
-          <pc:sldMk cId="657864584" sldId="603"/>
-        </pc:sldMkLst>
-      </pc:sldChg>
-      <pc:sldChg chg="modSp">
-        <pc:chgData name="Zhao Jin" userId="cd05a825-544c-438a-9ba1-08e63db50b47" providerId="ADAL" clId="{78D6724E-8AE2-442D-8300-AB9E38F5FDF4}" dt="2024-01-31T05:15:36.455" v="1"/>
-        <pc:sldMkLst>
-          <pc:docMk/>
-          <pc:sldMk cId="2266731302" sldId="604"/>
-        </pc:sldMkLst>
-      </pc:sldChg>
-      <pc:sldChg chg="modSp">
-        <pc:chgData name="Zhao Jin" userId="cd05a825-544c-438a-9ba1-08e63db50b47" providerId="ADAL" clId="{78D6724E-8AE2-442D-8300-AB9E38F5FDF4}" dt="2024-01-31T05:15:36.455" v="1"/>
-        <pc:sldMkLst>
-          <pc:docMk/>
-          <pc:sldMk cId="3047898109" sldId="605"/>
-        </pc:sldMkLst>
-      </pc:sldChg>
-      <pc:sldChg chg="modSp">
-        <pc:chgData name="Zhao Jin" userId="cd05a825-544c-438a-9ba1-08e63db50b47" providerId="ADAL" clId="{78D6724E-8AE2-442D-8300-AB9E38F5FDF4}" dt="2024-01-31T05:15:36.455" v="1"/>
-        <pc:sldMkLst>
-          <pc:docMk/>
-          <pc:sldMk cId="4000828616" sldId="626"/>
-        </pc:sldMkLst>
-      </pc:sldChg>
-      <pc:sldChg chg="modSp">
-        <pc:chgData name="Zhao Jin" userId="cd05a825-544c-438a-9ba1-08e63db50b47" providerId="ADAL" clId="{78D6724E-8AE2-442D-8300-AB9E38F5FDF4}" dt="2024-01-31T05:15:36.455" v="1"/>
-        <pc:sldMkLst>
-          <pc:docMk/>
-          <pc:sldMk cId="2964341788" sldId="627"/>
-        </pc:sldMkLst>
-      </pc:sldChg>
-      <pc:sldChg chg="modSp mod">
-        <pc:chgData name="Zhao Jin" userId="cd05a825-544c-438a-9ba1-08e63db50b47" providerId="ADAL" clId="{78D6724E-8AE2-442D-8300-AB9E38F5FDF4}" dt="2024-01-31T05:15:36.512" v="3" actId="27636"/>
-        <pc:sldMkLst>
-          <pc:docMk/>
-          <pc:sldMk cId="4089006062" sldId="642"/>
-        </pc:sldMkLst>
-      </pc:sldChg>
-      <pc:sldChg chg="modSp mod">
-        <pc:chgData name="Zhao Jin" userId="cd05a825-544c-438a-9ba1-08e63db50b47" providerId="ADAL" clId="{78D6724E-8AE2-442D-8300-AB9E38F5FDF4}" dt="2024-01-31T05:15:36.517" v="4" actId="27636"/>
-        <pc:sldMkLst>
-          <pc:docMk/>
-          <pc:sldMk cId="2663715734" sldId="647"/>
-        </pc:sldMkLst>
-      </pc:sldChg>
-      <pc:sldChg chg="modSp mod">
-        <pc:chgData name="Zhao Jin" userId="cd05a825-544c-438a-9ba1-08e63db50b47" providerId="ADAL" clId="{78D6724E-8AE2-442D-8300-AB9E38F5FDF4}" dt="2024-01-31T05:15:36.504" v="2" actId="27636"/>
-        <pc:sldMkLst>
-          <pc:docMk/>
-          <pc:sldMk cId="2331399055" sldId="648"/>
-        </pc:sldMkLst>
-      </pc:sldChg>
-      <pc:sldChg chg="modSp mod">
-        <pc:chgData name="Zhao Jin" userId="cd05a825-544c-438a-9ba1-08e63db50b47" providerId="ADAL" clId="{78D6724E-8AE2-442D-8300-AB9E38F5FDF4}" dt="2024-01-31T05:15:36.524" v="6" actId="27636"/>
-        <pc:sldMkLst>
-          <pc:docMk/>
-          <pc:sldMk cId="529358301" sldId="653"/>
-        </pc:sldMkLst>
-      </pc:sldChg>
-      <pc:sldChg chg="modSp mod">
-        <pc:chgData name="Zhao Jin" userId="cd05a825-544c-438a-9ba1-08e63db50b47" providerId="ADAL" clId="{78D6724E-8AE2-442D-8300-AB9E38F5FDF4}" dt="2024-01-31T05:15:36.521" v="5" actId="27636"/>
-        <pc:sldMkLst>
-          <pc:docMk/>
-          <pc:sldMk cId="1302906930" sldId="654"/>
-        </pc:sldMkLst>
-      </pc:sldChg>
-      <pc:sldChg chg="modSp mod">
-        <pc:chgData name="Zhao Jin" userId="cd05a825-544c-438a-9ba1-08e63db50b47" providerId="ADAL" clId="{78D6724E-8AE2-442D-8300-AB9E38F5FDF4}" dt="2024-01-31T05:15:36.530" v="7" actId="27636"/>
-        <pc:sldMkLst>
-          <pc:docMk/>
-          <pc:sldMk cId="285181288" sldId="655"/>
-        </pc:sldMkLst>
-      </pc:sldChg>
-      <pc:sldChg chg="modSp mod">
-        <pc:chgData name="Zhao Jin" userId="cd05a825-544c-438a-9ba1-08e63db50b47" providerId="ADAL" clId="{78D6724E-8AE2-442D-8300-AB9E38F5FDF4}" dt="2024-01-31T05:15:36.537" v="9" actId="27636"/>
-        <pc:sldMkLst>
-          <pc:docMk/>
-          <pc:sldMk cId="2115053964" sldId="656"/>
-        </pc:sldMkLst>
-      </pc:sldChg>
-      <pc:sldChg chg="modSp mod">
-        <pc:chgData name="Zhao Jin" userId="cd05a825-544c-438a-9ba1-08e63db50b47" providerId="ADAL" clId="{78D6724E-8AE2-442D-8300-AB9E38F5FDF4}" dt="2024-01-31T05:15:36.534" v="8" actId="27636"/>
-        <pc:sldMkLst>
-          <pc:docMk/>
-          <pc:sldMk cId="2183659375" sldId="657"/>
-        </pc:sldMkLst>
-      </pc:sldChg>
-      <pc:sldChg chg="modSp">
-        <pc:chgData name="Zhao Jin" userId="cd05a825-544c-438a-9ba1-08e63db50b47" providerId="ADAL" clId="{78D6724E-8AE2-442D-8300-AB9E38F5FDF4}" dt="2024-01-31T05:15:36.455" v="1"/>
-        <pc:sldMkLst>
-          <pc:docMk/>
-          <pc:sldMk cId="1792936429" sldId="658"/>
-        </pc:sldMkLst>
-      </pc:sldChg>
-    </pc:docChg>
-  </pc:docChgLst>
-  <pc:docChgLst>
-    <pc:chgData name="Zhao Jin" userId="cd05a825-544c-438a-9ba1-08e63db50b47" providerId="ADAL" clId="{D2C53CB4-D98E-4A4D-AB3B-F903C3FA77B9}"/>
-    <pc:docChg chg="undo custSel addSld delSld modSld">
-      <pc:chgData name="Zhao Jin" userId="cd05a825-544c-438a-9ba1-08e63db50b47" providerId="ADAL" clId="{D2C53CB4-D98E-4A4D-AB3B-F903C3FA77B9}" dt="2021-03-08T05:37:18.936" v="540"/>
-      <pc:docMkLst>
-        <pc:docMk/>
-      </pc:docMkLst>
-      <pc:sldChg chg="modSp mod">
-        <pc:chgData name="Zhao Jin" userId="cd05a825-544c-438a-9ba1-08e63db50b47" providerId="ADAL" clId="{D2C53CB4-D98E-4A4D-AB3B-F903C3FA77B9}" dt="2021-03-01T05:22:09.674" v="0" actId="20577"/>
-        <pc:sldMkLst>
-          <pc:docMk/>
-          <pc:sldMk cId="0" sldId="256"/>
-        </pc:sldMkLst>
-      </pc:sldChg>
-      <pc:sldChg chg="modAnim">
-        <pc:chgData name="Zhao Jin" userId="cd05a825-544c-438a-9ba1-08e63db50b47" providerId="ADAL" clId="{D2C53CB4-D98E-4A4D-AB3B-F903C3FA77B9}" dt="2021-03-08T05:37:18.936" v="540"/>
-        <pc:sldMkLst>
-          <pc:docMk/>
-          <pc:sldMk cId="1427618944" sldId="553"/>
-        </pc:sldMkLst>
-      </pc:sldChg>
-      <pc:sldChg chg="delSp modSp add del mod">
-        <pc:chgData name="Zhao Jin" userId="cd05a825-544c-438a-9ba1-08e63db50b47" providerId="ADAL" clId="{D2C53CB4-D98E-4A4D-AB3B-F903C3FA77B9}" dt="2021-03-08T05:22:34.940" v="208" actId="47"/>
-        <pc:sldMkLst>
-          <pc:docMk/>
-          <pc:sldMk cId="830535321" sldId="603"/>
-        </pc:sldMkLst>
-      </pc:sldChg>
-      <pc:sldChg chg="modSp mod">
-        <pc:chgData name="Zhao Jin" userId="cd05a825-544c-438a-9ba1-08e63db50b47" providerId="ADAL" clId="{D2C53CB4-D98E-4A4D-AB3B-F903C3FA77B9}" dt="2021-03-08T05:28:03.001" v="534" actId="20577"/>
-        <pc:sldMkLst>
-          <pc:docMk/>
-          <pc:sldMk cId="640598186" sldId="606"/>
-        </pc:sldMkLst>
-      </pc:sldChg>
-      <pc:sldChg chg="addSp delSp modSp add mod modAnim">
-        <pc:chgData name="Zhao Jin" userId="cd05a825-544c-438a-9ba1-08e63db50b47" providerId="ADAL" clId="{D2C53CB4-D98E-4A4D-AB3B-F903C3FA77B9}" dt="2021-03-08T05:36:39.052" v="539" actId="20577"/>
-        <pc:sldMkLst>
-          <pc:docMk/>
-          <pc:sldMk cId="3042096305" sldId="638"/>
-        </pc:sldMkLst>
-      </pc:sldChg>
-    </pc:docChg>
-  </pc:docChgLst>
-  <pc:docChgLst>
-    <pc:chgData name="Zhao Jin" userId="cd05a825-544c-438a-9ba1-08e63db50b47" providerId="ADAL" clId="{39F94C1A-1739-2146-9770-28C6D97CD74A}"/>
-    <pc:docChg chg="undo custSel addSld delSld modSld">
-      <pc:chgData name="Zhao Jin" userId="cd05a825-544c-438a-9ba1-08e63db50b47" providerId="ADAL" clId="{39F94C1A-1739-2146-9770-28C6D97CD74A}" dt="2021-01-27T04:54:28.852" v="864" actId="20577"/>
-      <pc:docMkLst>
-        <pc:docMk/>
-      </pc:docMkLst>
-      <pc:sldChg chg="modSp">
-        <pc:chgData name="Zhao Jin" userId="cd05a825-544c-438a-9ba1-08e63db50b47" providerId="ADAL" clId="{39F94C1A-1739-2146-9770-28C6D97CD74A}" dt="2021-01-27T04:29:55.834" v="1" actId="20577"/>
-        <pc:sldMkLst>
-          <pc:docMk/>
-          <pc:sldMk cId="0" sldId="256"/>
-        </pc:sldMkLst>
-      </pc:sldChg>
-      <pc:sldChg chg="addSp delSp modSp add delAnim modAnim">
-        <pc:chgData name="Zhao Jin" userId="cd05a825-544c-438a-9ba1-08e63db50b47" providerId="ADAL" clId="{39F94C1A-1739-2146-9770-28C6D97CD74A}" dt="2021-01-27T04:54:22.999" v="862" actId="20577"/>
-        <pc:sldMkLst>
-          <pc:docMk/>
-          <pc:sldMk cId="1492339910" sldId="485"/>
-        </pc:sldMkLst>
-      </pc:sldChg>
-      <pc:sldChg chg="addSp delSp modSp add modAnim">
-        <pc:chgData name="Zhao Jin" userId="cd05a825-544c-438a-9ba1-08e63db50b47" providerId="ADAL" clId="{39F94C1A-1739-2146-9770-28C6D97CD74A}" dt="2021-01-27T04:54:02.548" v="843" actId="20577"/>
-        <pc:sldMkLst>
-          <pc:docMk/>
-          <pc:sldMk cId="2775173622" sldId="524"/>
-        </pc:sldMkLst>
-      </pc:sldChg>
-      <pc:sldChg chg="add del">
-        <pc:chgData name="Zhao Jin" userId="cd05a825-544c-438a-9ba1-08e63db50b47" providerId="ADAL" clId="{39F94C1A-1739-2146-9770-28C6D97CD74A}" dt="2021-01-27T04:50:24.218" v="666"/>
-        <pc:sldMkLst>
-          <pc:docMk/>
-          <pc:sldMk cId="4023450610" sldId="524"/>
-        </pc:sldMkLst>
-      </pc:sldChg>
-      <pc:sldChg chg="del">
-        <pc:chgData name="Zhao Jin" userId="cd05a825-544c-438a-9ba1-08e63db50b47" providerId="ADAL" clId="{39F94C1A-1739-2146-9770-28C6D97CD74A}" dt="2021-01-27T04:30:02.278" v="7" actId="2696"/>
-        <pc:sldMkLst>
-          <pc:docMk/>
-          <pc:sldMk cId="3871162519" sldId="525"/>
-        </pc:sldMkLst>
-      </pc:sldChg>
-      <pc:sldChg chg="delSp modSp add">
-        <pc:chgData name="Zhao Jin" userId="cd05a825-544c-438a-9ba1-08e63db50b47" providerId="ADAL" clId="{39F94C1A-1739-2146-9770-28C6D97CD74A}" dt="2021-01-27T04:54:28.852" v="864" actId="20577"/>
-        <pc:sldMkLst>
-          <pc:docMk/>
-          <pc:sldMk cId="4078418712" sldId="525"/>
-        </pc:sldMkLst>
-      </pc:sldChg>
-      <pc:sldChg chg="del">
-        <pc:chgData name="Zhao Jin" userId="cd05a825-544c-438a-9ba1-08e63db50b47" providerId="ADAL" clId="{39F94C1A-1739-2146-9770-28C6D97CD74A}" dt="2021-01-27T04:30:02.169" v="2" actId="2696"/>
-        <pc:sldMkLst>
-          <pc:docMk/>
-          <pc:sldMk cId="2543678377" sldId="531"/>
-        </pc:sldMkLst>
-      </pc:sldChg>
-      <pc:sldChg chg="del">
-        <pc:chgData name="Zhao Jin" userId="cd05a825-544c-438a-9ba1-08e63db50b47" providerId="ADAL" clId="{39F94C1A-1739-2146-9770-28C6D97CD74A}" dt="2021-01-27T04:30:02.196" v="3" actId="2696"/>
-        <pc:sldMkLst>
-          <pc:docMk/>
-          <pc:sldMk cId="2025693378" sldId="532"/>
-        </pc:sldMkLst>
-      </pc:sldChg>
-      <pc:sldChg chg="del">
-        <pc:chgData name="Zhao Jin" userId="cd05a825-544c-438a-9ba1-08e63db50b47" providerId="ADAL" clId="{39F94C1A-1739-2146-9770-28C6D97CD74A}" dt="2021-01-27T04:30:02.254" v="5" actId="2696"/>
-        <pc:sldMkLst>
-          <pc:docMk/>
-          <pc:sldMk cId="266706937" sldId="533"/>
-        </pc:sldMkLst>
-      </pc:sldChg>
-      <pc:sldChg chg="del">
-        <pc:chgData name="Zhao Jin" userId="cd05a825-544c-438a-9ba1-08e63db50b47" providerId="ADAL" clId="{39F94C1A-1739-2146-9770-28C6D97CD74A}" dt="2021-01-27T04:30:02.230" v="4" actId="2696"/>
-        <pc:sldMkLst>
-          <pc:docMk/>
-          <pc:sldMk cId="3198948174" sldId="535"/>
-        </pc:sldMkLst>
-      </pc:sldChg>
-      <pc:sldChg chg="del">
-        <pc:chgData name="Zhao Jin" userId="cd05a825-544c-438a-9ba1-08e63db50b47" providerId="ADAL" clId="{39F94C1A-1739-2146-9770-28C6D97CD74A}" dt="2021-01-27T04:30:02.268" v="6" actId="2696"/>
-        <pc:sldMkLst>
-          <pc:docMk/>
-          <pc:sldMk cId="3984392134" sldId="537"/>
-        </pc:sldMkLst>
-      </pc:sldChg>
-      <pc:sldChg chg="modSp add">
-        <pc:chgData name="Zhao Jin" userId="cd05a825-544c-438a-9ba1-08e63db50b47" providerId="ADAL" clId="{39F94C1A-1739-2146-9770-28C6D97CD74A}" dt="2021-01-27T04:54:10.942" v="852" actId="20577"/>
-        <pc:sldMkLst>
-          <pc:docMk/>
-          <pc:sldMk cId="3949125736" sldId="548"/>
-        </pc:sldMkLst>
-      </pc:sldChg>
-      <pc:sldChg chg="modSp add">
-        <pc:chgData name="Zhao Jin" userId="cd05a825-544c-438a-9ba1-08e63db50b47" providerId="ADAL" clId="{39F94C1A-1739-2146-9770-28C6D97CD74A}" dt="2021-01-27T04:54:14.716" v="857" actId="20577"/>
-        <pc:sldMkLst>
-          <pc:docMk/>
-          <pc:sldMk cId="2939077141" sldId="549"/>
-        </pc:sldMkLst>
-      </pc:sldChg>
-    </pc:docChg>
-  </pc:docChgLst>
-  <pc:docChgLst>
-    <pc:chgData name="Zhao Jin" userId="cd05a825-544c-438a-9ba1-08e63db50b47" providerId="ADAL" clId="{FB8F02A0-9B99-4C9E-A1D1-3BF41D9621D7}"/>
-    <pc:docChg chg="undo custSel addSld delSld modSld sldOrd">
-      <pc:chgData name="Zhao Jin" userId="cd05a825-544c-438a-9ba1-08e63db50b47" providerId="ADAL" clId="{FB8F02A0-9B99-4C9E-A1D1-3BF41D9621D7}" dt="2021-02-08T02:21:29.074" v="2208" actId="20577"/>
-      <pc:docMkLst>
-        <pc:docMk/>
-      </pc:docMkLst>
-      <pc:sldChg chg="modSp">
-        <pc:chgData name="Zhao Jin" userId="cd05a825-544c-438a-9ba1-08e63db50b47" providerId="ADAL" clId="{FB8F02A0-9B99-4C9E-A1D1-3BF41D9621D7}" dt="2021-02-03T06:53:35.324" v="0"/>
-        <pc:sldMkLst>
-          <pc:docMk/>
-          <pc:sldMk cId="0" sldId="256"/>
-        </pc:sldMkLst>
-      </pc:sldChg>
-      <pc:sldChg chg="modSp del">
-        <pc:chgData name="Zhao Jin" userId="cd05a825-544c-438a-9ba1-08e63db50b47" providerId="ADAL" clId="{FB8F02A0-9B99-4C9E-A1D1-3BF41D9621D7}" dt="2021-02-03T07:15:04.758" v="547" actId="47"/>
-        <pc:sldMkLst>
-          <pc:docMk/>
-          <pc:sldMk cId="1492339910" sldId="485"/>
-        </pc:sldMkLst>
-      </pc:sldChg>
-      <pc:sldChg chg="addSp modSp add del mod">
-        <pc:chgData name="Zhao Jin" userId="cd05a825-544c-438a-9ba1-08e63db50b47" providerId="ADAL" clId="{FB8F02A0-9B99-4C9E-A1D1-3BF41D9621D7}" dt="2021-02-03T07:45:22.990" v="2123" actId="20577"/>
-        <pc:sldMkLst>
-          <pc:docMk/>
-          <pc:sldMk cId="2775173622" sldId="524"/>
-        </pc:sldMkLst>
-      </pc:sldChg>
-      <pc:sldChg chg="modSp mod">
-        <pc:chgData name="Zhao Jin" userId="cd05a825-544c-438a-9ba1-08e63db50b47" providerId="ADAL" clId="{FB8F02A0-9B99-4C9E-A1D1-3BF41D9621D7}" dt="2021-02-03T09:16:16.308" v="2184" actId="20577"/>
-        <pc:sldMkLst>
-          <pc:docMk/>
-          <pc:sldMk cId="4078418712" sldId="525"/>
-        </pc:sldMkLst>
-      </pc:sldChg>
-      <pc:sldChg chg="modSp del">
-        <pc:chgData name="Zhao Jin" userId="cd05a825-544c-438a-9ba1-08e63db50b47" providerId="ADAL" clId="{FB8F02A0-9B99-4C9E-A1D1-3BF41D9621D7}" dt="2021-02-03T07:02:36.712" v="7" actId="47"/>
-        <pc:sldMkLst>
-          <pc:docMk/>
-          <pc:sldMk cId="3949125736" sldId="548"/>
-        </pc:sldMkLst>
-      </pc:sldChg>
-      <pc:sldChg chg="modSp del">
-        <pc:chgData name="Zhao Jin" userId="cd05a825-544c-438a-9ba1-08e63db50b47" providerId="ADAL" clId="{FB8F02A0-9B99-4C9E-A1D1-3BF41D9621D7}" dt="2021-02-03T07:02:36.889" v="8" actId="47"/>
-        <pc:sldMkLst>
-          <pc:docMk/>
-          <pc:sldMk cId="2939077141" sldId="549"/>
-        </pc:sldMkLst>
-      </pc:sldChg>
-      <pc:sldChg chg="add del">
-        <pc:chgData name="Zhao Jin" userId="cd05a825-544c-438a-9ba1-08e63db50b47" providerId="ADAL" clId="{FB8F02A0-9B99-4C9E-A1D1-3BF41D9621D7}" dt="2021-02-03T07:07:45.930" v="221" actId="47"/>
-        <pc:sldMkLst>
-          <pc:docMk/>
-          <pc:sldMk cId="1352675019" sldId="551"/>
-        </pc:sldMkLst>
-      </pc:sldChg>
-      <pc:sldChg chg="addSp delSp modSp add mod">
-        <pc:chgData name="Zhao Jin" userId="cd05a825-544c-438a-9ba1-08e63db50b47" providerId="ADAL" clId="{FB8F02A0-9B99-4C9E-A1D1-3BF41D9621D7}" dt="2021-02-03T07:41:34.595" v="1864" actId="20578"/>
-        <pc:sldMkLst>
-          <pc:docMk/>
-          <pc:sldMk cId="2882118053" sldId="552"/>
-        </pc:sldMkLst>
-      </pc:sldChg>
-      <pc:sldChg chg="modSp add mod">
-        <pc:chgData name="Zhao Jin" userId="cd05a825-544c-438a-9ba1-08e63db50b47" providerId="ADAL" clId="{FB8F02A0-9B99-4C9E-A1D1-3BF41D9621D7}" dt="2021-02-03T07:20:30.275" v="935"/>
-        <pc:sldMkLst>
-          <pc:docMk/>
-          <pc:sldMk cId="2082920116" sldId="553"/>
-        </pc:sldMkLst>
-      </pc:sldChg>
-      <pc:sldChg chg="addSp delSp modSp add mod modAnim">
-        <pc:chgData name="Zhao Jin" userId="cd05a825-544c-438a-9ba1-08e63db50b47" providerId="ADAL" clId="{FB8F02A0-9B99-4C9E-A1D1-3BF41D9621D7}" dt="2021-02-03T07:42:15.454" v="1867" actId="20577"/>
-        <pc:sldMkLst>
-          <pc:docMk/>
-          <pc:sldMk cId="1659983766" sldId="554"/>
-        </pc:sldMkLst>
-      </pc:sldChg>
-      <pc:sldChg chg="addSp delSp modSp add del mod">
-        <pc:chgData name="Zhao Jin" userId="cd05a825-544c-438a-9ba1-08e63db50b47" providerId="ADAL" clId="{FB8F02A0-9B99-4C9E-A1D1-3BF41D9621D7}" dt="2021-02-03T07:07:06.993" v="219" actId="47"/>
-        <pc:sldMkLst>
-          <pc:docMk/>
-          <pc:sldMk cId="1268238251" sldId="555"/>
-        </pc:sldMkLst>
-      </pc:sldChg>
-      <pc:sldChg chg="modSp add del mod">
-        <pc:chgData name="Zhao Jin" userId="cd05a825-544c-438a-9ba1-08e63db50b47" providerId="ADAL" clId="{FB8F02A0-9B99-4C9E-A1D1-3BF41D9621D7}" dt="2021-02-03T07:42:30.854" v="1869" actId="47"/>
-        <pc:sldMkLst>
-          <pc:docMk/>
-          <pc:sldMk cId="788021743" sldId="557"/>
-        </pc:sldMkLst>
-      </pc:sldChg>
-      <pc:sldChg chg="delSp modSp add mod">
-        <pc:chgData name="Zhao Jin" userId="cd05a825-544c-438a-9ba1-08e63db50b47" providerId="ADAL" clId="{FB8F02A0-9B99-4C9E-A1D1-3BF41D9621D7}" dt="2021-02-08T02:19:37.781" v="2198" actId="478"/>
-        <pc:sldMkLst>
-          <pc:docMk/>
-          <pc:sldMk cId="686532275" sldId="558"/>
-        </pc:sldMkLst>
-      </pc:sldChg>
-      <pc:sldChg chg="delSp modSp add del mod delAnim">
-        <pc:chgData name="Zhao Jin" userId="cd05a825-544c-438a-9ba1-08e63db50b47" providerId="ADAL" clId="{FB8F02A0-9B99-4C9E-A1D1-3BF41D9621D7}" dt="2021-02-03T07:30:13.895" v="1095" actId="47"/>
-        <pc:sldMkLst>
-          <pc:docMk/>
-          <pc:sldMk cId="182578491" sldId="559"/>
-        </pc:sldMkLst>
-      </pc:sldChg>
-      <pc:sldChg chg="modSp add mod">
-        <pc:chgData name="Zhao Jin" userId="cd05a825-544c-438a-9ba1-08e63db50b47" providerId="ADAL" clId="{FB8F02A0-9B99-4C9E-A1D1-3BF41D9621D7}" dt="2021-02-03T07:20:33.509" v="937"/>
-        <pc:sldMkLst>
-          <pc:docMk/>
-          <pc:sldMk cId="1986771488" sldId="561"/>
-        </pc:sldMkLst>
-      </pc:sldChg>
-      <pc:sldChg chg="addSp delSp modSp add del mod delAnim modAnim">
-        <pc:chgData name="Zhao Jin" userId="cd05a825-544c-438a-9ba1-08e63db50b47" providerId="ADAL" clId="{FB8F02A0-9B99-4C9E-A1D1-3BF41D9621D7}" dt="2021-02-03T07:41:57.313" v="1865" actId="47"/>
-        <pc:sldMkLst>
-          <pc:docMk/>
-          <pc:sldMk cId="92291925" sldId="563"/>
-        </pc:sldMkLst>
-      </pc:sldChg>
-      <pc:sldChg chg="addSp modSp add mod modAnim">
-        <pc:chgData name="Zhao Jin" userId="cd05a825-544c-438a-9ba1-08e63db50b47" providerId="ADAL" clId="{FB8F02A0-9B99-4C9E-A1D1-3BF41D9621D7}" dt="2021-02-03T07:20:31.915" v="936"/>
-        <pc:sldMkLst>
-          <pc:docMk/>
-          <pc:sldMk cId="1276365520" sldId="564"/>
-        </pc:sldMkLst>
-      </pc:sldChg>
-      <pc:sldChg chg="delSp modSp add mod">
-        <pc:chgData name="Zhao Jin" userId="cd05a825-544c-438a-9ba1-08e63db50b47" providerId="ADAL" clId="{FB8F02A0-9B99-4C9E-A1D1-3BF41D9621D7}" dt="2021-02-03T07:20:28.829" v="934"/>
-        <pc:sldMkLst>
-          <pc:docMk/>
-          <pc:sldMk cId="827193018" sldId="565"/>
-        </pc:sldMkLst>
-      </pc:sldChg>
-      <pc:sldChg chg="modSp add mod">
-        <pc:chgData name="Zhao Jin" userId="cd05a825-544c-438a-9ba1-08e63db50b47" providerId="ADAL" clId="{FB8F02A0-9B99-4C9E-A1D1-3BF41D9621D7}" dt="2021-02-08T02:21:29.074" v="2208" actId="20577"/>
-        <pc:sldMkLst>
-          <pc:docMk/>
-          <pc:sldMk cId="3959984611" sldId="566"/>
-        </pc:sldMkLst>
-      </pc:sldChg>
-      <pc:sldChg chg="add del">
-        <pc:chgData name="Zhao Jin" userId="cd05a825-544c-438a-9ba1-08e63db50b47" providerId="ADAL" clId="{FB8F02A0-9B99-4C9E-A1D1-3BF41D9621D7}" dt="2021-02-03T07:34:00.322" v="1372" actId="47"/>
-        <pc:sldMkLst>
-          <pc:docMk/>
-          <pc:sldMk cId="243231529" sldId="567"/>
-        </pc:sldMkLst>
-      </pc:sldChg>
-      <pc:sldChg chg="modSp add del mod">
-        <pc:chgData name="Zhao Jin" userId="cd05a825-544c-438a-9ba1-08e63db50b47" providerId="ADAL" clId="{FB8F02A0-9B99-4C9E-A1D1-3BF41D9621D7}" dt="2021-02-03T07:30:57.488" v="1096" actId="47"/>
-        <pc:sldMkLst>
-          <pc:docMk/>
-          <pc:sldMk cId="3003604107" sldId="567"/>
-        </pc:sldMkLst>
-      </pc:sldChg>
-      <pc:sldChg chg="addSp delSp modSp add mod ord">
-        <pc:chgData name="Zhao Jin" userId="cd05a825-544c-438a-9ba1-08e63db50b47" providerId="ADAL" clId="{FB8F02A0-9B99-4C9E-A1D1-3BF41D9621D7}" dt="2021-02-03T07:45:20.173" v="2121" actId="20577"/>
-        <pc:sldMkLst>
-          <pc:docMk/>
-          <pc:sldMk cId="2879329457" sldId="568"/>
-        </pc:sldMkLst>
-      </pc:sldChg>
-      <pc:sldChg chg="modSp add mod">
-        <pc:chgData name="Zhao Jin" userId="cd05a825-544c-438a-9ba1-08e63db50b47" providerId="ADAL" clId="{FB8F02A0-9B99-4C9E-A1D1-3BF41D9621D7}" dt="2021-02-03T07:42:36.973" v="1870"/>
-        <pc:sldMkLst>
-          <pc:docMk/>
-          <pc:sldMk cId="4240540711" sldId="569"/>
-        </pc:sldMkLst>
-      </pc:sldChg>
-    </pc:docChg>
-  </pc:docChgLst>
-  <pc:docChgLst>
-    <pc:chgData name="Zhao Jin" userId="cd05a825-544c-438a-9ba1-08e63db50b47" providerId="ADAL" clId="{E4BF0341-1187-4ED5-A616-AE2BD4D418EC}"/>
-    <pc:docChg chg="undo custSel addSld delSld modSld">
-      <pc:chgData name="Zhao Jin" userId="cd05a825-544c-438a-9ba1-08e63db50b47" providerId="ADAL" clId="{E4BF0341-1187-4ED5-A616-AE2BD4D418EC}" dt="2025-04-08T01:45:30.083" v="1408" actId="20577"/>
-      <pc:docMkLst>
-        <pc:docMk/>
-      </pc:docMkLst>
-      <pc:sldChg chg="modAnim">
-        <pc:chgData name="Zhao Jin" userId="cd05a825-544c-438a-9ba1-08e63db50b47" providerId="ADAL" clId="{E4BF0341-1187-4ED5-A616-AE2BD4D418EC}" dt="2025-04-08T01:12:36.935" v="46"/>
-        <pc:sldMkLst>
-          <pc:docMk/>
-          <pc:sldMk cId="3056023935" sldId="596"/>
-        </pc:sldMkLst>
-      </pc:sldChg>
-      <pc:sldChg chg="modSp modAnim">
-        <pc:chgData name="Zhao Jin" userId="cd05a825-544c-438a-9ba1-08e63db50b47" providerId="ADAL" clId="{E4BF0341-1187-4ED5-A616-AE2BD4D418EC}" dt="2025-04-08T01:13:17.517" v="47"/>
+        <pc:chgData name="Zhao Jin" userId="cd05a825-544c-438a-9ba1-08e63db50b47" providerId="ADAL" clId="{7346625B-7E8F-4E9B-A9F0-94C1DD70E907}" dt="2026-03-30T02:17:31.913" v="316" actId="20577"/>
         <pc:sldMkLst>
           <pc:docMk/>
           <pc:sldMk cId="657864584" sldId="603"/>
         </pc:sldMkLst>
         <pc:spChg chg="mod">
-          <ac:chgData name="Zhao Jin" userId="cd05a825-544c-438a-9ba1-08e63db50b47" providerId="ADAL" clId="{E4BF0341-1187-4ED5-A616-AE2BD4D418EC}" dt="2025-04-08T01:10:16.639" v="15"/>
+          <ac:chgData name="Zhao Jin" userId="cd05a825-544c-438a-9ba1-08e63db50b47" providerId="ADAL" clId="{7346625B-7E8F-4E9B-A9F0-94C1DD70E907}" dt="2026-03-30T02:17:31.913" v="316" actId="20577"/>
           <ac:spMkLst>
             <pc:docMk/>
             <pc:sldMk cId="657864584" sldId="603"/>
@@ -1078,1055 +328,73 @@
           </ac:spMkLst>
         </pc:spChg>
       </pc:sldChg>
-      <pc:sldChg chg="modAnim">
-        <pc:chgData name="Zhao Jin" userId="cd05a825-544c-438a-9ba1-08e63db50b47" providerId="ADAL" clId="{E4BF0341-1187-4ED5-A616-AE2BD4D418EC}" dt="2025-04-08T01:12:30.768" v="45"/>
+      <pc:sldChg chg="modSp mod">
+        <pc:chgData name="Zhao Jin" userId="cd05a825-544c-438a-9ba1-08e63db50b47" providerId="ADAL" clId="{7346625B-7E8F-4E9B-A9F0-94C1DD70E907}" dt="2026-03-30T02:17:40.982" v="320" actId="20577"/>
         <pc:sldMkLst>
           <pc:docMk/>
           <pc:sldMk cId="2266731302" sldId="604"/>
         </pc:sldMkLst>
+        <pc:spChg chg="mod">
+          <ac:chgData name="Zhao Jin" userId="cd05a825-544c-438a-9ba1-08e63db50b47" providerId="ADAL" clId="{7346625B-7E8F-4E9B-A9F0-94C1DD70E907}" dt="2026-03-30T02:17:40.982" v="320" actId="20577"/>
+          <ac:spMkLst>
+            <pc:docMk/>
+            <pc:sldMk cId="2266731302" sldId="604"/>
+            <ac:spMk id="11" creationId="{00000000-0000-0000-0000-000000000000}"/>
+          </ac:spMkLst>
+        </pc:spChg>
       </pc:sldChg>
-      <pc:sldChg chg="modAnim">
-        <pc:chgData name="Zhao Jin" userId="cd05a825-544c-438a-9ba1-08e63db50b47" providerId="ADAL" clId="{E4BF0341-1187-4ED5-A616-AE2BD4D418EC}" dt="2025-04-08T01:12:28.314" v="44"/>
+      <pc:sldChg chg="modSp">
+        <pc:chgData name="Zhao Jin" userId="cd05a825-544c-438a-9ba1-08e63db50b47" providerId="ADAL" clId="{7346625B-7E8F-4E9B-A9F0-94C1DD70E907}" dt="2026-03-30T02:17:55.863" v="338" actId="20577"/>
+        <pc:sldMkLst>
+          <pc:docMk/>
+          <pc:sldMk cId="3047898109" sldId="605"/>
+        </pc:sldMkLst>
+        <pc:spChg chg="mod">
+          <ac:chgData name="Zhao Jin" userId="cd05a825-544c-438a-9ba1-08e63db50b47" providerId="ADAL" clId="{7346625B-7E8F-4E9B-A9F0-94C1DD70E907}" dt="2026-03-30T02:17:55.863" v="338" actId="20577"/>
+          <ac:spMkLst>
+            <pc:docMk/>
+            <pc:sldMk cId="3047898109" sldId="605"/>
+            <ac:spMk id="40" creationId="{00000000-0000-0000-0000-000000000000}"/>
+          </ac:spMkLst>
+        </pc:spChg>
+      </pc:sldChg>
+      <pc:sldChg chg="modSp mod">
+        <pc:chgData name="Zhao Jin" userId="cd05a825-544c-438a-9ba1-08e63db50b47" providerId="ADAL" clId="{7346625B-7E8F-4E9B-A9F0-94C1DD70E907}" dt="2026-03-30T02:18:02.939" v="343" actId="20577"/>
         <pc:sldMkLst>
           <pc:docMk/>
           <pc:sldMk cId="2964341788" sldId="627"/>
         </pc:sldMkLst>
-      </pc:sldChg>
-      <pc:sldChg chg="addSp modSp mod modAnim">
-        <pc:chgData name="Zhao Jin" userId="cd05a825-544c-438a-9ba1-08e63db50b47" providerId="ADAL" clId="{E4BF0341-1187-4ED5-A616-AE2BD4D418EC}" dt="2025-04-08T01:40:50.779" v="801"/>
-        <pc:sldMkLst>
-          <pc:docMk/>
-          <pc:sldMk cId="4089006062" sldId="642"/>
-        </pc:sldMkLst>
-        <pc:spChg chg="add mod">
-          <ac:chgData name="Zhao Jin" userId="cd05a825-544c-438a-9ba1-08e63db50b47" providerId="ADAL" clId="{E4BF0341-1187-4ED5-A616-AE2BD4D418EC}" dt="2025-04-08T01:40:50.779" v="801"/>
+        <pc:spChg chg="mod">
+          <ac:chgData name="Zhao Jin" userId="cd05a825-544c-438a-9ba1-08e63db50b47" providerId="ADAL" clId="{7346625B-7E8F-4E9B-A9F0-94C1DD70E907}" dt="2026-03-30T02:18:02.939" v="343" actId="20577"/>
           <ac:spMkLst>
             <pc:docMk/>
-            <pc:sldMk cId="4089006062" sldId="642"/>
-            <ac:spMk id="5" creationId="{05DC3C8F-7916-4902-AE9A-4F4264A8CD5A}"/>
-          </ac:spMkLst>
-        </pc:spChg>
-        <pc:spChg chg="mod">
-          <ac:chgData name="Zhao Jin" userId="cd05a825-544c-438a-9ba1-08e63db50b47" providerId="ADAL" clId="{E4BF0341-1187-4ED5-A616-AE2BD4D418EC}" dt="2025-04-08T01:20:45.990" v="317" actId="1076"/>
-          <ac:spMkLst>
-            <pc:docMk/>
-            <pc:sldMk cId="4089006062" sldId="642"/>
-            <ac:spMk id="13" creationId="{BF2076FD-ABA9-4E41-A999-DDB821DA1735}"/>
+            <pc:sldMk cId="2964341788" sldId="627"/>
+            <ac:spMk id="11" creationId="{00000000-0000-0000-0000-000000000000}"/>
           </ac:spMkLst>
         </pc:spChg>
       </pc:sldChg>
-      <pc:sldChg chg="modAnim">
-        <pc:chgData name="Zhao Jin" userId="cd05a825-544c-438a-9ba1-08e63db50b47" providerId="ADAL" clId="{E4BF0341-1187-4ED5-A616-AE2BD4D418EC}" dt="2025-04-08T01:13:36.286" v="50"/>
-        <pc:sldMkLst>
-          <pc:docMk/>
-          <pc:sldMk cId="2663715734" sldId="647"/>
-        </pc:sldMkLst>
-      </pc:sldChg>
-      <pc:sldChg chg="modAnim">
-        <pc:chgData name="Zhao Jin" userId="cd05a825-544c-438a-9ba1-08e63db50b47" providerId="ADAL" clId="{E4BF0341-1187-4ED5-A616-AE2BD4D418EC}" dt="2025-04-08T01:13:27.635" v="48"/>
-        <pc:sldMkLst>
-          <pc:docMk/>
-          <pc:sldMk cId="2331399055" sldId="648"/>
-        </pc:sldMkLst>
-      </pc:sldChg>
-      <pc:sldChg chg="del">
-        <pc:chgData name="Zhao Jin" userId="cd05a825-544c-438a-9ba1-08e63db50b47" providerId="ADAL" clId="{E4BF0341-1187-4ED5-A616-AE2BD4D418EC}" dt="2025-04-04T08:47:13.469" v="4" actId="47"/>
-        <pc:sldMkLst>
-          <pc:docMk/>
-          <pc:sldMk cId="529358301" sldId="653"/>
-        </pc:sldMkLst>
-      </pc:sldChg>
-      <pc:sldChg chg="del">
-        <pc:chgData name="Zhao Jin" userId="cd05a825-544c-438a-9ba1-08e63db50b47" providerId="ADAL" clId="{E4BF0341-1187-4ED5-A616-AE2BD4D418EC}" dt="2025-04-04T08:47:13.469" v="4" actId="47"/>
-        <pc:sldMkLst>
-          <pc:docMk/>
-          <pc:sldMk cId="1302906930" sldId="654"/>
-        </pc:sldMkLst>
-      </pc:sldChg>
-      <pc:sldChg chg="del">
-        <pc:chgData name="Zhao Jin" userId="cd05a825-544c-438a-9ba1-08e63db50b47" providerId="ADAL" clId="{E4BF0341-1187-4ED5-A616-AE2BD4D418EC}" dt="2025-04-04T08:47:13.469" v="4" actId="47"/>
-        <pc:sldMkLst>
-          <pc:docMk/>
-          <pc:sldMk cId="285181288" sldId="655"/>
-        </pc:sldMkLst>
-      </pc:sldChg>
-      <pc:sldChg chg="del">
-        <pc:chgData name="Zhao Jin" userId="cd05a825-544c-438a-9ba1-08e63db50b47" providerId="ADAL" clId="{E4BF0341-1187-4ED5-A616-AE2BD4D418EC}" dt="2025-04-04T08:47:13.469" v="4" actId="47"/>
-        <pc:sldMkLst>
-          <pc:docMk/>
-          <pc:sldMk cId="2115053964" sldId="656"/>
-        </pc:sldMkLst>
-      </pc:sldChg>
-      <pc:sldChg chg="del">
-        <pc:chgData name="Zhao Jin" userId="cd05a825-544c-438a-9ba1-08e63db50b47" providerId="ADAL" clId="{E4BF0341-1187-4ED5-A616-AE2BD4D418EC}" dt="2025-04-04T08:47:13.469" v="4" actId="47"/>
-        <pc:sldMkLst>
-          <pc:docMk/>
-          <pc:sldMk cId="2183659375" sldId="657"/>
-        </pc:sldMkLst>
-      </pc:sldChg>
-      <pc:sldChg chg="addSp modSp mod modAnim">
-        <pc:chgData name="Zhao Jin" userId="cd05a825-544c-438a-9ba1-08e63db50b47" providerId="ADAL" clId="{E4BF0341-1187-4ED5-A616-AE2BD4D418EC}" dt="2025-04-08T01:12:23.844" v="43"/>
+      <pc:sldChg chg="modSp mod modAnim">
+        <pc:chgData name="Zhao Jin" userId="cd05a825-544c-438a-9ba1-08e63db50b47" providerId="ADAL" clId="{7346625B-7E8F-4E9B-A9F0-94C1DD70E907}" dt="2026-03-30T02:19:06.123" v="422" actId="20577"/>
         <pc:sldMkLst>
           <pc:docMk/>
           <pc:sldMk cId="1792936429" sldId="658"/>
         </pc:sldMkLst>
-        <pc:spChg chg="add mod">
-          <ac:chgData name="Zhao Jin" userId="cd05a825-544c-438a-9ba1-08e63db50b47" providerId="ADAL" clId="{E4BF0341-1187-4ED5-A616-AE2BD4D418EC}" dt="2025-04-08T01:12:04.903" v="40" actId="20577"/>
+        <pc:spChg chg="mod">
+          <ac:chgData name="Zhao Jin" userId="cd05a825-544c-438a-9ba1-08e63db50b47" providerId="ADAL" clId="{7346625B-7E8F-4E9B-A9F0-94C1DD70E907}" dt="2026-03-30T02:19:06.123" v="422" actId="20577"/>
           <ac:spMkLst>
             <pc:docMk/>
             <pc:sldMk cId="1792936429" sldId="658"/>
             <ac:spMk id="5" creationId="{ED95DCE1-90E4-AC0C-BDB4-C7437EE79DFD}"/>
           </ac:spMkLst>
         </pc:spChg>
-      </pc:sldChg>
-      <pc:sldChg chg="addSp delSp modSp add mod">
-        <pc:chgData name="Zhao Jin" userId="cd05a825-544c-438a-9ba1-08e63db50b47" providerId="ADAL" clId="{E4BF0341-1187-4ED5-A616-AE2BD4D418EC}" dt="2025-04-08T01:29:12.039" v="370" actId="313"/>
-        <pc:sldMkLst>
-          <pc:docMk/>
-          <pc:sldMk cId="902073127" sldId="659"/>
-        </pc:sldMkLst>
-        <pc:spChg chg="del">
-          <ac:chgData name="Zhao Jin" userId="cd05a825-544c-438a-9ba1-08e63db50b47" providerId="ADAL" clId="{E4BF0341-1187-4ED5-A616-AE2BD4D418EC}" dt="2025-04-08T01:26:22.108" v="347" actId="478"/>
+        <pc:spChg chg="mod">
+          <ac:chgData name="Zhao Jin" userId="cd05a825-544c-438a-9ba1-08e63db50b47" providerId="ADAL" clId="{7346625B-7E8F-4E9B-A9F0-94C1DD70E907}" dt="2026-03-30T02:18:59.082" v="415" actId="20577"/>
           <ac:spMkLst>
             <pc:docMk/>
-            <pc:sldMk cId="902073127" sldId="659"/>
-            <ac:spMk id="2" creationId="{37A29594-44E3-B488-18CB-3911AB448306}"/>
+            <pc:sldMk cId="1792936429" sldId="658"/>
+            <ac:spMk id="11" creationId="{00000000-0000-0000-0000-000000000000}"/>
           </ac:spMkLst>
         </pc:spChg>
-        <pc:spChg chg="del">
-          <ac:chgData name="Zhao Jin" userId="cd05a825-544c-438a-9ba1-08e63db50b47" providerId="ADAL" clId="{E4BF0341-1187-4ED5-A616-AE2BD4D418EC}" dt="2025-04-08T01:26:22.108" v="347" actId="478"/>
-          <ac:spMkLst>
-            <pc:docMk/>
-            <pc:sldMk cId="902073127" sldId="659"/>
-            <ac:spMk id="9" creationId="{D376F0CB-CAEF-85B8-6AE6-5FA2B34CB85A}"/>
-          </ac:spMkLst>
-        </pc:spChg>
-        <pc:spChg chg="add del mod">
-          <ac:chgData name="Zhao Jin" userId="cd05a825-544c-438a-9ba1-08e63db50b47" providerId="ADAL" clId="{E4BF0341-1187-4ED5-A616-AE2BD4D418EC}" dt="2025-04-08T01:28:57.049" v="356" actId="478"/>
-          <ac:spMkLst>
-            <pc:docMk/>
-            <pc:sldMk cId="902073127" sldId="659"/>
-            <ac:spMk id="10" creationId="{71E5961B-38EB-1119-BB93-F801AB67829F}"/>
-          </ac:spMkLst>
-        </pc:spChg>
-        <pc:spChg chg="del">
-          <ac:chgData name="Zhao Jin" userId="cd05a825-544c-438a-9ba1-08e63db50b47" providerId="ADAL" clId="{E4BF0341-1187-4ED5-A616-AE2BD4D418EC}" dt="2025-04-08T01:26:22.108" v="347" actId="478"/>
-          <ac:spMkLst>
-            <pc:docMk/>
-            <pc:sldMk cId="902073127" sldId="659"/>
-            <ac:spMk id="11" creationId="{A5C888F1-577F-FD18-2592-714E8E37AFC5}"/>
-          </ac:spMkLst>
-        </pc:spChg>
-        <pc:spChg chg="add mod">
-          <ac:chgData name="Zhao Jin" userId="cd05a825-544c-438a-9ba1-08e63db50b47" providerId="ADAL" clId="{E4BF0341-1187-4ED5-A616-AE2BD4D418EC}" dt="2025-04-08T01:28:55.465" v="355"/>
-          <ac:spMkLst>
-            <pc:docMk/>
-            <pc:sldMk cId="902073127" sldId="659"/>
-            <ac:spMk id="12" creationId="{E0CF0271-99C1-5559-E768-6EC02245390C}"/>
-          </ac:spMkLst>
-        </pc:spChg>
-        <pc:spChg chg="add mod">
-          <ac:chgData name="Zhao Jin" userId="cd05a825-544c-438a-9ba1-08e63db50b47" providerId="ADAL" clId="{E4BF0341-1187-4ED5-A616-AE2BD4D418EC}" dt="2025-04-08T01:28:55.465" v="355"/>
-          <ac:spMkLst>
-            <pc:docMk/>
-            <pc:sldMk cId="902073127" sldId="659"/>
-            <ac:spMk id="14" creationId="{AE1A8477-EC3F-CC7A-54A8-F529EBFE2B7C}"/>
-          </ac:spMkLst>
-        </pc:spChg>
-        <pc:spChg chg="add mod">
-          <ac:chgData name="Zhao Jin" userId="cd05a825-544c-438a-9ba1-08e63db50b47" providerId="ADAL" clId="{E4BF0341-1187-4ED5-A616-AE2BD4D418EC}" dt="2025-04-08T01:28:55.465" v="355"/>
-          <ac:spMkLst>
-            <pc:docMk/>
-            <pc:sldMk cId="902073127" sldId="659"/>
-            <ac:spMk id="15" creationId="{30690BF1-5445-9901-EBF6-2CAF4E61DE23}"/>
-          </ac:spMkLst>
-        </pc:spChg>
-        <pc:spChg chg="del mod">
-          <ac:chgData name="Zhao Jin" userId="cd05a825-544c-438a-9ba1-08e63db50b47" providerId="ADAL" clId="{E4BF0341-1187-4ED5-A616-AE2BD4D418EC}" dt="2025-04-08T01:26:52.941" v="349" actId="478"/>
-          <ac:spMkLst>
-            <pc:docMk/>
-            <pc:sldMk cId="902073127" sldId="659"/>
-            <ac:spMk id="16" creationId="{89A2765F-B021-8406-F62E-859772DBA9F5}"/>
-          </ac:spMkLst>
-        </pc:spChg>
-        <pc:spChg chg="add mod">
-          <ac:chgData name="Zhao Jin" userId="cd05a825-544c-438a-9ba1-08e63db50b47" providerId="ADAL" clId="{E4BF0341-1187-4ED5-A616-AE2BD4D418EC}" dt="2025-04-08T01:28:58.177" v="357"/>
-          <ac:spMkLst>
-            <pc:docMk/>
-            <pc:sldMk cId="902073127" sldId="659"/>
-            <ac:spMk id="18" creationId="{A7F8F314-EE09-8E59-B963-07F03F78997E}"/>
-          </ac:spMkLst>
-        </pc:spChg>
-        <pc:spChg chg="add mod">
-          <ac:chgData name="Zhao Jin" userId="cd05a825-544c-438a-9ba1-08e63db50b47" providerId="ADAL" clId="{E4BF0341-1187-4ED5-A616-AE2BD4D418EC}" dt="2025-04-08T01:28:58.177" v="357"/>
-          <ac:spMkLst>
-            <pc:docMk/>
-            <pc:sldMk cId="902073127" sldId="659"/>
-            <ac:spMk id="20" creationId="{3DA897A8-2913-4383-91EF-E4A492B105FB}"/>
-          </ac:spMkLst>
-        </pc:spChg>
-        <pc:spChg chg="add mod">
-          <ac:chgData name="Zhao Jin" userId="cd05a825-544c-438a-9ba1-08e63db50b47" providerId="ADAL" clId="{E4BF0341-1187-4ED5-A616-AE2BD4D418EC}" dt="2025-04-08T01:28:58.177" v="357"/>
-          <ac:spMkLst>
-            <pc:docMk/>
-            <pc:sldMk cId="902073127" sldId="659"/>
-            <ac:spMk id="21" creationId="{17BD2020-A839-A235-CDFE-766DFBC3A315}"/>
-          </ac:spMkLst>
-        </pc:spChg>
-        <pc:spChg chg="add del mod">
-          <ac:chgData name="Zhao Jin" userId="cd05a825-544c-438a-9ba1-08e63db50b47" providerId="ADAL" clId="{E4BF0341-1187-4ED5-A616-AE2BD4D418EC}" dt="2025-04-08T01:29:12.039" v="370" actId="313"/>
-          <ac:spMkLst>
-            <pc:docMk/>
-            <pc:sldMk cId="902073127" sldId="659"/>
-            <ac:spMk id="14338" creationId="{DE9ECDA0-16FD-8142-FFFF-20204D7F17FA}"/>
-          </ac:spMkLst>
-        </pc:spChg>
-        <pc:picChg chg="add del mod">
-          <ac:chgData name="Zhao Jin" userId="cd05a825-544c-438a-9ba1-08e63db50b47" providerId="ADAL" clId="{E4BF0341-1187-4ED5-A616-AE2BD4D418EC}" dt="2025-04-08T01:27:48.830" v="353" actId="478"/>
-          <ac:picMkLst>
-            <pc:docMk/>
-            <pc:sldMk cId="902073127" sldId="659"/>
-            <ac:picMk id="7" creationId="{58E0B009-8BDA-53B9-7573-2451ED87B500}"/>
-          </ac:picMkLst>
-        </pc:picChg>
-        <pc:picChg chg="add mod">
-          <ac:chgData name="Zhao Jin" userId="cd05a825-544c-438a-9ba1-08e63db50b47" providerId="ADAL" clId="{E4BF0341-1187-4ED5-A616-AE2BD4D418EC}" dt="2025-04-08T01:28:55.465" v="355"/>
-          <ac:picMkLst>
-            <pc:docMk/>
-            <pc:sldMk cId="902073127" sldId="659"/>
-            <ac:picMk id="13" creationId="{99E2A53C-0F9D-80D7-92A7-E442DB4B2483}"/>
-          </ac:picMkLst>
-        </pc:picChg>
-        <pc:picChg chg="add mod">
-          <ac:chgData name="Zhao Jin" userId="cd05a825-544c-438a-9ba1-08e63db50b47" providerId="ADAL" clId="{E4BF0341-1187-4ED5-A616-AE2BD4D418EC}" dt="2025-04-08T01:28:55.465" v="355"/>
-          <ac:picMkLst>
-            <pc:docMk/>
-            <pc:sldMk cId="902073127" sldId="659"/>
-            <ac:picMk id="17" creationId="{60314B21-80B8-FCE0-0389-DD674E333F49}"/>
-          </ac:picMkLst>
-        </pc:picChg>
-        <pc:picChg chg="add mod">
-          <ac:chgData name="Zhao Jin" userId="cd05a825-544c-438a-9ba1-08e63db50b47" providerId="ADAL" clId="{E4BF0341-1187-4ED5-A616-AE2BD4D418EC}" dt="2025-04-08T01:28:58.177" v="357"/>
-          <ac:picMkLst>
-            <pc:docMk/>
-            <pc:sldMk cId="902073127" sldId="659"/>
-            <ac:picMk id="19" creationId="{7F1727F1-DE75-6994-1D8A-CC1C57A3E5CB}"/>
-          </ac:picMkLst>
-        </pc:picChg>
-        <pc:picChg chg="add mod">
-          <ac:chgData name="Zhao Jin" userId="cd05a825-544c-438a-9ba1-08e63db50b47" providerId="ADAL" clId="{E4BF0341-1187-4ED5-A616-AE2BD4D418EC}" dt="2025-04-08T01:28:58.177" v="357"/>
-          <ac:picMkLst>
-            <pc:docMk/>
-            <pc:sldMk cId="902073127" sldId="659"/>
-            <ac:picMk id="22" creationId="{98F28315-E62C-ED9F-03F5-BF323D14A997}"/>
-          </ac:picMkLst>
-        </pc:picChg>
-      </pc:sldChg>
-      <pc:sldChg chg="modSp add del mod">
-        <pc:chgData name="Zhao Jin" userId="cd05a825-544c-438a-9ba1-08e63db50b47" providerId="ADAL" clId="{E4BF0341-1187-4ED5-A616-AE2BD4D418EC}" dt="2025-04-08T01:16:17.448" v="69" actId="47"/>
-        <pc:sldMkLst>
-          <pc:docMk/>
-          <pc:sldMk cId="3021430251" sldId="659"/>
-        </pc:sldMkLst>
-        <pc:spChg chg="mod">
-          <ac:chgData name="Zhao Jin" userId="cd05a825-544c-438a-9ba1-08e63db50b47" providerId="ADAL" clId="{E4BF0341-1187-4ED5-A616-AE2BD4D418EC}" dt="2025-04-08T01:16:07.597" v="68" actId="20577"/>
-          <ac:spMkLst>
-            <pc:docMk/>
-            <pc:sldMk cId="3021430251" sldId="659"/>
-            <ac:spMk id="8" creationId="{749F53FF-8B16-81FB-C51D-7933D445B79B}"/>
-          </ac:spMkLst>
-        </pc:spChg>
-        <pc:spChg chg="mod">
-          <ac:chgData name="Zhao Jin" userId="cd05a825-544c-438a-9ba1-08e63db50b47" providerId="ADAL" clId="{E4BF0341-1187-4ED5-A616-AE2BD4D418EC}" dt="2025-04-08T01:15:33.051" v="62" actId="20577"/>
-          <ac:spMkLst>
-            <pc:docMk/>
-            <pc:sldMk cId="3021430251" sldId="659"/>
-            <ac:spMk id="9" creationId="{5145F527-5240-914F-80B8-84554F7F561D}"/>
-          </ac:spMkLst>
-        </pc:spChg>
-      </pc:sldChg>
-      <pc:sldChg chg="modSp del mod">
-        <pc:chgData name="Zhao Jin" userId="cd05a825-544c-438a-9ba1-08e63db50b47" providerId="ADAL" clId="{E4BF0341-1187-4ED5-A616-AE2BD4D418EC}" dt="2025-04-04T08:45:55.397" v="3" actId="47"/>
-        <pc:sldMkLst>
-          <pc:docMk/>
-          <pc:sldMk cId="3562510052" sldId="659"/>
-        </pc:sldMkLst>
-      </pc:sldChg>
-      <pc:sldChg chg="addSp delSp modSp add mod">
-        <pc:chgData name="Zhao Jin" userId="cd05a825-544c-438a-9ba1-08e63db50b47" providerId="ADAL" clId="{E4BF0341-1187-4ED5-A616-AE2BD4D418EC}" dt="2025-04-08T01:39:50.688" v="800" actId="1035"/>
-        <pc:sldMkLst>
-          <pc:docMk/>
-          <pc:sldMk cId="706717751" sldId="660"/>
-        </pc:sldMkLst>
-        <pc:spChg chg="add del">
-          <ac:chgData name="Zhao Jin" userId="cd05a825-544c-438a-9ba1-08e63db50b47" providerId="ADAL" clId="{E4BF0341-1187-4ED5-A616-AE2BD4D418EC}" dt="2025-04-08T01:37:47.011" v="772" actId="478"/>
-          <ac:spMkLst>
-            <pc:docMk/>
-            <pc:sldMk cId="706717751" sldId="660"/>
-            <ac:spMk id="2" creationId="{C24110A3-1EAF-48BD-0716-575E5731CCE1}"/>
-          </ac:spMkLst>
-        </pc:spChg>
-        <pc:spChg chg="add mod">
-          <ac:chgData name="Zhao Jin" userId="cd05a825-544c-438a-9ba1-08e63db50b47" providerId="ADAL" clId="{E4BF0341-1187-4ED5-A616-AE2BD4D418EC}" dt="2025-04-08T01:38:53.285" v="797" actId="1035"/>
-          <ac:spMkLst>
-            <pc:docMk/>
-            <pc:sldMk cId="706717751" sldId="660"/>
-            <ac:spMk id="6" creationId="{C9250B4E-6278-7EBB-025C-4F745884845A}"/>
-          </ac:spMkLst>
-        </pc:spChg>
-        <pc:spChg chg="add mod">
-          <ac:chgData name="Zhao Jin" userId="cd05a825-544c-438a-9ba1-08e63db50b47" providerId="ADAL" clId="{E4BF0341-1187-4ED5-A616-AE2BD4D418EC}" dt="2025-04-08T01:39:50.688" v="800" actId="1035"/>
-          <ac:spMkLst>
-            <pc:docMk/>
-            <pc:sldMk cId="706717751" sldId="660"/>
-            <ac:spMk id="7" creationId="{952D108C-3285-E577-A0E3-BEE1FC824C4B}"/>
-          </ac:spMkLst>
-        </pc:spChg>
-        <pc:spChg chg="add del mod">
-          <ac:chgData name="Zhao Jin" userId="cd05a825-544c-438a-9ba1-08e63db50b47" providerId="ADAL" clId="{E4BF0341-1187-4ED5-A616-AE2BD4D418EC}" dt="2025-04-08T01:38:37.715" v="789" actId="478"/>
-          <ac:spMkLst>
-            <pc:docMk/>
-            <pc:sldMk cId="706717751" sldId="660"/>
-            <ac:spMk id="8" creationId="{8908AE05-E709-DC7F-BAF7-D61249EDCF59}"/>
-          </ac:spMkLst>
-        </pc:spChg>
-        <pc:spChg chg="del">
-          <ac:chgData name="Zhao Jin" userId="cd05a825-544c-438a-9ba1-08e63db50b47" providerId="ADAL" clId="{E4BF0341-1187-4ED5-A616-AE2BD4D418EC}" dt="2025-04-08T01:37:28.517" v="769" actId="478"/>
-          <ac:spMkLst>
-            <pc:docMk/>
-            <pc:sldMk cId="706717751" sldId="660"/>
-            <ac:spMk id="18" creationId="{6172A28F-7ACC-D95C-279C-8F0143A0568E}"/>
-          </ac:spMkLst>
-        </pc:spChg>
-        <pc:spChg chg="mod ord">
-          <ac:chgData name="Zhao Jin" userId="cd05a825-544c-438a-9ba1-08e63db50b47" providerId="ADAL" clId="{E4BF0341-1187-4ED5-A616-AE2BD4D418EC}" dt="2025-04-08T01:39:16.824" v="799" actId="1076"/>
-          <ac:spMkLst>
-            <pc:docMk/>
-            <pc:sldMk cId="706717751" sldId="660"/>
-            <ac:spMk id="20" creationId="{03492E09-40E2-A7C7-D647-3A9A88515B4D}"/>
-          </ac:spMkLst>
-        </pc:spChg>
-        <pc:spChg chg="del">
-          <ac:chgData name="Zhao Jin" userId="cd05a825-544c-438a-9ba1-08e63db50b47" providerId="ADAL" clId="{E4BF0341-1187-4ED5-A616-AE2BD4D418EC}" dt="2025-04-08T01:30:15.567" v="417" actId="478"/>
-          <ac:spMkLst>
-            <pc:docMk/>
-            <pc:sldMk cId="706717751" sldId="660"/>
-            <ac:spMk id="21" creationId="{A8E1AD03-F659-9D1E-1681-D569FE50E689}"/>
-          </ac:spMkLst>
-        </pc:spChg>
-        <pc:spChg chg="mod">
-          <ac:chgData name="Zhao Jin" userId="cd05a825-544c-438a-9ba1-08e63db50b47" providerId="ADAL" clId="{E4BF0341-1187-4ED5-A616-AE2BD4D418EC}" dt="2025-04-08T01:29:19.408" v="398" actId="20577"/>
-          <ac:spMkLst>
-            <pc:docMk/>
-            <pc:sldMk cId="706717751" sldId="660"/>
-            <ac:spMk id="14338" creationId="{288D32DC-9C04-70AA-FE08-EFACB6121CCA}"/>
-          </ac:spMkLst>
-        </pc:spChg>
-        <pc:picChg chg="del">
-          <ac:chgData name="Zhao Jin" userId="cd05a825-544c-438a-9ba1-08e63db50b47" providerId="ADAL" clId="{E4BF0341-1187-4ED5-A616-AE2BD4D418EC}" dt="2025-04-08T01:29:21.191" v="399" actId="478"/>
-          <ac:picMkLst>
-            <pc:docMk/>
-            <pc:sldMk cId="706717751" sldId="660"/>
-            <ac:picMk id="22" creationId="{19E6F004-2482-74C0-7803-099F6DF59345}"/>
-          </ac:picMkLst>
-        </pc:picChg>
-      </pc:sldChg>
-      <pc:sldChg chg="del">
-        <pc:chgData name="Zhao Jin" userId="cd05a825-544c-438a-9ba1-08e63db50b47" providerId="ADAL" clId="{E4BF0341-1187-4ED5-A616-AE2BD4D418EC}" dt="2025-04-04T08:45:55.397" v="3" actId="47"/>
-        <pc:sldMkLst>
-          <pc:docMk/>
-          <pc:sldMk cId="2828537458" sldId="660"/>
-        </pc:sldMkLst>
-      </pc:sldChg>
-      <pc:sldChg chg="modSp add mod">
-        <pc:chgData name="Zhao Jin" userId="cd05a825-544c-438a-9ba1-08e63db50b47" providerId="ADAL" clId="{E4BF0341-1187-4ED5-A616-AE2BD4D418EC}" dt="2025-04-08T01:45:30.083" v="1408" actId="20577"/>
-        <pc:sldMkLst>
-          <pc:docMk/>
-          <pc:sldMk cId="2808248634" sldId="661"/>
-        </pc:sldMkLst>
-        <pc:spChg chg="mod">
-          <ac:chgData name="Zhao Jin" userId="cd05a825-544c-438a-9ba1-08e63db50b47" providerId="ADAL" clId="{E4BF0341-1187-4ED5-A616-AE2BD4D418EC}" dt="2025-04-08T01:45:30.083" v="1408" actId="20577"/>
-          <ac:spMkLst>
-            <pc:docMk/>
-            <pc:sldMk cId="2808248634" sldId="661"/>
-            <ac:spMk id="8" creationId="{41F6E69F-2BCE-E8D1-EBD7-524472910409}"/>
-          </ac:spMkLst>
-        </pc:spChg>
-        <pc:spChg chg="mod">
-          <ac:chgData name="Zhao Jin" userId="cd05a825-544c-438a-9ba1-08e63db50b47" providerId="ADAL" clId="{E4BF0341-1187-4ED5-A616-AE2BD4D418EC}" dt="2025-04-08T01:41:05.512" v="817" actId="20577"/>
-          <ac:spMkLst>
-            <pc:docMk/>
-            <pc:sldMk cId="2808248634" sldId="661"/>
-            <ac:spMk id="14338" creationId="{108C9C00-6394-0D32-349C-36C6D0ECFDE7}"/>
-          </ac:spMkLst>
-        </pc:spChg>
-      </pc:sldChg>
-      <pc:sldChg chg="del">
-        <pc:chgData name="Zhao Jin" userId="cd05a825-544c-438a-9ba1-08e63db50b47" providerId="ADAL" clId="{E4BF0341-1187-4ED5-A616-AE2BD4D418EC}" dt="2025-04-04T08:45:55.397" v="3" actId="47"/>
-        <pc:sldMkLst>
-          <pc:docMk/>
-          <pc:sldMk cId="3476121922" sldId="661"/>
-        </pc:sldMkLst>
-      </pc:sldChg>
-    </pc:docChg>
-  </pc:docChgLst>
-  <pc:docChgLst>
-    <pc:chgData name="Zhao Jin" userId="cd05a825-544c-438a-9ba1-08e63db50b47" providerId="ADAL" clId="{86603074-AF99-462C-A984-8CD9E3F32D60}"/>
-    <pc:docChg chg="undo custSel addSld delSld modSld sldOrd">
-      <pc:chgData name="Zhao Jin" userId="cd05a825-544c-438a-9ba1-08e63db50b47" providerId="ADAL" clId="{86603074-AF99-462C-A984-8CD9E3F32D60}" dt="2024-04-09T01:32:05.080" v="2174"/>
-      <pc:docMkLst>
-        <pc:docMk/>
-      </pc:docMkLst>
-      <pc:sldChg chg="ord">
-        <pc:chgData name="Zhao Jin" userId="cd05a825-544c-438a-9ba1-08e63db50b47" providerId="ADAL" clId="{86603074-AF99-462C-A984-8CD9E3F32D60}" dt="2024-04-08T04:41:52.824" v="134"/>
-        <pc:sldMkLst>
-          <pc:docMk/>
-          <pc:sldMk cId="2840099445" sldId="602"/>
-        </pc:sldMkLst>
-      </pc:sldChg>
-      <pc:sldChg chg="ord">
-        <pc:chgData name="Zhao Jin" userId="cd05a825-544c-438a-9ba1-08e63db50b47" providerId="ADAL" clId="{86603074-AF99-462C-A984-8CD9E3F32D60}" dt="2024-04-08T04:41:52.824" v="134"/>
-        <pc:sldMkLst>
-          <pc:docMk/>
-          <pc:sldMk cId="657864584" sldId="603"/>
-        </pc:sldMkLst>
-      </pc:sldChg>
-      <pc:sldChg chg="modSp mod">
-        <pc:chgData name="Zhao Jin" userId="cd05a825-544c-438a-9ba1-08e63db50b47" providerId="ADAL" clId="{86603074-AF99-462C-A984-8CD9E3F32D60}" dt="2024-04-08T04:42:02.160" v="136" actId="20577"/>
-        <pc:sldMkLst>
-          <pc:docMk/>
-          <pc:sldMk cId="4000828616" sldId="626"/>
-        </pc:sldMkLst>
-      </pc:sldChg>
-      <pc:sldChg chg="modSp mod">
-        <pc:chgData name="Zhao Jin" userId="cd05a825-544c-438a-9ba1-08e63db50b47" providerId="ADAL" clId="{86603074-AF99-462C-A984-8CD9E3F32D60}" dt="2024-04-08T04:42:50.127" v="171" actId="1038"/>
-        <pc:sldMkLst>
-          <pc:docMk/>
-          <pc:sldMk cId="4089006062" sldId="642"/>
-        </pc:sldMkLst>
-      </pc:sldChg>
-      <pc:sldChg chg="modSp mod modAnim">
-        <pc:chgData name="Zhao Jin" userId="cd05a825-544c-438a-9ba1-08e63db50b47" providerId="ADAL" clId="{86603074-AF99-462C-A984-8CD9E3F32D60}" dt="2024-04-09T01:32:02.847" v="2173"/>
-        <pc:sldMkLst>
-          <pc:docMk/>
-          <pc:sldMk cId="529358301" sldId="653"/>
-        </pc:sldMkLst>
-      </pc:sldChg>
-      <pc:sldChg chg="modSp mod modAnim">
-        <pc:chgData name="Zhao Jin" userId="cd05a825-544c-438a-9ba1-08e63db50b47" providerId="ADAL" clId="{86603074-AF99-462C-A984-8CD9E3F32D60}" dt="2024-04-09T01:32:05.080" v="2174"/>
-        <pc:sldMkLst>
-          <pc:docMk/>
-          <pc:sldMk cId="1302906930" sldId="654"/>
-        </pc:sldMkLst>
-      </pc:sldChg>
-      <pc:sldChg chg="modSp mod modAnim">
-        <pc:chgData name="Zhao Jin" userId="cd05a825-544c-438a-9ba1-08e63db50b47" providerId="ADAL" clId="{86603074-AF99-462C-A984-8CD9E3F32D60}" dt="2024-04-09T01:32:01.342" v="2172"/>
-        <pc:sldMkLst>
-          <pc:docMk/>
-          <pc:sldMk cId="285181288" sldId="655"/>
-        </pc:sldMkLst>
-      </pc:sldChg>
-      <pc:sldChg chg="modSp mod modAnim">
-        <pc:chgData name="Zhao Jin" userId="cd05a825-544c-438a-9ba1-08e63db50b47" providerId="ADAL" clId="{86603074-AF99-462C-A984-8CD9E3F32D60}" dt="2024-04-09T01:31:07.475" v="2171" actId="6549"/>
-        <pc:sldMkLst>
-          <pc:docMk/>
-          <pc:sldMk cId="2115053964" sldId="656"/>
-        </pc:sldMkLst>
-      </pc:sldChg>
-      <pc:sldChg chg="modSp mod modAnim">
-        <pc:chgData name="Zhao Jin" userId="cd05a825-544c-438a-9ba1-08e63db50b47" providerId="ADAL" clId="{86603074-AF99-462C-A984-8CD9E3F32D60}" dt="2024-04-09T01:30:48.139" v="2133"/>
-        <pc:sldMkLst>
-          <pc:docMk/>
-          <pc:sldMk cId="2183659375" sldId="657"/>
-        </pc:sldMkLst>
-      </pc:sldChg>
-      <pc:sldChg chg="add del">
-        <pc:chgData name="Zhao Jin" userId="cd05a825-544c-438a-9ba1-08e63db50b47" providerId="ADAL" clId="{86603074-AF99-462C-A984-8CD9E3F32D60}" dt="2024-04-08T04:45:24.595" v="179" actId="47"/>
-        <pc:sldMkLst>
-          <pc:docMk/>
-          <pc:sldMk cId="1803015051" sldId="659"/>
-        </pc:sldMkLst>
-      </pc:sldChg>
-      <pc:sldChg chg="modSp add mod">
-        <pc:chgData name="Zhao Jin" userId="cd05a825-544c-438a-9ba1-08e63db50b47" providerId="ADAL" clId="{86603074-AF99-462C-A984-8CD9E3F32D60}" dt="2024-04-08T04:54:36.572" v="1349" actId="20577"/>
-        <pc:sldMkLst>
-          <pc:docMk/>
-          <pc:sldMk cId="3562510052" sldId="659"/>
-        </pc:sldMkLst>
-      </pc:sldChg>
-      <pc:sldChg chg="addSp delSp modSp add mod">
-        <pc:chgData name="Zhao Jin" userId="cd05a825-544c-438a-9ba1-08e63db50b47" providerId="ADAL" clId="{86603074-AF99-462C-A984-8CD9E3F32D60}" dt="2024-04-09T00:51:40.812" v="1363" actId="22"/>
-        <pc:sldMkLst>
-          <pc:docMk/>
-          <pc:sldMk cId="2828537458" sldId="660"/>
-        </pc:sldMkLst>
-      </pc:sldChg>
-      <pc:sldChg chg="modSp add mod">
-        <pc:chgData name="Zhao Jin" userId="cd05a825-544c-438a-9ba1-08e63db50b47" providerId="ADAL" clId="{86603074-AF99-462C-A984-8CD9E3F32D60}" dt="2024-04-09T00:58:57.093" v="1979" actId="20577"/>
-        <pc:sldMkLst>
-          <pc:docMk/>
-          <pc:sldMk cId="3476121922" sldId="661"/>
-        </pc:sldMkLst>
-      </pc:sldChg>
-    </pc:docChg>
-  </pc:docChgLst>
-  <pc:docChgLst>
-    <pc:chgData name="Zhao Jin" userId="cd05a825-544c-438a-9ba1-08e63db50b47" providerId="ADAL" clId="{72D9C2A1-C39E-4B80-B797-517B2040CEFE}"/>
-    <pc:docChg chg="modSld modMainMaster">
-      <pc:chgData name="Zhao Jin" userId="cd05a825-544c-438a-9ba1-08e63db50b47" providerId="ADAL" clId="{72D9C2A1-C39E-4B80-B797-517B2040CEFE}" dt="2024-02-01T13:57:51.822" v="17" actId="14100"/>
-      <pc:docMkLst>
-        <pc:docMk/>
-      </pc:docMkLst>
-      <pc:sldChg chg="modSp mod">
-        <pc:chgData name="Zhao Jin" userId="cd05a825-544c-438a-9ba1-08e63db50b47" providerId="ADAL" clId="{72D9C2A1-C39E-4B80-B797-517B2040CEFE}" dt="2024-02-01T09:46:41.187" v="10" actId="255"/>
-        <pc:sldMkLst>
-          <pc:docMk/>
-          <pc:sldMk cId="4078418712" sldId="525"/>
-        </pc:sldMkLst>
-      </pc:sldChg>
-      <pc:sldChg chg="modSp">
-        <pc:chgData name="Zhao Jin" userId="cd05a825-544c-438a-9ba1-08e63db50b47" providerId="ADAL" clId="{72D9C2A1-C39E-4B80-B797-517B2040CEFE}" dt="2024-02-01T09:45:46.675" v="0"/>
-        <pc:sldMkLst>
-          <pc:docMk/>
-          <pc:sldMk cId="3056023935" sldId="596"/>
-        </pc:sldMkLst>
-      </pc:sldChg>
-      <pc:sldChg chg="modSp">
-        <pc:chgData name="Zhao Jin" userId="cd05a825-544c-438a-9ba1-08e63db50b47" providerId="ADAL" clId="{72D9C2A1-C39E-4B80-B797-517B2040CEFE}" dt="2024-02-01T09:45:46.675" v="0"/>
-        <pc:sldMkLst>
-          <pc:docMk/>
-          <pc:sldMk cId="2840099445" sldId="602"/>
-        </pc:sldMkLst>
-      </pc:sldChg>
-      <pc:sldChg chg="modSp">
-        <pc:chgData name="Zhao Jin" userId="cd05a825-544c-438a-9ba1-08e63db50b47" providerId="ADAL" clId="{72D9C2A1-C39E-4B80-B797-517B2040CEFE}" dt="2024-02-01T09:45:46.675" v="0"/>
-        <pc:sldMkLst>
-          <pc:docMk/>
-          <pc:sldMk cId="657864584" sldId="603"/>
-        </pc:sldMkLst>
-      </pc:sldChg>
-      <pc:sldChg chg="modSp">
-        <pc:chgData name="Zhao Jin" userId="cd05a825-544c-438a-9ba1-08e63db50b47" providerId="ADAL" clId="{72D9C2A1-C39E-4B80-B797-517B2040CEFE}" dt="2024-02-01T09:45:46.675" v="0"/>
-        <pc:sldMkLst>
-          <pc:docMk/>
-          <pc:sldMk cId="2266731302" sldId="604"/>
-        </pc:sldMkLst>
-      </pc:sldChg>
-      <pc:sldChg chg="modSp">
-        <pc:chgData name="Zhao Jin" userId="cd05a825-544c-438a-9ba1-08e63db50b47" providerId="ADAL" clId="{72D9C2A1-C39E-4B80-B797-517B2040CEFE}" dt="2024-02-01T09:45:46.675" v="0"/>
-        <pc:sldMkLst>
-          <pc:docMk/>
-          <pc:sldMk cId="3047898109" sldId="605"/>
-        </pc:sldMkLst>
-      </pc:sldChg>
-      <pc:sldChg chg="modSp">
-        <pc:chgData name="Zhao Jin" userId="cd05a825-544c-438a-9ba1-08e63db50b47" providerId="ADAL" clId="{72D9C2A1-C39E-4B80-B797-517B2040CEFE}" dt="2024-02-01T09:45:46.675" v="0"/>
-        <pc:sldMkLst>
-          <pc:docMk/>
-          <pc:sldMk cId="4000828616" sldId="626"/>
-        </pc:sldMkLst>
-      </pc:sldChg>
-      <pc:sldChg chg="modSp">
-        <pc:chgData name="Zhao Jin" userId="cd05a825-544c-438a-9ba1-08e63db50b47" providerId="ADAL" clId="{72D9C2A1-C39E-4B80-B797-517B2040CEFE}" dt="2024-02-01T09:45:46.675" v="0"/>
-        <pc:sldMkLst>
-          <pc:docMk/>
-          <pc:sldMk cId="2964341788" sldId="627"/>
-        </pc:sldMkLst>
-      </pc:sldChg>
-      <pc:sldChg chg="modSp mod">
-        <pc:chgData name="Zhao Jin" userId="cd05a825-544c-438a-9ba1-08e63db50b47" providerId="ADAL" clId="{72D9C2A1-C39E-4B80-B797-517B2040CEFE}" dt="2024-02-01T09:46:02.348" v="3" actId="255"/>
-        <pc:sldMkLst>
-          <pc:docMk/>
-          <pc:sldMk cId="4089006062" sldId="642"/>
-        </pc:sldMkLst>
-      </pc:sldChg>
-      <pc:sldChg chg="modSp mod">
-        <pc:chgData name="Zhao Jin" userId="cd05a825-544c-438a-9ba1-08e63db50b47" providerId="ADAL" clId="{72D9C2A1-C39E-4B80-B797-517B2040CEFE}" dt="2024-02-01T09:46:11.774" v="4" actId="255"/>
-        <pc:sldMkLst>
-          <pc:docMk/>
-          <pc:sldMk cId="2663715734" sldId="647"/>
-        </pc:sldMkLst>
-      </pc:sldChg>
-      <pc:sldChg chg="modSp mod">
-        <pc:chgData name="Zhao Jin" userId="cd05a825-544c-438a-9ba1-08e63db50b47" providerId="ADAL" clId="{72D9C2A1-C39E-4B80-B797-517B2040CEFE}" dt="2024-02-01T09:45:58.125" v="2" actId="255"/>
-        <pc:sldMkLst>
-          <pc:docMk/>
-          <pc:sldMk cId="2331399055" sldId="648"/>
-        </pc:sldMkLst>
-      </pc:sldChg>
-      <pc:sldChg chg="modSp mod">
-        <pc:chgData name="Zhao Jin" userId="cd05a825-544c-438a-9ba1-08e63db50b47" providerId="ADAL" clId="{72D9C2A1-C39E-4B80-B797-517B2040CEFE}" dt="2024-02-01T13:57:36.571" v="12" actId="14100"/>
-        <pc:sldMkLst>
-          <pc:docMk/>
-          <pc:sldMk cId="529358301" sldId="653"/>
-        </pc:sldMkLst>
-      </pc:sldChg>
-      <pc:sldChg chg="modSp mod">
-        <pc:chgData name="Zhao Jin" userId="cd05a825-544c-438a-9ba1-08e63db50b47" providerId="ADAL" clId="{72D9C2A1-C39E-4B80-B797-517B2040CEFE}" dt="2024-02-01T13:57:51.822" v="17" actId="14100"/>
-        <pc:sldMkLst>
-          <pc:docMk/>
-          <pc:sldMk cId="1302906930" sldId="654"/>
-        </pc:sldMkLst>
-      </pc:sldChg>
-      <pc:sldChg chg="modSp mod">
-        <pc:chgData name="Zhao Jin" userId="cd05a825-544c-438a-9ba1-08e63db50b47" providerId="ADAL" clId="{72D9C2A1-C39E-4B80-B797-517B2040CEFE}" dt="2024-02-01T09:46:24.028" v="7" actId="255"/>
-        <pc:sldMkLst>
-          <pc:docMk/>
-          <pc:sldMk cId="285181288" sldId="655"/>
-        </pc:sldMkLst>
-      </pc:sldChg>
-      <pc:sldChg chg="modSp mod">
-        <pc:chgData name="Zhao Jin" userId="cd05a825-544c-438a-9ba1-08e63db50b47" providerId="ADAL" clId="{72D9C2A1-C39E-4B80-B797-517B2040CEFE}" dt="2024-02-01T09:46:33.843" v="9" actId="255"/>
-        <pc:sldMkLst>
-          <pc:docMk/>
-          <pc:sldMk cId="2115053964" sldId="656"/>
-        </pc:sldMkLst>
-      </pc:sldChg>
-      <pc:sldChg chg="modSp mod">
-        <pc:chgData name="Zhao Jin" userId="cd05a825-544c-438a-9ba1-08e63db50b47" providerId="ADAL" clId="{72D9C2A1-C39E-4B80-B797-517B2040CEFE}" dt="2024-02-01T09:46:28.548" v="8" actId="255"/>
-        <pc:sldMkLst>
-          <pc:docMk/>
-          <pc:sldMk cId="2183659375" sldId="657"/>
-        </pc:sldMkLst>
-      </pc:sldChg>
-      <pc:sldChg chg="modSp">
-        <pc:chgData name="Zhao Jin" userId="cd05a825-544c-438a-9ba1-08e63db50b47" providerId="ADAL" clId="{72D9C2A1-C39E-4B80-B797-517B2040CEFE}" dt="2024-02-01T09:45:46.675" v="0"/>
-        <pc:sldMkLst>
-          <pc:docMk/>
-          <pc:sldMk cId="1792936429" sldId="658"/>
-        </pc:sldMkLst>
-      </pc:sldChg>
-      <pc:sldMasterChg chg="modSp modSldLayout">
-        <pc:chgData name="Zhao Jin" userId="cd05a825-544c-438a-9ba1-08e63db50b47" providerId="ADAL" clId="{72D9C2A1-C39E-4B80-B797-517B2040CEFE}" dt="2024-02-01T09:45:46.675" v="0"/>
-        <pc:sldMasterMkLst>
-          <pc:docMk/>
-          <pc:sldMasterMk cId="0" sldId="2147485087"/>
-        </pc:sldMasterMkLst>
-        <pc:sldLayoutChg chg="modSp">
-          <pc:chgData name="Zhao Jin" userId="cd05a825-544c-438a-9ba1-08e63db50b47" providerId="ADAL" clId="{72D9C2A1-C39E-4B80-B797-517B2040CEFE}" dt="2024-02-01T09:45:46.675" v="0"/>
-          <pc:sldLayoutMkLst>
-            <pc:docMk/>
-            <pc:sldMasterMk cId="0" sldId="2147485087"/>
-            <pc:sldLayoutMk cId="0" sldId="2147485088"/>
-          </pc:sldLayoutMkLst>
-        </pc:sldLayoutChg>
-        <pc:sldLayoutChg chg="modSp">
-          <pc:chgData name="Zhao Jin" userId="cd05a825-544c-438a-9ba1-08e63db50b47" providerId="ADAL" clId="{72D9C2A1-C39E-4B80-B797-517B2040CEFE}" dt="2024-02-01T09:45:46.675" v="0"/>
-          <pc:sldLayoutMkLst>
-            <pc:docMk/>
-            <pc:sldMasterMk cId="0" sldId="2147485087"/>
-            <pc:sldLayoutMk cId="0" sldId="2147485089"/>
-          </pc:sldLayoutMkLst>
-        </pc:sldLayoutChg>
-        <pc:sldLayoutChg chg="modSp">
-          <pc:chgData name="Zhao Jin" userId="cd05a825-544c-438a-9ba1-08e63db50b47" providerId="ADAL" clId="{72D9C2A1-C39E-4B80-B797-517B2040CEFE}" dt="2024-02-01T09:45:46.675" v="0"/>
-          <pc:sldLayoutMkLst>
-            <pc:docMk/>
-            <pc:sldMasterMk cId="0" sldId="2147485087"/>
-            <pc:sldLayoutMk cId="0" sldId="2147485090"/>
-          </pc:sldLayoutMkLst>
-        </pc:sldLayoutChg>
-        <pc:sldLayoutChg chg="modSp">
-          <pc:chgData name="Zhao Jin" userId="cd05a825-544c-438a-9ba1-08e63db50b47" providerId="ADAL" clId="{72D9C2A1-C39E-4B80-B797-517B2040CEFE}" dt="2024-02-01T09:45:46.675" v="0"/>
-          <pc:sldLayoutMkLst>
-            <pc:docMk/>
-            <pc:sldMasterMk cId="0" sldId="2147485087"/>
-            <pc:sldLayoutMk cId="0" sldId="2147485091"/>
-          </pc:sldLayoutMkLst>
-        </pc:sldLayoutChg>
-        <pc:sldLayoutChg chg="modSp">
-          <pc:chgData name="Zhao Jin" userId="cd05a825-544c-438a-9ba1-08e63db50b47" providerId="ADAL" clId="{72D9C2A1-C39E-4B80-B797-517B2040CEFE}" dt="2024-02-01T09:45:46.675" v="0"/>
-          <pc:sldLayoutMkLst>
-            <pc:docMk/>
-            <pc:sldMasterMk cId="0" sldId="2147485087"/>
-            <pc:sldLayoutMk cId="0" sldId="2147485092"/>
-          </pc:sldLayoutMkLst>
-        </pc:sldLayoutChg>
-        <pc:sldLayoutChg chg="modSp">
-          <pc:chgData name="Zhao Jin" userId="cd05a825-544c-438a-9ba1-08e63db50b47" providerId="ADAL" clId="{72D9C2A1-C39E-4B80-B797-517B2040CEFE}" dt="2024-02-01T09:45:46.675" v="0"/>
-          <pc:sldLayoutMkLst>
-            <pc:docMk/>
-            <pc:sldMasterMk cId="0" sldId="2147485087"/>
-            <pc:sldLayoutMk cId="0" sldId="2147485093"/>
-          </pc:sldLayoutMkLst>
-        </pc:sldLayoutChg>
-        <pc:sldLayoutChg chg="modSp">
-          <pc:chgData name="Zhao Jin" userId="cd05a825-544c-438a-9ba1-08e63db50b47" providerId="ADAL" clId="{72D9C2A1-C39E-4B80-B797-517B2040CEFE}" dt="2024-02-01T09:45:46.675" v="0"/>
-          <pc:sldLayoutMkLst>
-            <pc:docMk/>
-            <pc:sldMasterMk cId="0" sldId="2147485087"/>
-            <pc:sldLayoutMk cId="0" sldId="2147485094"/>
-          </pc:sldLayoutMkLst>
-        </pc:sldLayoutChg>
-        <pc:sldLayoutChg chg="modSp">
-          <pc:chgData name="Zhao Jin" userId="cd05a825-544c-438a-9ba1-08e63db50b47" providerId="ADAL" clId="{72D9C2A1-C39E-4B80-B797-517B2040CEFE}" dt="2024-02-01T09:45:46.675" v="0"/>
-          <pc:sldLayoutMkLst>
-            <pc:docMk/>
-            <pc:sldMasterMk cId="0" sldId="2147485087"/>
-            <pc:sldLayoutMk cId="0" sldId="2147485095"/>
-          </pc:sldLayoutMkLst>
-        </pc:sldLayoutChg>
-        <pc:sldLayoutChg chg="modSp">
-          <pc:chgData name="Zhao Jin" userId="cd05a825-544c-438a-9ba1-08e63db50b47" providerId="ADAL" clId="{72D9C2A1-C39E-4B80-B797-517B2040CEFE}" dt="2024-02-01T09:45:46.675" v="0"/>
-          <pc:sldLayoutMkLst>
-            <pc:docMk/>
-            <pc:sldMasterMk cId="0" sldId="2147485087"/>
-            <pc:sldLayoutMk cId="0" sldId="2147485096"/>
-          </pc:sldLayoutMkLst>
-        </pc:sldLayoutChg>
-        <pc:sldLayoutChg chg="modSp">
-          <pc:chgData name="Zhao Jin" userId="cd05a825-544c-438a-9ba1-08e63db50b47" providerId="ADAL" clId="{72D9C2A1-C39E-4B80-B797-517B2040CEFE}" dt="2024-02-01T09:45:46.675" v="0"/>
-          <pc:sldLayoutMkLst>
-            <pc:docMk/>
-            <pc:sldMasterMk cId="0" sldId="2147485087"/>
-            <pc:sldLayoutMk cId="0" sldId="2147485097"/>
-          </pc:sldLayoutMkLst>
-        </pc:sldLayoutChg>
-        <pc:sldLayoutChg chg="modSp">
-          <pc:chgData name="Zhao Jin" userId="cd05a825-544c-438a-9ba1-08e63db50b47" providerId="ADAL" clId="{72D9C2A1-C39E-4B80-B797-517B2040CEFE}" dt="2024-02-01T09:45:46.675" v="0"/>
-          <pc:sldLayoutMkLst>
-            <pc:docMk/>
-            <pc:sldMasterMk cId="0" sldId="2147485087"/>
-            <pc:sldLayoutMk cId="0" sldId="2147485098"/>
-          </pc:sldLayoutMkLst>
-        </pc:sldLayoutChg>
-      </pc:sldMasterChg>
-    </pc:docChg>
-  </pc:docChgLst>
-  <pc:docChgLst>
-    <pc:chgData name="Zhao Jin" userId="cd05a825-544c-438a-9ba1-08e63db50b47" providerId="ADAL" clId="{A4A0FEF4-5388-4642-A424-D6144C2A9D07}"/>
-    <pc:docChg chg="undo custSel modSld">
-      <pc:chgData name="Zhao Jin" userId="cd05a825-544c-438a-9ba1-08e63db50b47" providerId="ADAL" clId="{A4A0FEF4-5388-4642-A424-D6144C2A9D07}" dt="2021-01-25T03:36:28.487" v="214" actId="20577"/>
-      <pc:docMkLst>
-        <pc:docMk/>
-      </pc:docMkLst>
-      <pc:sldChg chg="delSp modSp">
-        <pc:chgData name="Zhao Jin" userId="cd05a825-544c-438a-9ba1-08e63db50b47" providerId="ADAL" clId="{A4A0FEF4-5388-4642-A424-D6144C2A9D07}" dt="2021-01-25T03:33:46.226" v="179"/>
-        <pc:sldMkLst>
-          <pc:docMk/>
-          <pc:sldMk cId="2543678377" sldId="531"/>
-        </pc:sldMkLst>
-      </pc:sldChg>
-      <pc:sldChg chg="delSp modSp">
-        <pc:chgData name="Zhao Jin" userId="cd05a825-544c-438a-9ba1-08e63db50b47" providerId="ADAL" clId="{A4A0FEF4-5388-4642-A424-D6144C2A9D07}" dt="2021-01-25T03:33:46.226" v="179"/>
-        <pc:sldMkLst>
-          <pc:docMk/>
-          <pc:sldMk cId="2025693378" sldId="532"/>
-        </pc:sldMkLst>
-      </pc:sldChg>
-      <pc:sldChg chg="delSp modSp">
-        <pc:chgData name="Zhao Jin" userId="cd05a825-544c-438a-9ba1-08e63db50b47" providerId="ADAL" clId="{A4A0FEF4-5388-4642-A424-D6144C2A9D07}" dt="2021-01-25T03:36:13.902" v="213" actId="403"/>
-        <pc:sldMkLst>
-          <pc:docMk/>
-          <pc:sldMk cId="266706937" sldId="533"/>
-        </pc:sldMkLst>
-      </pc:sldChg>
-      <pc:sldChg chg="addSp delSp modSp">
-        <pc:chgData name="Zhao Jin" userId="cd05a825-544c-438a-9ba1-08e63db50b47" providerId="ADAL" clId="{A4A0FEF4-5388-4642-A424-D6144C2A9D07}" dt="2021-01-25T03:36:28.487" v="214" actId="20577"/>
-        <pc:sldMkLst>
-          <pc:docMk/>
-          <pc:sldMk cId="3198948174" sldId="535"/>
-        </pc:sldMkLst>
-      </pc:sldChg>
-    </pc:docChg>
-  </pc:docChgLst>
-  <pc:docChgLst>
-    <pc:chgData name="Zhao Jin" userId="cd05a825-544c-438a-9ba1-08e63db50b47" providerId="ADAL" clId="{D405CF3A-8D58-4DDC-825F-2502DA50F8EC}"/>
-    <pc:docChg chg="undo custSel addSld delSld modSld sldOrd">
-      <pc:chgData name="Zhao Jin" userId="cd05a825-544c-438a-9ba1-08e63db50b47" providerId="ADAL" clId="{D405CF3A-8D58-4DDC-825F-2502DA50F8EC}" dt="2021-04-05T02:58:24.584" v="3873" actId="5793"/>
-      <pc:docMkLst>
-        <pc:docMk/>
-      </pc:docMkLst>
-      <pc:sldChg chg="modSp mod">
-        <pc:chgData name="Zhao Jin" userId="cd05a825-544c-438a-9ba1-08e63db50b47" providerId="ADAL" clId="{D405CF3A-8D58-4DDC-825F-2502DA50F8EC}" dt="2021-03-10T03:37:47.836" v="2" actId="20577"/>
-        <pc:sldMkLst>
-          <pc:docMk/>
-          <pc:sldMk cId="0" sldId="256"/>
-        </pc:sldMkLst>
-      </pc:sldChg>
-      <pc:sldChg chg="modSp mod">
-        <pc:chgData name="Zhao Jin" userId="cd05a825-544c-438a-9ba1-08e63db50b47" providerId="ADAL" clId="{D405CF3A-8D58-4DDC-825F-2502DA50F8EC}" dt="2021-03-30T08:04:41.386" v="1314" actId="5793"/>
-        <pc:sldMkLst>
-          <pc:docMk/>
-          <pc:sldMk cId="4078418712" sldId="525"/>
-        </pc:sldMkLst>
-      </pc:sldChg>
-      <pc:sldChg chg="modSp del">
-        <pc:chgData name="Zhao Jin" userId="cd05a825-544c-438a-9ba1-08e63db50b47" providerId="ADAL" clId="{D405CF3A-8D58-4DDC-825F-2502DA50F8EC}" dt="2021-03-29T08:50:57.660" v="5" actId="47"/>
-        <pc:sldMkLst>
-          <pc:docMk/>
-          <pc:sldMk cId="1427618944" sldId="553"/>
-        </pc:sldMkLst>
-      </pc:sldChg>
-      <pc:sldChg chg="addSp delSp modSp add mod addAnim delAnim modAnim">
-        <pc:chgData name="Zhao Jin" userId="cd05a825-544c-438a-9ba1-08e63db50b47" providerId="ADAL" clId="{D405CF3A-8D58-4DDC-825F-2502DA50F8EC}" dt="2021-04-05T02:03:15.445" v="1775" actId="207"/>
-        <pc:sldMkLst>
-          <pc:docMk/>
-          <pc:sldMk cId="3056023935" sldId="596"/>
-        </pc:sldMkLst>
-      </pc:sldChg>
-      <pc:sldChg chg="modSp del">
-        <pc:chgData name="Zhao Jin" userId="cd05a825-544c-438a-9ba1-08e63db50b47" providerId="ADAL" clId="{D405CF3A-8D58-4DDC-825F-2502DA50F8EC}" dt="2021-03-29T08:50:57.660" v="5" actId="47"/>
-        <pc:sldMkLst>
-          <pc:docMk/>
-          <pc:sldMk cId="1542002799" sldId="602"/>
-        </pc:sldMkLst>
-      </pc:sldChg>
-      <pc:sldChg chg="addSp delSp modSp add mod ord">
-        <pc:chgData name="Zhao Jin" userId="cd05a825-544c-438a-9ba1-08e63db50b47" providerId="ADAL" clId="{D405CF3A-8D58-4DDC-825F-2502DA50F8EC}" dt="2021-03-29T09:10:55.096" v="1240" actId="20577"/>
-        <pc:sldMkLst>
-          <pc:docMk/>
-          <pc:sldMk cId="2840099445" sldId="602"/>
-        </pc:sldMkLst>
-      </pc:sldChg>
-      <pc:sldChg chg="addSp delSp modSp add mod ord delAnim">
-        <pc:chgData name="Zhao Jin" userId="cd05a825-544c-438a-9ba1-08e63db50b47" providerId="ADAL" clId="{D405CF3A-8D58-4DDC-825F-2502DA50F8EC}" dt="2021-03-29T09:10:58.230" v="1241"/>
-        <pc:sldMkLst>
-          <pc:docMk/>
-          <pc:sldMk cId="657864584" sldId="603"/>
-        </pc:sldMkLst>
-      </pc:sldChg>
-      <pc:sldChg chg="addSp delSp modSp add del mod">
-        <pc:chgData name="Zhao Jin" userId="cd05a825-544c-438a-9ba1-08e63db50b47" providerId="ADAL" clId="{D405CF3A-8D58-4DDC-825F-2502DA50F8EC}" dt="2021-03-30T08:03:45.884" v="1286" actId="20577"/>
-        <pc:sldMkLst>
-          <pc:docMk/>
-          <pc:sldMk cId="2266731302" sldId="604"/>
-        </pc:sldMkLst>
-      </pc:sldChg>
-      <pc:sldChg chg="modSp del">
-        <pc:chgData name="Zhao Jin" userId="cd05a825-544c-438a-9ba1-08e63db50b47" providerId="ADAL" clId="{D405CF3A-8D58-4DDC-825F-2502DA50F8EC}" dt="2021-03-29T08:50:57.660" v="5" actId="47"/>
-        <pc:sldMkLst>
-          <pc:docMk/>
-          <pc:sldMk cId="2489370454" sldId="605"/>
-        </pc:sldMkLst>
-      </pc:sldChg>
-      <pc:sldChg chg="addSp delSp modSp add mod delAnim modAnim">
-        <pc:chgData name="Zhao Jin" userId="cd05a825-544c-438a-9ba1-08e63db50b47" providerId="ADAL" clId="{D405CF3A-8D58-4DDC-825F-2502DA50F8EC}" dt="2021-04-05T02:01:06.966" v="1717" actId="1076"/>
-        <pc:sldMkLst>
-          <pc:docMk/>
-          <pc:sldMk cId="3047898109" sldId="605"/>
-        </pc:sldMkLst>
-      </pc:sldChg>
-      <pc:sldChg chg="modSp del">
-        <pc:chgData name="Zhao Jin" userId="cd05a825-544c-438a-9ba1-08e63db50b47" providerId="ADAL" clId="{D405CF3A-8D58-4DDC-825F-2502DA50F8EC}" dt="2021-03-29T08:50:57.660" v="5" actId="47"/>
-        <pc:sldMkLst>
-          <pc:docMk/>
-          <pc:sldMk cId="640598186" sldId="606"/>
-        </pc:sldMkLst>
-      </pc:sldChg>
-      <pc:sldChg chg="delSp add del mod">
-        <pc:chgData name="Zhao Jin" userId="cd05a825-544c-438a-9ba1-08e63db50b47" providerId="ADAL" clId="{D405CF3A-8D58-4DDC-825F-2502DA50F8EC}" dt="2021-03-29T09:09:55.703" v="1202" actId="47"/>
-        <pc:sldMkLst>
-          <pc:docMk/>
-          <pc:sldMk cId="3170227100" sldId="607"/>
-        </pc:sldMkLst>
-      </pc:sldChg>
-      <pc:sldChg chg="delSp add del mod">
-        <pc:chgData name="Zhao Jin" userId="cd05a825-544c-438a-9ba1-08e63db50b47" providerId="ADAL" clId="{D405CF3A-8D58-4DDC-825F-2502DA50F8EC}" dt="2021-03-29T09:09:56.632" v="1203" actId="47"/>
-        <pc:sldMkLst>
-          <pc:docMk/>
-          <pc:sldMk cId="4252117905" sldId="608"/>
-        </pc:sldMkLst>
-      </pc:sldChg>
-      <pc:sldChg chg="modSp del">
-        <pc:chgData name="Zhao Jin" userId="cd05a825-544c-438a-9ba1-08e63db50b47" providerId="ADAL" clId="{D405CF3A-8D58-4DDC-825F-2502DA50F8EC}" dt="2021-03-29T08:50:57.660" v="5" actId="47"/>
-        <pc:sldMkLst>
-          <pc:docMk/>
-          <pc:sldMk cId="282410985" sldId="620"/>
-        </pc:sldMkLst>
-      </pc:sldChg>
-      <pc:sldChg chg="modSp del">
-        <pc:chgData name="Zhao Jin" userId="cd05a825-544c-438a-9ba1-08e63db50b47" providerId="ADAL" clId="{D405CF3A-8D58-4DDC-825F-2502DA50F8EC}" dt="2021-03-29T08:50:57.660" v="5" actId="47"/>
-        <pc:sldMkLst>
-          <pc:docMk/>
-          <pc:sldMk cId="3503582036" sldId="622"/>
-        </pc:sldMkLst>
-      </pc:sldChg>
-      <pc:sldChg chg="modSp add mod">
-        <pc:chgData name="Zhao Jin" userId="cd05a825-544c-438a-9ba1-08e63db50b47" providerId="ADAL" clId="{D405CF3A-8D58-4DDC-825F-2502DA50F8EC}" dt="2021-04-05T01:49:45.475" v="1320" actId="948"/>
-        <pc:sldMkLst>
-          <pc:docMk/>
-          <pc:sldMk cId="4000828616" sldId="626"/>
-        </pc:sldMkLst>
-      </pc:sldChg>
-      <pc:sldChg chg="modSp add mod">
-        <pc:chgData name="Zhao Jin" userId="cd05a825-544c-438a-9ba1-08e63db50b47" providerId="ADAL" clId="{D405CF3A-8D58-4DDC-825F-2502DA50F8EC}" dt="2021-03-30T08:03:50.003" v="1288" actId="20577"/>
-        <pc:sldMkLst>
-          <pc:docMk/>
-          <pc:sldMk cId="2964341788" sldId="627"/>
-        </pc:sldMkLst>
-      </pc:sldChg>
-      <pc:sldChg chg="modSp del">
-        <pc:chgData name="Zhao Jin" userId="cd05a825-544c-438a-9ba1-08e63db50b47" providerId="ADAL" clId="{D405CF3A-8D58-4DDC-825F-2502DA50F8EC}" dt="2021-03-29T08:50:57.660" v="5" actId="47"/>
-        <pc:sldMkLst>
-          <pc:docMk/>
-          <pc:sldMk cId="1258830549" sldId="635"/>
-        </pc:sldMkLst>
-      </pc:sldChg>
-      <pc:sldChg chg="modSp del">
-        <pc:chgData name="Zhao Jin" userId="cd05a825-544c-438a-9ba1-08e63db50b47" providerId="ADAL" clId="{D405CF3A-8D58-4DDC-825F-2502DA50F8EC}" dt="2021-03-29T08:50:57.660" v="5" actId="47"/>
-        <pc:sldMkLst>
-          <pc:docMk/>
-          <pc:sldMk cId="1235845528" sldId="637"/>
-        </pc:sldMkLst>
-      </pc:sldChg>
-      <pc:sldChg chg="modSp del">
-        <pc:chgData name="Zhao Jin" userId="cd05a825-544c-438a-9ba1-08e63db50b47" providerId="ADAL" clId="{D405CF3A-8D58-4DDC-825F-2502DA50F8EC}" dt="2021-03-29T08:50:57.660" v="5" actId="47"/>
-        <pc:sldMkLst>
-          <pc:docMk/>
-          <pc:sldMk cId="3042096305" sldId="638"/>
-        </pc:sldMkLst>
-      </pc:sldChg>
-      <pc:sldChg chg="addSp delSp modSp add mod">
-        <pc:chgData name="Zhao Jin" userId="cd05a825-544c-438a-9ba1-08e63db50b47" providerId="ADAL" clId="{D405CF3A-8D58-4DDC-825F-2502DA50F8EC}" dt="2021-04-05T02:08:57.101" v="1935"/>
-        <pc:sldMkLst>
-          <pc:docMk/>
-          <pc:sldMk cId="4089006062" sldId="642"/>
-        </pc:sldMkLst>
-      </pc:sldChg>
-      <pc:sldChg chg="modSp add mod">
-        <pc:chgData name="Zhao Jin" userId="cd05a825-544c-438a-9ba1-08e63db50b47" providerId="ADAL" clId="{D405CF3A-8D58-4DDC-825F-2502DA50F8EC}" dt="2021-04-05T02:22:31.348" v="2125" actId="20577"/>
-        <pc:sldMkLst>
-          <pc:docMk/>
-          <pc:sldMk cId="2663715734" sldId="647"/>
-        </pc:sldMkLst>
-      </pc:sldChg>
-      <pc:sldChg chg="modSp add mod">
-        <pc:chgData name="Zhao Jin" userId="cd05a825-544c-438a-9ba1-08e63db50b47" providerId="ADAL" clId="{D405CF3A-8D58-4DDC-825F-2502DA50F8EC}" dt="2021-04-05T02:08:55.398" v="1934"/>
-        <pc:sldMkLst>
-          <pc:docMk/>
-          <pc:sldMk cId="2331399055" sldId="648"/>
-        </pc:sldMkLst>
-      </pc:sldChg>
-      <pc:sldChg chg="add del">
-        <pc:chgData name="Zhao Jin" userId="cd05a825-544c-438a-9ba1-08e63db50b47" providerId="ADAL" clId="{D405CF3A-8D58-4DDC-825F-2502DA50F8EC}" dt="2021-04-05T02:27:20.276" v="2485" actId="47"/>
-        <pc:sldMkLst>
-          <pc:docMk/>
-          <pc:sldMk cId="719925187" sldId="649"/>
-        </pc:sldMkLst>
-      </pc:sldChg>
-      <pc:sldChg chg="delSp modSp add del mod modAnim">
-        <pc:chgData name="Zhao Jin" userId="cd05a825-544c-438a-9ba1-08e63db50b47" providerId="ADAL" clId="{D405CF3A-8D58-4DDC-825F-2502DA50F8EC}" dt="2021-04-05T02:22:48.772" v="2128" actId="47"/>
-        <pc:sldMkLst>
-          <pc:docMk/>
-          <pc:sldMk cId="3290927106" sldId="649"/>
-        </pc:sldMkLst>
-      </pc:sldChg>
-      <pc:sldChg chg="addSp modSp add del mod">
-        <pc:chgData name="Zhao Jin" userId="cd05a825-544c-438a-9ba1-08e63db50b47" providerId="ADAL" clId="{D405CF3A-8D58-4DDC-825F-2502DA50F8EC}" dt="2021-04-05T02:26:59.197" v="2483" actId="47"/>
-        <pc:sldMkLst>
-          <pc:docMk/>
-          <pc:sldMk cId="1606202935" sldId="650"/>
-        </pc:sldMkLst>
-      </pc:sldChg>
-      <pc:sldChg chg="add del ord">
-        <pc:chgData name="Zhao Jin" userId="cd05a825-544c-438a-9ba1-08e63db50b47" providerId="ADAL" clId="{D405CF3A-8D58-4DDC-825F-2502DA50F8EC}" dt="2021-04-05T02:29:12.823" v="2503" actId="47"/>
-        <pc:sldMkLst>
-          <pc:docMk/>
-          <pc:sldMk cId="250897438" sldId="651"/>
-        </pc:sldMkLst>
-      </pc:sldChg>
-      <pc:sldChg chg="add del">
-        <pc:chgData name="Zhao Jin" userId="cd05a825-544c-438a-9ba1-08e63db50b47" providerId="ADAL" clId="{D405CF3A-8D58-4DDC-825F-2502DA50F8EC}" dt="2021-04-05T02:29:02.250" v="2500" actId="47"/>
-        <pc:sldMkLst>
-          <pc:docMk/>
-          <pc:sldMk cId="866535535" sldId="652"/>
-        </pc:sldMkLst>
-      </pc:sldChg>
-      <pc:sldChg chg="addSp delSp modSp add mod">
-        <pc:chgData name="Zhao Jin" userId="cd05a825-544c-438a-9ba1-08e63db50b47" providerId="ADAL" clId="{D405CF3A-8D58-4DDC-825F-2502DA50F8EC}" dt="2021-04-05T02:58:24.584" v="3873" actId="5793"/>
-        <pc:sldMkLst>
-          <pc:docMk/>
-          <pc:sldMk cId="529358301" sldId="653"/>
-        </pc:sldMkLst>
-      </pc:sldChg>
-      <pc:sldChg chg="addSp delSp modSp add del mod modAnim">
-        <pc:chgData name="Zhao Jin" userId="cd05a825-544c-438a-9ba1-08e63db50b47" providerId="ADAL" clId="{D405CF3A-8D58-4DDC-825F-2502DA50F8EC}" dt="2021-04-05T02:57:51.686" v="3869" actId="1036"/>
-        <pc:sldMkLst>
-          <pc:docMk/>
-          <pc:sldMk cId="1302906930" sldId="654"/>
-        </pc:sldMkLst>
-      </pc:sldChg>
-      <pc:sldChg chg="addSp modSp add mod modAnim">
-        <pc:chgData name="Zhao Jin" userId="cd05a825-544c-438a-9ba1-08e63db50b47" providerId="ADAL" clId="{D405CF3A-8D58-4DDC-825F-2502DA50F8EC}" dt="2021-04-05T02:56:07.773" v="3867" actId="20577"/>
-        <pc:sldMkLst>
-          <pc:docMk/>
-          <pc:sldMk cId="285181288" sldId="655"/>
-        </pc:sldMkLst>
-      </pc:sldChg>
-      <pc:sldChg chg="addSp delSp modSp add mod delAnim modAnim">
-        <pc:chgData name="Zhao Jin" userId="cd05a825-544c-438a-9ba1-08e63db50b47" providerId="ADAL" clId="{D405CF3A-8D58-4DDC-825F-2502DA50F8EC}" dt="2021-04-05T02:55:58.855" v="3866"/>
-        <pc:sldMkLst>
-          <pc:docMk/>
-          <pc:sldMk cId="2115053964" sldId="656"/>
-        </pc:sldMkLst>
-      </pc:sldChg>
-      <pc:sldChg chg="addSp delSp modSp add mod ord">
-        <pc:chgData name="Zhao Jin" userId="cd05a825-544c-438a-9ba1-08e63db50b47" providerId="ADAL" clId="{D405CF3A-8D58-4DDC-825F-2502DA50F8EC}" dt="2021-04-05T02:55:55.703" v="3865"/>
-        <pc:sldMkLst>
-          <pc:docMk/>
-          <pc:sldMk cId="2183659375" sldId="657"/>
-        </pc:sldMkLst>
-      </pc:sldChg>
-      <pc:sldChg chg="add del">
-        <pc:chgData name="Zhao Jin" userId="cd05a825-544c-438a-9ba1-08e63db50b47" providerId="ADAL" clId="{D405CF3A-8D58-4DDC-825F-2502DA50F8EC}" dt="2021-04-05T02:39:31.632" v="2915"/>
-        <pc:sldMkLst>
-          <pc:docMk/>
-          <pc:sldMk cId="1141928799" sldId="658"/>
-        </pc:sldMkLst>
-      </pc:sldChg>
-    </pc:docChg>
-  </pc:docChgLst>
-  <pc:docChgLst>
-    <pc:chgData name="Zhao Jin" userId="cd05a825-544c-438a-9ba1-08e63db50b47" providerId="ADAL" clId="{C328B041-D897-B548-9F0A-DA2B3CC3BF8E}"/>
-    <pc:docChg chg="undo custSel modSld">
-      <pc:chgData name="Zhao Jin" userId="cd05a825-544c-438a-9ba1-08e63db50b47" providerId="ADAL" clId="{C328B041-D897-B548-9F0A-DA2B3CC3BF8E}" dt="2021-03-08T02:30:29.708" v="502" actId="478"/>
-      <pc:docMkLst>
-        <pc:docMk/>
-      </pc:docMkLst>
-      <pc:sldChg chg="addSp delSp modSp">
-        <pc:chgData name="Zhao Jin" userId="cd05a825-544c-438a-9ba1-08e63db50b47" providerId="ADAL" clId="{C328B041-D897-B548-9F0A-DA2B3CC3BF8E}" dt="2021-03-08T01:59:34.595" v="472" actId="1076"/>
-        <pc:sldMkLst>
-          <pc:docMk/>
-          <pc:sldMk cId="640598186" sldId="606"/>
-        </pc:sldMkLst>
-      </pc:sldChg>
-      <pc:sldChg chg="addSp delSp modSp delAnim modAnim">
-        <pc:chgData name="Zhao Jin" userId="cd05a825-544c-438a-9ba1-08e63db50b47" providerId="ADAL" clId="{C328B041-D897-B548-9F0A-DA2B3CC3BF8E}" dt="2021-03-08T02:29:23.604" v="485"/>
-        <pc:sldMkLst>
-          <pc:docMk/>
-          <pc:sldMk cId="282410985" sldId="620"/>
-        </pc:sldMkLst>
-      </pc:sldChg>
-      <pc:sldChg chg="modAnim">
-        <pc:chgData name="Zhao Jin" userId="cd05a825-544c-438a-9ba1-08e63db50b47" providerId="ADAL" clId="{C328B041-D897-B548-9F0A-DA2B3CC3BF8E}" dt="2021-03-08T02:28:00.489" v="483"/>
-        <pc:sldMkLst>
-          <pc:docMk/>
-          <pc:sldMk cId="3503582036" sldId="622"/>
-        </pc:sldMkLst>
-      </pc:sldChg>
-      <pc:sldChg chg="delSp modSp modAnim">
-        <pc:chgData name="Zhao Jin" userId="cd05a825-544c-438a-9ba1-08e63db50b47" providerId="ADAL" clId="{C328B041-D897-B548-9F0A-DA2B3CC3BF8E}" dt="2021-03-08T02:30:29.708" v="502" actId="478"/>
-        <pc:sldMkLst>
-          <pc:docMk/>
-          <pc:sldMk cId="1258830549" sldId="635"/>
-        </pc:sldMkLst>
-      </pc:sldChg>
-    </pc:docChg>
-  </pc:docChgLst>
-  <pc:docChgLst>
-    <pc:chgData name="Zhao Jin" userId="cd05a825-544c-438a-9ba1-08e63db50b47" providerId="ADAL" clId="{361A1740-F4C1-4B47-BB81-05E812CC2309}"/>
-    <pc:docChg chg="modSld">
-      <pc:chgData name="Zhao Jin" userId="cd05a825-544c-438a-9ba1-08e63db50b47" providerId="ADAL" clId="{361A1740-F4C1-4B47-BB81-05E812CC2309}" dt="2025-03-31T11:59:33.522" v="1" actId="20577"/>
-      <pc:docMkLst>
-        <pc:docMk/>
-      </pc:docMkLst>
-      <pc:sldChg chg="modSp mod">
-        <pc:chgData name="Zhao Jin" userId="cd05a825-544c-438a-9ba1-08e63db50b47" providerId="ADAL" clId="{361A1740-F4C1-4B47-BB81-05E812CC2309}" dt="2025-03-31T11:59:33.522" v="1" actId="20577"/>
-        <pc:sldMkLst>
-          <pc:docMk/>
-          <pc:sldMk cId="3562510052" sldId="659"/>
-        </pc:sldMkLst>
       </pc:sldChg>
     </pc:docChg>
   </pc:docChgLst>
@@ -2607,7 +875,7 @@
               <a:pPr>
                 <a:defRPr/>
               </a:pPr>
-              <a:t>4/8/2025</a:t>
+              <a:t>4/7/2026</a:t>
             </a:fld>
             <a:endParaRPr lang="en-US"/>
           </a:p>
@@ -9015,7 +7283,7 @@
           <a:lstStyle/>
           <a:p>
             <a:r>
-              <a:rPr lang="en-US"/>
+              <a:rPr lang="en-US" dirty="0"/>
               <a:t>{'d', 'g', 'c', 'h', 'b', 'e', 'a', 'f'}</a:t>
             </a:r>
           </a:p>
@@ -9082,21 +7350,21 @@
               <a:buSzPct val="100000"/>
             </a:pPr>
             <a:r>
-              <a:rPr lang="en-GB"/>
+              <a:rPr lang="en-GB" dirty="0"/>
               <a:t>There cannot be repeated positions </a:t>
             </a:r>
             <a:br>
-              <a:rPr lang="en-GB"/>
+              <a:rPr lang="en-GB" dirty="0"/>
             </a:br>
             <a:r>
-              <a:rPr lang="en-GB"/>
+              <a:rPr lang="en-GB" dirty="0"/>
               <a:t>since two queens cannot be in the </a:t>
             </a:r>
             <a:br>
-              <a:rPr lang="en-GB"/>
+              <a:rPr lang="en-GB" dirty="0"/>
             </a:br>
             <a:r>
-              <a:rPr lang="en-GB"/>
+              <a:rPr lang="en-GB" dirty="0"/>
               <a:t>same column.</a:t>
             </a:r>
           </a:p>
@@ -10260,8 +8528,8 @@
         </p:nvSpPr>
         <p:spPr>
           <a:xfrm>
-            <a:off x="6116738" y="3868542"/>
-            <a:ext cx="3006524" cy="1477328"/>
+            <a:off x="4589662" y="5199729"/>
+            <a:ext cx="4325738" cy="1477328"/>
           </a:xfrm>
           <a:prstGeom prst="rect">
             <a:avLst/>
@@ -10308,11 +8576,203 @@
             </a:pPr>
             <a:r>
               <a:rPr lang="en-US" dirty="0">
-                <a:latin typeface="Calibri" panose="020F0502020204030204" pitchFamily="34" charset="0"/>
+                <a:latin typeface="+mj-lt"/>
                 <a:ea typeface="Calibri" panose="020F0502020204030204" pitchFamily="34" charset="0"/>
                 <a:cs typeface="Calibri" panose="020F0502020204030204" pitchFamily="34" charset="0"/>
               </a:rPr>
-              <a:t>queens = {a, b, c, d, e, f, g, h}</a:t>
+              <a:t>queens = {</a:t>
+            </a:r>
+            <a:r>
+              <a:rPr lang="en-US" dirty="0"/>
+              <a:t>'</a:t>
+            </a:r>
+            <a:r>
+              <a:rPr lang="en-US" dirty="0">
+                <a:latin typeface="+mj-lt"/>
+                <a:ea typeface="Calibri" panose="020F0502020204030204" pitchFamily="34" charset="0"/>
+                <a:cs typeface="Calibri" panose="020F0502020204030204" pitchFamily="34" charset="0"/>
+              </a:rPr>
+              <a:t>a</a:t>
+            </a:r>
+            <a:r>
+              <a:rPr lang="en-US" dirty="0"/>
+              <a:t>'</a:t>
+            </a:r>
+            <a:r>
+              <a:rPr lang="en-US" dirty="0">
+                <a:latin typeface="+mj-lt"/>
+                <a:ea typeface="Calibri" panose="020F0502020204030204" pitchFamily="34" charset="0"/>
+                <a:cs typeface="Calibri" panose="020F0502020204030204" pitchFamily="34" charset="0"/>
+              </a:rPr>
+              <a:t>, </a:t>
+            </a:r>
+            <a:r>
+              <a:rPr lang="en-US" dirty="0"/>
+              <a:t>'</a:t>
+            </a:r>
+            <a:r>
+              <a:rPr lang="en-US" dirty="0">
+                <a:latin typeface="+mj-lt"/>
+                <a:ea typeface="Calibri" panose="020F0502020204030204" pitchFamily="34" charset="0"/>
+                <a:cs typeface="Calibri" panose="020F0502020204030204" pitchFamily="34" charset="0"/>
+              </a:rPr>
+              <a:t>b</a:t>
+            </a:r>
+            <a:r>
+              <a:rPr lang="en-US" dirty="0"/>
+              <a:t>'</a:t>
+            </a:r>
+            <a:r>
+              <a:rPr lang="en-US" dirty="0">
+                <a:latin typeface="+mj-lt"/>
+                <a:ea typeface="Calibri" panose="020F0502020204030204" pitchFamily="34" charset="0"/>
+                <a:cs typeface="Calibri" panose="020F0502020204030204" pitchFamily="34" charset="0"/>
+              </a:rPr>
+              <a:t>, </a:t>
+            </a:r>
+            <a:r>
+              <a:rPr lang="en-US" dirty="0"/>
+              <a:t>'</a:t>
+            </a:r>
+            <a:r>
+              <a:rPr lang="en-US" dirty="0">
+                <a:latin typeface="+mj-lt"/>
+                <a:ea typeface="Calibri" panose="020F0502020204030204" pitchFamily="34" charset="0"/>
+                <a:cs typeface="Calibri" panose="020F0502020204030204" pitchFamily="34" charset="0"/>
+              </a:rPr>
+              <a:t>c</a:t>
+            </a:r>
+            <a:r>
+              <a:rPr lang="en-US" dirty="0"/>
+              <a:t>'</a:t>
+            </a:r>
+            <a:r>
+              <a:rPr lang="en-US" dirty="0">
+                <a:latin typeface="+mj-lt"/>
+                <a:ea typeface="Calibri" panose="020F0502020204030204" pitchFamily="34" charset="0"/>
+                <a:cs typeface="Calibri" panose="020F0502020204030204" pitchFamily="34" charset="0"/>
+              </a:rPr>
+              <a:t>, </a:t>
+            </a:r>
+            <a:r>
+              <a:rPr lang="en-US" dirty="0"/>
+              <a:t>'</a:t>
+            </a:r>
+            <a:r>
+              <a:rPr lang="en-US" dirty="0">
+                <a:latin typeface="+mj-lt"/>
+                <a:ea typeface="Calibri" panose="020F0502020204030204" pitchFamily="34" charset="0"/>
+                <a:cs typeface="Calibri" panose="020F0502020204030204" pitchFamily="34" charset="0"/>
+              </a:rPr>
+              <a:t>d</a:t>
+            </a:r>
+            <a:r>
+              <a:rPr lang="en-US" dirty="0"/>
+              <a:t>'</a:t>
+            </a:r>
+            <a:r>
+              <a:rPr lang="en-US" dirty="0">
+                <a:latin typeface="+mj-lt"/>
+                <a:ea typeface="Calibri" panose="020F0502020204030204" pitchFamily="34" charset="0"/>
+                <a:cs typeface="Calibri" panose="020F0502020204030204" pitchFamily="34" charset="0"/>
+              </a:rPr>
+              <a:t>, </a:t>
+            </a:r>
+            <a:r>
+              <a:rPr lang="en-US" dirty="0"/>
+              <a:t>'</a:t>
+            </a:r>
+            <a:r>
+              <a:rPr lang="en-US" dirty="0">
+                <a:latin typeface="+mj-lt"/>
+                <a:ea typeface="Calibri" panose="020F0502020204030204" pitchFamily="34" charset="0"/>
+                <a:cs typeface="Calibri" panose="020F0502020204030204" pitchFamily="34" charset="0"/>
+              </a:rPr>
+              <a:t>e</a:t>
+            </a:r>
+            <a:r>
+              <a:rPr lang="en-US" dirty="0"/>
+              <a:t>'</a:t>
+            </a:r>
+            <a:r>
+              <a:rPr lang="en-US" dirty="0">
+                <a:latin typeface="+mj-lt"/>
+                <a:ea typeface="Calibri" panose="020F0502020204030204" pitchFamily="34" charset="0"/>
+                <a:cs typeface="Calibri" panose="020F0502020204030204" pitchFamily="34" charset="0"/>
+              </a:rPr>
+              <a:t>, </a:t>
+            </a:r>
+            <a:r>
+              <a:rPr lang="en-US" dirty="0"/>
+              <a:t>'</a:t>
+            </a:r>
+            <a:r>
+              <a:rPr lang="en-US" dirty="0">
+                <a:latin typeface="+mj-lt"/>
+                <a:ea typeface="Calibri" panose="020F0502020204030204" pitchFamily="34" charset="0"/>
+                <a:cs typeface="Calibri" panose="020F0502020204030204" pitchFamily="34" charset="0"/>
+              </a:rPr>
+              <a:t>f</a:t>
+            </a:r>
+            <a:r>
+              <a:rPr lang="en-US" dirty="0"/>
+              <a:t>'</a:t>
+            </a:r>
+            <a:r>
+              <a:rPr lang="en-US" dirty="0">
+                <a:latin typeface="+mj-lt"/>
+                <a:ea typeface="Calibri" panose="020F0502020204030204" pitchFamily="34" charset="0"/>
+                <a:cs typeface="Calibri" panose="020F0502020204030204" pitchFamily="34" charset="0"/>
+              </a:rPr>
+              <a:t>, </a:t>
+            </a:r>
+            <a:r>
+              <a:rPr lang="en-US" dirty="0"/>
+              <a:t>'</a:t>
+            </a:r>
+            <a:r>
+              <a:rPr lang="en-US" dirty="0">
+                <a:latin typeface="+mj-lt"/>
+                <a:ea typeface="Calibri" panose="020F0502020204030204" pitchFamily="34" charset="0"/>
+                <a:cs typeface="Calibri" panose="020F0502020204030204" pitchFamily="34" charset="0"/>
+              </a:rPr>
+              <a:t>g</a:t>
+            </a:r>
+            <a:r>
+              <a:rPr lang="en-US" dirty="0"/>
+              <a:t>'</a:t>
+            </a:r>
+            <a:r>
+              <a:rPr lang="en-US" dirty="0">
+                <a:latin typeface="+mj-lt"/>
+                <a:ea typeface="Calibri" panose="020F0502020204030204" pitchFamily="34" charset="0"/>
+                <a:cs typeface="Calibri" panose="020F0502020204030204" pitchFamily="34" charset="0"/>
+              </a:rPr>
+              <a:t>, </a:t>
+            </a:r>
+            <a:r>
+              <a:rPr lang="en-US" dirty="0"/>
+              <a:t>'</a:t>
+            </a:r>
+            <a:r>
+              <a:rPr lang="en-US" dirty="0">
+                <a:latin typeface="+mj-lt"/>
+                <a:ea typeface="Calibri" panose="020F0502020204030204" pitchFamily="34" charset="0"/>
+                <a:cs typeface="Calibri" panose="020F0502020204030204" pitchFamily="34" charset="0"/>
+              </a:rPr>
+              <a:t>h</a:t>
+            </a:r>
+            <a:r>
+              <a:rPr lang="en-US" dirty="0"/>
+              <a:t>'</a:t>
+            </a:r>
+            <a:r>
+              <a:rPr lang="en-US" dirty="0">
+                <a:latin typeface="+mj-lt"/>
+                <a:ea typeface="Calibri" panose="020F0502020204030204" pitchFamily="34" charset="0"/>
+                <a:cs typeface="Calibri" panose="020F0502020204030204" pitchFamily="34" charset="0"/>
+              </a:rPr>
+              <a:t>}</a:t>
             </a:r>
           </a:p>
           <a:p>
@@ -10334,11 +8794,37 @@
             <a:r>
               <a:rPr lang="en-US" b="0" i="0" dirty="0">
                 <a:effectLst/>
-                <a:latin typeface="Calibri" panose="020F0502020204030204" pitchFamily="34" charset="0"/>
+                <a:latin typeface="+mj-lt"/>
                 <a:ea typeface="Calibri" panose="020F0502020204030204" pitchFamily="34" charset="0"/>
                 <a:cs typeface="Calibri" panose="020F0502020204030204" pitchFamily="34" charset="0"/>
               </a:rPr>
-              <a:t>Try solutions {a, …}</a:t>
+              <a:t>Try solutions {</a:t>
+            </a:r>
+            <a:r>
+              <a:rPr lang="en-US" dirty="0"/>
+              <a:t>'</a:t>
+            </a:r>
+            <a:r>
+              <a:rPr lang="en-US" b="0" i="0" dirty="0">
+                <a:effectLst/>
+                <a:latin typeface="+mj-lt"/>
+                <a:ea typeface="Calibri" panose="020F0502020204030204" pitchFamily="34" charset="0"/>
+                <a:cs typeface="Calibri" panose="020F0502020204030204" pitchFamily="34" charset="0"/>
+              </a:rPr>
+              <a:t>a</a:t>
+            </a:r>
+            <a:r>
+              <a:rPr lang="en-US" dirty="0"/>
+              <a:t>'</a:t>
+            </a:r>
+            <a:r>
+              <a:rPr lang="en-US" b="0" i="0" dirty="0">
+                <a:effectLst/>
+                <a:latin typeface="+mj-lt"/>
+                <a:ea typeface="Calibri" panose="020F0502020204030204" pitchFamily="34" charset="0"/>
+                <a:cs typeface="Calibri" panose="020F0502020204030204" pitchFamily="34" charset="0"/>
+              </a:rPr>
+              <a:t>, …}</a:t>
             </a:r>
           </a:p>
           <a:p>
@@ -10359,11 +8845,35 @@
             </a:pPr>
             <a:r>
               <a:rPr lang="en-US" dirty="0">
-                <a:latin typeface="Calibri" panose="020F0502020204030204" pitchFamily="34" charset="0"/>
+                <a:latin typeface="+mj-lt"/>
                 <a:ea typeface="Calibri" panose="020F0502020204030204" pitchFamily="34" charset="0"/>
                 <a:cs typeface="Calibri" panose="020F0502020204030204" pitchFamily="34" charset="0"/>
               </a:rPr>
-              <a:t>Try solutions {b, …}</a:t>
+              <a:t>Try solutions {</a:t>
+            </a:r>
+            <a:r>
+              <a:rPr lang="en-US" dirty="0"/>
+              <a:t>'</a:t>
+            </a:r>
+            <a:r>
+              <a:rPr lang="en-US" dirty="0">
+                <a:latin typeface="+mj-lt"/>
+                <a:ea typeface="Calibri" panose="020F0502020204030204" pitchFamily="34" charset="0"/>
+                <a:cs typeface="Calibri" panose="020F0502020204030204" pitchFamily="34" charset="0"/>
+              </a:rPr>
+              <a:t>b</a:t>
+            </a:r>
+            <a:r>
+              <a:rPr lang="en-US" dirty="0"/>
+              <a:t>'</a:t>
+            </a:r>
+            <a:r>
+              <a:rPr lang="en-US" dirty="0">
+                <a:latin typeface="+mj-lt"/>
+                <a:ea typeface="Calibri" panose="020F0502020204030204" pitchFamily="34" charset="0"/>
+                <a:cs typeface="Calibri" panose="020F0502020204030204" pitchFamily="34" charset="0"/>
+              </a:rPr>
+              <a:t>, …}</a:t>
             </a:r>
           </a:p>
           <a:p>
@@ -10384,7 +8894,7 @@
             </a:pPr>
             <a:r>
               <a:rPr lang="en-US" dirty="0">
-                <a:latin typeface="Calibri" panose="020F0502020204030204" pitchFamily="34" charset="0"/>
+                <a:latin typeface="+mj-lt"/>
                 <a:ea typeface="Calibri" panose="020F0502020204030204" pitchFamily="34" charset="0"/>
                 <a:cs typeface="Calibri" panose="020F0502020204030204" pitchFamily="34" charset="0"/>
               </a:rPr>
@@ -10409,11 +8919,35 @@
             </a:pPr>
             <a:r>
               <a:rPr lang="en-US" dirty="0">
-                <a:latin typeface="Calibri" panose="020F0502020204030204" pitchFamily="34" charset="0"/>
+                <a:latin typeface="+mj-lt"/>
                 <a:ea typeface="Calibri" panose="020F0502020204030204" pitchFamily="34" charset="0"/>
                 <a:cs typeface="Calibri" panose="020F0502020204030204" pitchFamily="34" charset="0"/>
               </a:rPr>
-              <a:t>Try solutions {h, …}</a:t>
+              <a:t>Try solutions {</a:t>
+            </a:r>
+            <a:r>
+              <a:rPr lang="en-US" dirty="0"/>
+              <a:t>'</a:t>
+            </a:r>
+            <a:r>
+              <a:rPr lang="en-US" dirty="0">
+                <a:latin typeface="+mj-lt"/>
+                <a:ea typeface="Calibri" panose="020F0502020204030204" pitchFamily="34" charset="0"/>
+                <a:cs typeface="Calibri" panose="020F0502020204030204" pitchFamily="34" charset="0"/>
+              </a:rPr>
+              <a:t>h</a:t>
+            </a:r>
+            <a:r>
+              <a:rPr lang="en-US" dirty="0"/>
+              <a:t>'</a:t>
+            </a:r>
+            <a:r>
+              <a:rPr lang="en-US" dirty="0">
+                <a:latin typeface="+mj-lt"/>
+                <a:ea typeface="Calibri" panose="020F0502020204030204" pitchFamily="34" charset="0"/>
+                <a:cs typeface="Calibri" panose="020F0502020204030204" pitchFamily="34" charset="0"/>
+              </a:rPr>
+              <a:t>, …}</a:t>
             </a:r>
           </a:p>
         </p:txBody>
@@ -15316,7 +13850,7 @@
                   <a:srgbClr val="0000FF"/>
                 </a:solidFill>
               </a:rPr>
-              <a:t>countValue</a:t>
+              <a:t>count_occur</a:t>
             </a:r>
             <a:r>
               <a:rPr lang="en-US" sz="2400" dirty="0">
@@ -15720,7 +14254,7 @@
                 <a:latin typeface="Courier New" pitchFamily="49" charset="0"/>
                 <a:cs typeface="Courier New" pitchFamily="49" charset="0"/>
               </a:rPr>
-              <a:t>countValue_iter</a:t>
+              <a:t>count_occur</a:t>
             </a:r>
             <a:r>
               <a:rPr lang="en-US" sz="2000" b="1" dirty="0">
@@ -16392,7 +14926,7 @@
         <p:spPr>
           <a:xfrm>
             <a:off x="454709" y="1467358"/>
-            <a:ext cx="7175284" cy="984885"/>
+            <a:ext cx="7308166" cy="984885"/>
           </a:xfrm>
           <a:prstGeom prst="rect">
             <a:avLst/>
@@ -16422,7 +14956,7 @@
                   <a:srgbClr val="0000FF"/>
                 </a:solidFill>
               </a:rPr>
-              <a:t>countValue</a:t>
+              <a:t>count_occur</a:t>
             </a:r>
             <a:r>
               <a:rPr lang="en-US" sz="2400" dirty="0">
@@ -17792,7 +16326,7 @@
         <p:spPr>
           <a:xfrm>
             <a:off x="486697" y="1474041"/>
-            <a:ext cx="8200103" cy="3785652"/>
+            <a:ext cx="8200103" cy="4093428"/>
           </a:xfrm>
           <a:prstGeom prst="rect">
             <a:avLst/>
@@ -17848,7 +16382,7 @@
                 <a:latin typeface="Courier New" pitchFamily="49" charset="0"/>
                 <a:cs typeface="Courier New" pitchFamily="49" charset="0"/>
               </a:rPr>
-              <a:t>countValue</a:t>
+              <a:t>count_occur</a:t>
             </a:r>
             <a:r>
               <a:rPr lang="en-US" sz="2000" b="1" dirty="0">
@@ -17873,6 +16407,19 @@
                 <a:cs typeface="Courier New" pitchFamily="49" charset="0"/>
               </a:rPr>
               <a:t> value, </a:t>
+            </a:r>
+            <a:br>
+              <a:rPr lang="en-US" sz="2000" b="1" dirty="0">
+                <a:latin typeface="Courier New" pitchFamily="49" charset="0"/>
+                <a:cs typeface="Courier New" pitchFamily="49" charset="0"/>
+              </a:rPr>
+            </a:br>
+            <a:r>
+              <a:rPr lang="en-US" sz="2000" b="1" dirty="0">
+                <a:latin typeface="Courier New" pitchFamily="49" charset="0"/>
+                <a:cs typeface="Courier New" pitchFamily="49" charset="0"/>
+              </a:rPr>
+              <a:t>                 </a:t>
             </a:r>
             <a:r>
               <a:rPr lang="en-US" sz="2000" b="1" dirty="0">
@@ -18115,33 +16662,30 @@
             </a:r>
             <a:r>
               <a:rPr lang="en-US" sz="2000" b="1" dirty="0" err="1">
+                <a:latin typeface="Courier New" pitchFamily="49" charset="0"/>
+                <a:cs typeface="Courier New" pitchFamily="49" charset="0"/>
+              </a:rPr>
+              <a:t>count_occur</a:t>
+            </a:r>
+            <a:r>
+              <a:rPr lang="en-US" sz="2000" b="1" dirty="0">
                 <a:solidFill>
                   <a:schemeClr val="tx1"/>
                 </a:solidFill>
                 <a:latin typeface="Courier New" pitchFamily="49" charset="0"/>
                 <a:cs typeface="Courier New" pitchFamily="49" charset="0"/>
               </a:rPr>
-              <a:t>countValue</a:t>
-            </a:r>
-            <a:r>
-              <a:rPr lang="en-US" sz="2000" b="1" dirty="0">
+              <a:t>(value, </a:t>
+            </a:r>
+            <a:r>
+              <a:rPr lang="en-US" sz="2000" b="1" dirty="0" err="1">
                 <a:solidFill>
                   <a:schemeClr val="tx1"/>
                 </a:solidFill>
                 <a:latin typeface="Courier New" pitchFamily="49" charset="0"/>
                 <a:cs typeface="Courier New" pitchFamily="49" charset="0"/>
               </a:rPr>
-              <a:t>(value, </a:t>
-            </a:r>
-            <a:r>
-              <a:rPr lang="en-US" sz="2000" b="1" dirty="0" err="1">
-                <a:solidFill>
-                  <a:schemeClr val="tx1"/>
-                </a:solidFill>
-                <a:latin typeface="Courier New" pitchFamily="49" charset="0"/>
-                <a:cs typeface="Courier New" pitchFamily="49" charset="0"/>
-              </a:rPr>
-              <a:t>arr</a:t>
+              <a:t>narr</a:t>
             </a:r>
             <a:r>
               <a:rPr lang="en-US" sz="2000" b="1" dirty="0">
@@ -18475,7 +17019,7 @@
                   <a:schemeClr val="tx1"/>
                 </a:solidFill>
               </a:rPr>
-              <a:t>countValue</a:t>
+              <a:t>count_occur</a:t>
             </a:r>
             <a:r>
               <a:rPr lang="en-US" sz="1800" dirty="0">
@@ -18508,7 +17052,7 @@
                   <a:schemeClr val="tx1"/>
                 </a:solidFill>
               </a:rPr>
-              <a:t>countValue</a:t>
+              <a:t>count_occur</a:t>
             </a:r>
             <a:r>
               <a:rPr lang="en-US" sz="1800" dirty="0">
@@ -18556,7 +17100,7 @@
                   <a:schemeClr val="tx1"/>
                 </a:solidFill>
               </a:rPr>
-              <a:t>countValue</a:t>
+              <a:t>count_occur</a:t>
             </a:r>
             <a:r>
               <a:rPr lang="en-US" sz="1800" dirty="0">
@@ -18709,7 +17253,7 @@
                             </p:stCondLst>
                             <p:childTnLst>
                               <p:par>
-                                <p:cTn id="5" presetID="9" presetClass="entr" presetSubtype="0" fill="hold" grpId="0" nodeType="clickEffect">
+                                <p:cTn id="5" presetID="1" presetClass="entr" presetSubtype="0" fill="hold" grpId="0" nodeType="clickEffect">
                                   <p:stCondLst>
                                     <p:cond delay="0"/>
                                   </p:stCondLst>
@@ -18722,7 +17266,7 @@
                                           </p:stCondLst>
                                         </p:cTn>
                                         <p:tgtEl>
-                                          <p:spTgt spid="40"/>
+                                          <p:spTgt spid="6"/>
                                         </p:tgtEl>
                                         <p:attrNameLst>
                                           <p:attrName>style.visibility</p:attrName>
@@ -18732,14 +17276,6 @@
                                         <p:strVal val="visible"/>
                                       </p:to>
                                     </p:set>
-                                    <p:animEffect transition="in" filter="dissolve">
-                                      <p:cBhvr>
-                                        <p:cTn id="7" dur="500"/>
-                                        <p:tgtEl>
-                                          <p:spTgt spid="40"/>
-                                        </p:tgtEl>
-                                      </p:cBhvr>
-                                    </p:animEffect>
                                   </p:childTnLst>
                                 </p:cTn>
                               </p:par>
@@ -18771,7 +17307,7 @@
       </p:par>
     </p:tnLst>
     <p:bldLst>
-      <p:bldP spid="40" grpId="0" animBg="1"/>
+      <p:bldP spid="6" grpId="0" animBg="1"/>
     </p:bldLst>
   </p:timing>
 </p:sld>
@@ -18867,7 +17403,7 @@
                   <a:srgbClr val="0000FF"/>
                 </a:solidFill>
               </a:rPr>
-              <a:t>countValue</a:t>
+              <a:t>count_occur</a:t>
             </a:r>
             <a:r>
               <a:rPr lang="en-US" sz="2400" dirty="0">
@@ -20237,7 +18773,7 @@
         <p:spPr>
           <a:xfrm>
             <a:off x="649666" y="1357072"/>
-            <a:ext cx="8177048" cy="4401205"/>
+            <a:ext cx="8177048" cy="3970318"/>
           </a:xfrm>
           <a:prstGeom prst="rect">
             <a:avLst/>
@@ -20272,7 +18808,7 @@
               <a:defRPr/>
             </a:pPr>
             <a:r>
-              <a:rPr lang="en-US" sz="2000" b="1" dirty="0">
+              <a:rPr lang="en-US" b="1" dirty="0">
                 <a:solidFill>
                   <a:srgbClr val="0000FF"/>
                 </a:solidFill>
@@ -20282,14 +18818,28 @@
               <a:t>long</a:t>
             </a:r>
             <a:r>
-              <a:rPr lang="en-US" sz="2000" b="1" dirty="0">
-                <a:latin typeface="Courier New" pitchFamily="49" charset="0"/>
-                <a:cs typeface="Courier New" pitchFamily="49" charset="0"/>
-              </a:rPr>
-              <a:t> countValue_v2(</a:t>
-            </a:r>
-            <a:r>
-              <a:rPr lang="en-US" sz="2000" b="1" dirty="0">
+              <a:rPr lang="en-US" b="1" dirty="0">
+                <a:latin typeface="Courier New" pitchFamily="49" charset="0"/>
+                <a:cs typeface="Courier New" pitchFamily="49" charset="0"/>
+              </a:rPr>
+              <a:t> </a:t>
+            </a:r>
+            <a:r>
+              <a:rPr lang="en-US" b="1" dirty="0" err="1">
+                <a:latin typeface="Courier New" pitchFamily="49" charset="0"/>
+                <a:cs typeface="Courier New" pitchFamily="49" charset="0"/>
+              </a:rPr>
+              <a:t>count_occur_helper</a:t>
+            </a:r>
+            <a:r>
+              <a:rPr lang="en-US" b="1" dirty="0">
+                <a:latin typeface="Courier New" pitchFamily="49" charset="0"/>
+                <a:cs typeface="Courier New" pitchFamily="49" charset="0"/>
+              </a:rPr>
+              <a:t>(</a:t>
+            </a:r>
+            <a:r>
+              <a:rPr lang="en-US" b="1" dirty="0">
                 <a:solidFill>
                   <a:srgbClr val="0000FF"/>
                 </a:solidFill>
@@ -20299,14 +18849,14 @@
               <a:t>long</a:t>
             </a:r>
             <a:r>
-              <a:rPr lang="en-US" sz="2000" b="1" dirty="0">
+              <a:rPr lang="en-US" b="1" dirty="0">
                 <a:latin typeface="Courier New" pitchFamily="49" charset="0"/>
                 <a:cs typeface="Courier New" pitchFamily="49" charset="0"/>
               </a:rPr>
               <a:t> value, </a:t>
             </a:r>
             <a:r>
-              <a:rPr lang="en-US" sz="2000" b="1" dirty="0">
+              <a:rPr lang="en-US" b="1" dirty="0">
                 <a:solidFill>
                   <a:srgbClr val="0000FF"/>
                 </a:solidFill>
@@ -20316,21 +18866,21 @@
               <a:t>long</a:t>
             </a:r>
             <a:r>
-              <a:rPr lang="en-US" sz="2000" b="1" dirty="0">
+              <a:rPr lang="en-US" b="1" dirty="0">
                 <a:latin typeface="Courier New" pitchFamily="49" charset="0"/>
                 <a:cs typeface="Courier New" pitchFamily="49" charset="0"/>
               </a:rPr>
               <a:t> </a:t>
             </a:r>
             <a:r>
-              <a:rPr lang="en-US" sz="2000" b="1" dirty="0" err="1">
+              <a:rPr lang="en-US" b="1" dirty="0" err="1">
                 <a:latin typeface="Courier New" pitchFamily="49" charset="0"/>
                 <a:cs typeface="Courier New" pitchFamily="49" charset="0"/>
               </a:rPr>
               <a:t>arr</a:t>
             </a:r>
             <a:r>
-              <a:rPr lang="en-US" sz="2000" b="1" dirty="0">
+              <a:rPr lang="en-US" b="1" dirty="0">
                 <a:latin typeface="Courier New" pitchFamily="49" charset="0"/>
                 <a:cs typeface="Courier New" pitchFamily="49" charset="0"/>
               </a:rPr>
@@ -20347,24 +18897,24 @@
               <a:defRPr/>
             </a:pPr>
             <a:r>
-              <a:rPr lang="en-US" sz="2000" b="1" dirty="0">
+              <a:rPr lang="en-US" b="1" dirty="0">
                 <a:solidFill>
                   <a:srgbClr val="0000FF"/>
                 </a:solidFill>
                 <a:latin typeface="Courier New" pitchFamily="49" charset="0"/>
                 <a:cs typeface="Courier New" pitchFamily="49" charset="0"/>
               </a:rPr>
-              <a:t>                   long</a:t>
-            </a:r>
-            <a:r>
-              <a:rPr lang="en-US" sz="2000" b="1" dirty="0">
+              <a:t>                        long</a:t>
+            </a:r>
+            <a:r>
+              <a:rPr lang="en-US" b="1" dirty="0">
                 <a:latin typeface="Courier New" pitchFamily="49" charset="0"/>
                 <a:cs typeface="Courier New" pitchFamily="49" charset="0"/>
               </a:rPr>
               <a:t> start, </a:t>
             </a:r>
             <a:r>
-              <a:rPr lang="en-US" sz="2000" b="1" dirty="0">
+              <a:rPr lang="en-US" b="1" dirty="0">
                 <a:solidFill>
                   <a:srgbClr val="0000FF"/>
                 </a:solidFill>
@@ -20374,7 +18924,7 @@
               <a:t>long</a:t>
             </a:r>
             <a:r>
-              <a:rPr lang="en-US" sz="2000" b="1" dirty="0">
+              <a:rPr lang="en-US" b="1" dirty="0">
                 <a:latin typeface="Courier New" pitchFamily="49" charset="0"/>
                 <a:cs typeface="Courier New" pitchFamily="49" charset="0"/>
               </a:rPr>
@@ -20391,14 +18941,14 @@
               <a:defRPr/>
             </a:pPr>
             <a:r>
-              <a:rPr lang="en-US" sz="2000" b="1" dirty="0">
+              <a:rPr lang="en-US" b="1" dirty="0">
                 <a:latin typeface="Courier New" pitchFamily="49" charset="0"/>
                 <a:cs typeface="Courier New" pitchFamily="49" charset="0"/>
               </a:rPr>
               <a:t>  </a:t>
             </a:r>
             <a:r>
-              <a:rPr lang="en-US" sz="2000" b="1" dirty="0">
+              <a:rPr lang="en-US" b="1" dirty="0">
                 <a:solidFill>
                   <a:srgbClr val="0000FF"/>
                 </a:solidFill>
@@ -20408,7 +18958,7 @@
               <a:t>if</a:t>
             </a:r>
             <a:r>
-              <a:rPr lang="en-US" sz="2000" b="1" dirty="0">
+              <a:rPr lang="en-US" b="1" dirty="0">
                 <a:latin typeface="Courier New" pitchFamily="49" charset="0"/>
                 <a:cs typeface="Courier New" pitchFamily="49" charset="0"/>
               </a:rPr>
@@ -20425,14 +18975,14 @@
               <a:defRPr/>
             </a:pPr>
             <a:r>
-              <a:rPr lang="en-US" sz="2000" b="1" dirty="0">
+              <a:rPr lang="en-US" b="1" dirty="0">
                 <a:latin typeface="Courier New" pitchFamily="49" charset="0"/>
                 <a:cs typeface="Courier New" pitchFamily="49" charset="0"/>
               </a:rPr>
               <a:t>    </a:t>
             </a:r>
             <a:r>
-              <a:rPr lang="en-US" sz="2000" b="1" dirty="0">
+              <a:rPr lang="en-US" b="1" dirty="0">
                 <a:solidFill>
                   <a:srgbClr val="0000FF"/>
                 </a:solidFill>
@@ -20442,14 +18992,14 @@
               <a:t>return</a:t>
             </a:r>
             <a:r>
-              <a:rPr lang="en-US" sz="2000" b="1" dirty="0">
+              <a:rPr lang="en-US" b="1" dirty="0">
                 <a:latin typeface="Courier New" pitchFamily="49" charset="0"/>
                 <a:cs typeface="Courier New" pitchFamily="49" charset="0"/>
               </a:rPr>
               <a:t> </a:t>
             </a:r>
             <a:r>
-              <a:rPr lang="en-US" sz="2000" b="1" dirty="0">
+              <a:rPr lang="en-US" b="1" dirty="0">
                 <a:solidFill>
                   <a:srgbClr val="C00000"/>
                 </a:solidFill>
@@ -20459,7 +19009,7 @@
               <a:t>0</a:t>
             </a:r>
             <a:r>
-              <a:rPr lang="en-US" sz="2000" b="1" dirty="0">
+              <a:rPr lang="en-US" b="1" dirty="0">
                 <a:latin typeface="Courier New" pitchFamily="49" charset="0"/>
                 <a:cs typeface="Courier New" pitchFamily="49" charset="0"/>
               </a:rPr>
@@ -20476,14 +19026,14 @@
               <a:defRPr/>
             </a:pPr>
             <a:r>
-              <a:rPr lang="en-US" sz="2000" b="1" dirty="0">
+              <a:rPr lang="en-US" b="1" dirty="0">
                 <a:latin typeface="Courier New" pitchFamily="49" charset="0"/>
                 <a:cs typeface="Courier New" pitchFamily="49" charset="0"/>
               </a:rPr>
               <a:t>	</a:t>
             </a:r>
             <a:r>
-              <a:rPr lang="en-US" sz="2000" b="1" dirty="0">
+              <a:rPr lang="en-US" b="1" dirty="0">
                 <a:solidFill>
                   <a:srgbClr val="0000FF"/>
                 </a:solidFill>
@@ -20503,7 +19053,7 @@
               <a:defRPr/>
             </a:pPr>
             <a:r>
-              <a:rPr lang="en-US" sz="2000" b="1" dirty="0">
+              <a:rPr lang="en-US" b="1" dirty="0">
                 <a:solidFill>
                   <a:srgbClr val="0000FF"/>
                 </a:solidFill>
@@ -20513,27 +19063,44 @@
               <a:t>    long</a:t>
             </a:r>
             <a:r>
-              <a:rPr lang="en-US" sz="2000" b="1" dirty="0">
+              <a:rPr lang="en-US" b="1" dirty="0">
                 <a:solidFill>
                   <a:schemeClr val="tx1"/>
                 </a:solidFill>
                 <a:latin typeface="Courier New" pitchFamily="49" charset="0"/>
                 <a:cs typeface="Courier New" pitchFamily="49" charset="0"/>
               </a:rPr>
-              <a:t> answer = countValue_v2(value, </a:t>
-            </a:r>
-            <a:r>
-              <a:rPr lang="en-US" sz="2000" b="1" dirty="0" err="1">
+              <a:t> answer = </a:t>
+            </a:r>
+            <a:r>
+              <a:rPr lang="en-US" b="1" dirty="0" err="1">
+                <a:latin typeface="Courier New" pitchFamily="49" charset="0"/>
+                <a:cs typeface="Courier New" pitchFamily="49" charset="0"/>
+              </a:rPr>
+              <a:t>count_occur_helper</a:t>
+            </a:r>
+            <a:r>
+              <a:rPr lang="en-US" b="1" dirty="0">
                 <a:solidFill>
                   <a:schemeClr val="tx1"/>
                 </a:solidFill>
                 <a:latin typeface="Courier New" pitchFamily="49" charset="0"/>
                 <a:cs typeface="Courier New" pitchFamily="49" charset="0"/>
               </a:rPr>
+              <a:t>(value, </a:t>
+            </a:r>
+            <a:r>
+              <a:rPr lang="en-US" b="1" dirty="0" err="1">
+                <a:solidFill>
+                  <a:schemeClr val="tx1"/>
+                </a:solidFill>
+                <a:latin typeface="Courier New" pitchFamily="49" charset="0"/>
+                <a:cs typeface="Courier New" pitchFamily="49" charset="0"/>
+              </a:rPr>
               <a:t>arr</a:t>
             </a:r>
             <a:r>
-              <a:rPr lang="en-US" sz="2000" b="1" dirty="0">
+              <a:rPr lang="en-US" b="1" dirty="0">
                 <a:solidFill>
                   <a:schemeClr val="tx1"/>
                 </a:solidFill>
@@ -20543,7 +19110,7 @@
               <a:t>, </a:t>
             </a:r>
             <a:br>
-              <a:rPr lang="en-US" sz="2000" b="1" dirty="0">
+              <a:rPr lang="en-US" b="1" dirty="0">
                 <a:solidFill>
                   <a:schemeClr val="tx1"/>
                 </a:solidFill>
@@ -20552,7 +19119,7 @@
               </a:rPr>
             </a:br>
             <a:r>
-              <a:rPr lang="en-US" sz="2000" b="1" dirty="0">
+              <a:rPr lang="en-US" b="1" dirty="0">
                 <a:solidFill>
                   <a:schemeClr val="tx1"/>
                 </a:solidFill>
@@ -20562,7 +19129,7 @@
               <a:t>                             start+</a:t>
             </a:r>
             <a:r>
-              <a:rPr lang="en-US" sz="2000" b="1" dirty="0">
+              <a:rPr lang="en-US" b="1" dirty="0">
                 <a:solidFill>
                   <a:srgbClr val="C00000"/>
                 </a:solidFill>
@@ -20572,7 +19139,7 @@
               <a:t>1</a:t>
             </a:r>
             <a:r>
-              <a:rPr lang="en-US" sz="2000" b="1" dirty="0">
+              <a:rPr lang="en-US" b="1" dirty="0">
                 <a:solidFill>
                   <a:schemeClr val="tx1"/>
                 </a:solidFill>
@@ -20581,7 +19148,7 @@
               </a:rPr>
               <a:t>, size);</a:t>
             </a:r>
-            <a:endParaRPr lang="en-US" sz="2000" b="1" dirty="0">
+            <a:endParaRPr lang="en-US" b="1" dirty="0">
               <a:solidFill>
                 <a:srgbClr val="0000FF"/>
               </a:solidFill>
@@ -20599,7 +19166,7 @@
               <a:defRPr/>
             </a:pPr>
             <a:r>
-              <a:rPr lang="en-US" sz="2000" b="1" dirty="0">
+              <a:rPr lang="en-US" b="1" dirty="0">
                 <a:solidFill>
                   <a:srgbClr val="0000FF"/>
                 </a:solidFill>
@@ -20609,7 +19176,7 @@
               <a:t>    if </a:t>
             </a:r>
             <a:r>
-              <a:rPr lang="en-US" sz="2000" b="1" dirty="0">
+              <a:rPr lang="en-US" b="1" dirty="0">
                 <a:solidFill>
                   <a:schemeClr val="tx1"/>
                 </a:solidFill>
@@ -20619,7 +19186,7 @@
               <a:t>(value == </a:t>
             </a:r>
             <a:r>
-              <a:rPr lang="en-US" sz="2000" b="1" dirty="0" err="1">
+              <a:rPr lang="en-US" b="1" dirty="0" err="1">
                 <a:solidFill>
                   <a:schemeClr val="tx1"/>
                 </a:solidFill>
@@ -20629,7 +19196,7 @@
               <a:t>arr</a:t>
             </a:r>
             <a:r>
-              <a:rPr lang="en-US" sz="2000" b="1" dirty="0">
+              <a:rPr lang="en-US" b="1" dirty="0">
                 <a:solidFill>
                   <a:schemeClr val="tx1"/>
                 </a:solidFill>
@@ -20649,7 +19216,7 @@
               <a:defRPr/>
             </a:pPr>
             <a:r>
-              <a:rPr lang="en-US" sz="2000" b="1" dirty="0">
+              <a:rPr lang="en-US" b="1" dirty="0">
                 <a:solidFill>
                   <a:srgbClr val="006600"/>
                 </a:solidFill>
@@ -20659,7 +19226,7 @@
               <a:t>      </a:t>
             </a:r>
             <a:r>
-              <a:rPr lang="en-US" sz="2000" b="1" dirty="0">
+              <a:rPr lang="en-US" b="1" dirty="0">
                 <a:solidFill>
                   <a:srgbClr val="0000FF"/>
                 </a:solidFill>
@@ -20669,7 +19236,7 @@
               <a:t>return </a:t>
             </a:r>
             <a:r>
-              <a:rPr lang="en-US" sz="2000" b="1" dirty="0">
+              <a:rPr lang="en-US" b="1" dirty="0">
                 <a:solidFill>
                   <a:srgbClr val="C00000"/>
                 </a:solidFill>
@@ -20679,7 +19246,7 @@
               <a:t>1</a:t>
             </a:r>
             <a:r>
-              <a:rPr lang="en-US" sz="2000" b="1" dirty="0">
+              <a:rPr lang="en-US" b="1" dirty="0">
                 <a:solidFill>
                   <a:schemeClr val="tx1"/>
                 </a:solidFill>
@@ -20699,7 +19266,7 @@
               <a:defRPr/>
             </a:pPr>
             <a:r>
-              <a:rPr lang="en-US" sz="2000" b="1" dirty="0">
+              <a:rPr lang="en-US" b="1" dirty="0">
                 <a:solidFill>
                   <a:schemeClr val="tx1"/>
                 </a:solidFill>
@@ -20709,7 +19276,7 @@
               <a:t>    } </a:t>
             </a:r>
             <a:r>
-              <a:rPr lang="en-US" sz="2000" b="1" dirty="0">
+              <a:rPr lang="en-US" b="1" dirty="0">
                 <a:solidFill>
                   <a:srgbClr val="0000FF"/>
                 </a:solidFill>
@@ -20719,7 +19286,7 @@
               <a:t>else</a:t>
             </a:r>
             <a:r>
-              <a:rPr lang="en-US" sz="2000" b="1" dirty="0">
+              <a:rPr lang="en-US" b="1" dirty="0">
                 <a:solidFill>
                   <a:schemeClr val="tx1"/>
                 </a:solidFill>
@@ -20739,7 +19306,7 @@
               <a:defRPr/>
             </a:pPr>
             <a:r>
-              <a:rPr lang="en-US" sz="2000" b="1" dirty="0">
+              <a:rPr lang="en-US" b="1" dirty="0">
                 <a:solidFill>
                   <a:srgbClr val="0000FF"/>
                 </a:solidFill>
@@ -20749,7 +19316,7 @@
               <a:t>      return </a:t>
             </a:r>
             <a:r>
-              <a:rPr lang="en-US" sz="2000" b="1" dirty="0">
+              <a:rPr lang="en-US" b="1" dirty="0">
                 <a:solidFill>
                   <a:schemeClr val="tx1"/>
                 </a:solidFill>
@@ -20769,7 +19336,7 @@
               <a:defRPr/>
             </a:pPr>
             <a:r>
-              <a:rPr lang="en-US" sz="2000" b="1" dirty="0">
+              <a:rPr lang="en-US" b="1" dirty="0">
                 <a:solidFill>
                   <a:schemeClr val="tx1"/>
                 </a:solidFill>
@@ -20789,7 +19356,7 @@
               <a:defRPr/>
             </a:pPr>
             <a:r>
-              <a:rPr lang="en-US" sz="2000" b="1" dirty="0">
+              <a:rPr lang="en-US" b="1" dirty="0">
                 <a:solidFill>
                   <a:schemeClr val="tx1"/>
                 </a:solidFill>
@@ -20809,7 +19376,7 @@
               <a:defRPr/>
             </a:pPr>
             <a:r>
-              <a:rPr lang="en-US" sz="2000" b="1" dirty="0">
+              <a:rPr lang="en-US" b="1" dirty="0">
                 <a:latin typeface="Courier New" pitchFamily="49" charset="0"/>
                 <a:cs typeface="Courier New" pitchFamily="49" charset="0"/>
               </a:rPr>
@@ -20832,8 +19399,8 @@
         </p:nvSpPr>
         <p:spPr>
           <a:xfrm>
-            <a:off x="649666" y="5747748"/>
-            <a:ext cx="8177048" cy="1015663"/>
+            <a:off x="649666" y="5328648"/>
+            <a:ext cx="8177048" cy="923330"/>
           </a:xfrm>
           <a:prstGeom prst="rect">
             <a:avLst/>
@@ -20868,7 +19435,7 @@
               <a:defRPr/>
             </a:pPr>
             <a:r>
-              <a:rPr lang="en-US" sz="2000" b="1" dirty="0">
+              <a:rPr lang="en-US" b="1" dirty="0">
                 <a:solidFill>
                   <a:srgbClr val="0000FF"/>
                 </a:solidFill>
@@ -20878,28 +19445,28 @@
               <a:t>long</a:t>
             </a:r>
             <a:r>
-              <a:rPr lang="en-US" sz="2000" b="1" dirty="0">
+              <a:rPr lang="en-US" b="1" dirty="0">
                 <a:latin typeface="Courier New" pitchFamily="49" charset="0"/>
                 <a:cs typeface="Courier New" pitchFamily="49" charset="0"/>
               </a:rPr>
               <a:t> </a:t>
             </a:r>
             <a:r>
-              <a:rPr lang="en-US" sz="2000" b="1" dirty="0" err="1">
-                <a:latin typeface="Courier New" pitchFamily="49" charset="0"/>
-                <a:cs typeface="Courier New" pitchFamily="49" charset="0"/>
-              </a:rPr>
-              <a:t>countValue</a:t>
-            </a:r>
-            <a:r>
-              <a:rPr lang="en-US" sz="2000" b="1" dirty="0">
+              <a:rPr lang="en-US" b="1" dirty="0" err="1">
+                <a:latin typeface="Courier New" pitchFamily="49" charset="0"/>
+                <a:cs typeface="Courier New" pitchFamily="49" charset="0"/>
+              </a:rPr>
+              <a:t>count_occur</a:t>
+            </a:r>
+            <a:r>
+              <a:rPr lang="en-US" b="1" dirty="0">
                 <a:latin typeface="Courier New" pitchFamily="49" charset="0"/>
                 <a:cs typeface="Courier New" pitchFamily="49" charset="0"/>
               </a:rPr>
               <a:t>(</a:t>
             </a:r>
             <a:r>
-              <a:rPr lang="en-US" sz="2000" b="1" dirty="0">
+              <a:rPr lang="en-US" b="1" dirty="0">
                 <a:solidFill>
                   <a:srgbClr val="0000FF"/>
                 </a:solidFill>
@@ -20909,14 +19476,14 @@
               <a:t>long</a:t>
             </a:r>
             <a:r>
-              <a:rPr lang="en-US" sz="2000" b="1" dirty="0">
+              <a:rPr lang="en-US" b="1" dirty="0">
                 <a:latin typeface="Courier New" pitchFamily="49" charset="0"/>
                 <a:cs typeface="Courier New" pitchFamily="49" charset="0"/>
               </a:rPr>
               <a:t> value, </a:t>
             </a:r>
             <a:r>
-              <a:rPr lang="en-US" sz="2000" b="1" dirty="0">
+              <a:rPr lang="en-US" b="1" dirty="0">
                 <a:solidFill>
                   <a:srgbClr val="0000FF"/>
                 </a:solidFill>
@@ -20926,28 +19493,28 @@
               <a:t>long</a:t>
             </a:r>
             <a:r>
-              <a:rPr lang="en-US" sz="2000" b="1" dirty="0">
+              <a:rPr lang="en-US" b="1" dirty="0">
                 <a:latin typeface="Courier New" pitchFamily="49" charset="0"/>
                 <a:cs typeface="Courier New" pitchFamily="49" charset="0"/>
               </a:rPr>
               <a:t> </a:t>
             </a:r>
             <a:r>
-              <a:rPr lang="en-US" sz="2000" b="1" dirty="0" err="1">
+              <a:rPr lang="en-US" b="1" dirty="0" err="1">
                 <a:latin typeface="Courier New" pitchFamily="49" charset="0"/>
                 <a:cs typeface="Courier New" pitchFamily="49" charset="0"/>
               </a:rPr>
               <a:t>arr</a:t>
             </a:r>
             <a:r>
-              <a:rPr lang="en-US" sz="2000" b="1" dirty="0">
+              <a:rPr lang="en-US" b="1" dirty="0">
                 <a:latin typeface="Courier New" pitchFamily="49" charset="0"/>
                 <a:cs typeface="Courier New" pitchFamily="49" charset="0"/>
               </a:rPr>
               <a:t>[], </a:t>
             </a:r>
             <a:r>
-              <a:rPr lang="en-US" sz="2000" b="1" dirty="0">
+              <a:rPr lang="en-US" b="1" dirty="0">
                 <a:solidFill>
                   <a:srgbClr val="0000FF"/>
                 </a:solidFill>
@@ -20957,7 +19524,7 @@
               <a:t>long</a:t>
             </a:r>
             <a:r>
-              <a:rPr lang="en-US" sz="2000" b="1" dirty="0">
+              <a:rPr lang="en-US" b="1" dirty="0">
                 <a:latin typeface="Courier New" pitchFamily="49" charset="0"/>
                 <a:cs typeface="Courier New" pitchFamily="49" charset="0"/>
               </a:rPr>
@@ -20974,14 +19541,14 @@
               <a:defRPr/>
             </a:pPr>
             <a:r>
-              <a:rPr lang="en-US" sz="2000" b="1" dirty="0">
+              <a:rPr lang="en-US" b="1" dirty="0">
                 <a:latin typeface="Courier New" pitchFamily="49" charset="0"/>
                 <a:cs typeface="Courier New" pitchFamily="49" charset="0"/>
               </a:rPr>
               <a:t>  </a:t>
             </a:r>
             <a:r>
-              <a:rPr lang="en-US" sz="2000" b="1" dirty="0">
+              <a:rPr lang="en-US" b="1" dirty="0">
                 <a:solidFill>
                   <a:srgbClr val="0000FF"/>
                 </a:solidFill>
@@ -20991,27 +19558,37 @@
               <a:t>return </a:t>
             </a:r>
             <a:r>
-              <a:rPr lang="en-US" sz="2000" b="1" dirty="0">
+              <a:rPr lang="en-US" b="1" dirty="0" err="1">
                 <a:solidFill>
                   <a:schemeClr val="tx1"/>
                 </a:solidFill>
                 <a:latin typeface="Courier New" pitchFamily="49" charset="0"/>
                 <a:cs typeface="Courier New" pitchFamily="49" charset="0"/>
               </a:rPr>
-              <a:t>countValue_v2(value, </a:t>
-            </a:r>
-            <a:r>
-              <a:rPr lang="en-US" sz="2000" b="1" dirty="0" err="1">
+              <a:t>count_occur_helper</a:t>
+            </a:r>
+            <a:r>
+              <a:rPr lang="en-US" b="1" dirty="0">
                 <a:solidFill>
                   <a:schemeClr val="tx1"/>
                 </a:solidFill>
                 <a:latin typeface="Courier New" pitchFamily="49" charset="0"/>
                 <a:cs typeface="Courier New" pitchFamily="49" charset="0"/>
               </a:rPr>
+              <a:t>(value, </a:t>
+            </a:r>
+            <a:r>
+              <a:rPr lang="en-US" b="1" dirty="0" err="1">
+                <a:solidFill>
+                  <a:schemeClr val="tx1"/>
+                </a:solidFill>
+                <a:latin typeface="Courier New" pitchFamily="49" charset="0"/>
+                <a:cs typeface="Courier New" pitchFamily="49" charset="0"/>
+              </a:rPr>
               <a:t>arr</a:t>
             </a:r>
             <a:r>
-              <a:rPr lang="en-US" sz="2000" b="1" dirty="0">
+              <a:rPr lang="en-US" b="1" dirty="0">
                 <a:solidFill>
                   <a:schemeClr val="tx1"/>
                 </a:solidFill>
@@ -21021,7 +19598,7 @@
               <a:t>, </a:t>
             </a:r>
             <a:r>
-              <a:rPr lang="en-US" sz="2000" b="1" dirty="0">
+              <a:rPr lang="en-US" b="1" dirty="0">
                 <a:solidFill>
                   <a:srgbClr val="C00000"/>
                 </a:solidFill>
@@ -21031,7 +19608,7 @@
               <a:t>0</a:t>
             </a:r>
             <a:r>
-              <a:rPr lang="en-US" sz="2000" b="1" dirty="0">
+              <a:rPr lang="en-US" b="1" dirty="0">
                 <a:solidFill>
                   <a:schemeClr val="tx1"/>
                 </a:solidFill>
@@ -21051,7 +19628,7 @@
               <a:defRPr/>
             </a:pPr>
             <a:r>
-              <a:rPr lang="en-US" sz="2000" b="1" dirty="0">
+              <a:rPr lang="en-US" b="1" dirty="0">
                 <a:solidFill>
                   <a:schemeClr val="tx1"/>
                 </a:solidFill>
@@ -21060,7 +19637,7 @@
               </a:rPr>
               <a:t>}</a:t>
             </a:r>
-            <a:endParaRPr lang="en-US" sz="2000" b="1" dirty="0">
+            <a:endParaRPr lang="en-US" b="1" dirty="0">
               <a:latin typeface="Courier New" pitchFamily="49" charset="0"/>
               <a:cs typeface="Courier New" pitchFamily="49" charset="0"/>
             </a:endParaRPr>
@@ -21081,8 +19658,8 @@
         </p:nvSpPr>
         <p:spPr>
           <a:xfrm>
-            <a:off x="5288500" y="4132548"/>
-            <a:ext cx="3398300" cy="1477328"/>
+            <a:off x="4286251" y="3675348"/>
+            <a:ext cx="4400550" cy="1477328"/>
           </a:xfrm>
           <a:prstGeom prst="rect">
             <a:avLst/>
@@ -21133,7 +19710,7 @@
                   <a:schemeClr val="tx1"/>
                 </a:solidFill>
               </a:rPr>
-              <a:t>countValue</a:t>
+              <a:t>count_occur</a:t>
             </a:r>
             <a:r>
               <a:rPr lang="en-US" sz="1800" dirty="0">
@@ -21160,12 +19737,20 @@
               </a:rPr>
             </a:br>
             <a:r>
+              <a:rPr lang="en-US" sz="1800" dirty="0" err="1">
+                <a:solidFill>
+                  <a:schemeClr val="tx1"/>
+                </a:solidFill>
+              </a:rPr>
+              <a:t>count_occur_helper</a:t>
+            </a:r>
+            <a:r>
               <a:rPr lang="en-US" sz="1800" dirty="0">
                 <a:solidFill>
                   <a:schemeClr val="tx1"/>
                 </a:solidFill>
               </a:rPr>
-              <a:t>countValue_v2(7, list, 0, 15) </a:t>
+              <a:t>(7, list, 0, 15) </a:t>
             </a:r>
             <a:r>
               <a:rPr lang="en-US" sz="1800" dirty="0">
@@ -21185,12 +19770,20 @@
               </a:rPr>
             </a:br>
             <a:r>
+              <a:rPr lang="en-US" dirty="0" err="1">
+                <a:solidFill>
+                  <a:schemeClr val="tx1"/>
+                </a:solidFill>
+              </a:rPr>
+              <a:t>count_occur_helper</a:t>
+            </a:r>
+            <a:r>
               <a:rPr lang="en-US" sz="1800" dirty="0">
                 <a:solidFill>
                   <a:schemeClr val="tx1"/>
                 </a:solidFill>
               </a:rPr>
-              <a:t>countValue_v2(7, list, 1, 15) </a:t>
+              <a:t>(7, list, 1, 15) </a:t>
             </a:r>
             <a:r>
               <a:rPr lang="en-US" sz="1800" dirty="0">
@@ -21225,12 +19818,20 @@
               </a:rPr>
             </a:br>
             <a:r>
+              <a:rPr lang="en-US" dirty="0" err="1">
+                <a:solidFill>
+                  <a:schemeClr val="tx1"/>
+                </a:solidFill>
+              </a:rPr>
+              <a:t>count_occur_helper</a:t>
+            </a:r>
+            <a:r>
               <a:rPr lang="en-US" sz="1800" dirty="0">
                 <a:solidFill>
                   <a:schemeClr val="tx1"/>
                 </a:solidFill>
               </a:rPr>
-              <a:t>countValue_v2(7, list, 15, 15)</a:t>
+              <a:t>(7, list, 15, 15)</a:t>
             </a:r>
             <a:endParaRPr lang="en-GB" dirty="0">
               <a:solidFill>
@@ -21533,7 +20134,7 @@
                   <a:srgbClr val="0000FF"/>
                 </a:solidFill>
               </a:rPr>
-              <a:t>countValue</a:t>
+              <a:t>count_occur</a:t>
             </a:r>
             <a:r>
               <a:rPr lang="en-US" sz="2400" dirty="0">
@@ -22742,7 +21343,21 @@
                 <a:latin typeface="Courier New" pitchFamily="49" charset="0"/>
                 <a:cs typeface="Courier New" pitchFamily="49" charset="0"/>
               </a:rPr>
-              <a:t> countValue_v3(</a:t>
+              <a:t> </a:t>
+            </a:r>
+            <a:r>
+              <a:rPr lang="en-US" sz="2000" b="1" dirty="0" err="1">
+                <a:latin typeface="Courier New" pitchFamily="49" charset="0"/>
+                <a:cs typeface="Courier New" pitchFamily="49" charset="0"/>
+              </a:rPr>
+              <a:t>count_occur_helper</a:t>
+            </a:r>
+            <a:r>
+              <a:rPr lang="en-US" sz="2000" b="1" dirty="0">
+                <a:latin typeface="Courier New" pitchFamily="49" charset="0"/>
+                <a:cs typeface="Courier New" pitchFamily="49" charset="0"/>
+              </a:rPr>
+              <a:t>(</a:t>
             </a:r>
             <a:r>
               <a:rPr lang="en-US" sz="2000" b="1" dirty="0">
